--- a/附件4：技術職認證參評報告-2-1&2-2研發工程師.pptx
+++ b/附件4：技術職認證參評報告-2-1&2-2研發工程師.pptx
@@ -1,25 +1,25 @@
 
 <file path=ppt/presentation.xml><?xml version="1.0" encoding="utf-8"?>
-<p:presentation xmlns:a="http://schemas.openxmlformats.org/drawingml/2006/main" xmlns:r="http://schemas.openxmlformats.org/officeDocument/2006/relationships" xmlns:p="http://schemas.openxmlformats.org/presentationml/2006/main" showSpecialPlsOnTitleSld="0" saveSubsetFonts="1" autoCompressPictures="0">
+<p:presentation xmlns:a="http://schemas.openxmlformats.org/drawingml/2006/main" xmlns:r="http://schemas.openxmlformats.org/officeDocument/2006/relationships" xmlns:p="http://schemas.openxmlformats.org/presentationml/2006/main" showSpecialPlsOnTitleSld="0" autoCompressPictures="0">
   <p:sldMasterIdLst>
-    <p:sldMasterId id="2147483670" r:id="rId1"/>
+    <p:sldMasterId id="2147483648" r:id="rId1"/>
   </p:sldMasterIdLst>
   <p:notesMasterIdLst>
-    <p:notesMasterId r:id="rId8"/>
+    <p:notesMasterId r:id="rId4"/>
   </p:notesMasterIdLst>
   <p:handoutMasterIdLst>
-    <p:handoutMasterId r:id="rId9"/>
+    <p:handoutMasterId r:id="rId10"/>
   </p:handoutMasterIdLst>
   <p:sldIdLst>
-    <p:sldId id="282" r:id="rId2"/>
-    <p:sldId id="283" r:id="rId3"/>
-    <p:sldId id="284" r:id="rId4"/>
-    <p:sldId id="285" r:id="rId5"/>
-    <p:sldId id="286" r:id="rId6"/>
-    <p:sldId id="287" r:id="rId7"/>
+    <p:sldId id="282" r:id="rId3"/>
+    <p:sldId id="283" r:id="rId5"/>
+    <p:sldId id="284" r:id="rId6"/>
+    <p:sldId id="285" r:id="rId7"/>
+    <p:sldId id="286" r:id="rId8"/>
+    <p:sldId id="287" r:id="rId9"/>
   </p:sldIdLst>
   <p:sldSz cx="12192000" cy="6858000"/>
-  <p:notesSz cx="6797675" cy="9926638"/>
+  <p:notesSz cx="6797675" cy="9926320"/>
   <p:defaultTextStyle>
     <a:defPPr rtl="0">
       <a:defRPr lang="zh-CN"/>
@@ -115,25 +115,6 @@
       </a:defRPr>
     </a:lvl9pPr>
   </p:defaultTextStyle>
-  <p:extLst>
-    <p:ext uri="{EFAFB233-063F-42B5-8137-9DF3F51BA10A}">
-      <p15:sldGuideLst xmlns:p15="http://schemas.microsoft.com/office/powerpoint/2012/main">
-        <p15:guide id="1" pos="3840" userDrawn="1">
-          <p15:clr>
-            <a:srgbClr val="A4A3A4"/>
-          </p15:clr>
-        </p15:guide>
-        <p15:guide id="2" orient="horz" pos="2160" userDrawn="1">
-          <p15:clr>
-            <a:srgbClr val="A4A3A4"/>
-          </p15:clr>
-        </p15:guide>
-      </p15:sldGuideLst>
-    </p:ext>
-    <p:ext uri="{2D200454-40CA-4A62-9FC3-DE9A4176ACB9}">
-      <p15:notesGuideLst xmlns:p15="http://schemas.microsoft.com/office/powerpoint/2012/main"/>
-    </p:ext>
-  </p:extLst>
 </p:presentation>
 </file>
 
@@ -227,8 +208,6 @@
                 <a:latin typeface="微软雅黑" panose="020B0503020204020204" pitchFamily="34" charset="-122"/>
                 <a:ea typeface="微软雅黑" panose="020B0503020204020204" pitchFamily="34" charset="-122"/>
               </a:rPr>
-              <a:pPr rtl="0"/>
-              <a:t>2021年7月6日</a:t>
             </a:fld>
             <a:endParaRPr lang="zh-CN" altLang="en-US" dirty="0">
               <a:latin typeface="微软雅黑" panose="020B0503020204020204" pitchFamily="34" charset="-122"/>
@@ -305,8 +284,6 @@
                 <a:latin typeface="微软雅黑" panose="020B0503020204020204" pitchFamily="34" charset="-122"/>
                 <a:ea typeface="微软雅黑" panose="020B0503020204020204" pitchFamily="34" charset="-122"/>
               </a:rPr>
-              <a:pPr rtl="0"/>
-              <a:t>‹#›</a:t>
             </a:fld>
             <a:endParaRPr lang="zh-CN" altLang="en-US" dirty="0">
               <a:latin typeface="微软雅黑" panose="020B0503020204020204" pitchFamily="34" charset="-122"/>
@@ -316,11 +293,6 @@
         </p:txBody>
       </p:sp>
     </p:spTree>
-    <p:extLst>
-      <p:ext uri="{BB962C8B-B14F-4D97-AF65-F5344CB8AC3E}">
-        <p14:creationId xmlns:p14="http://schemas.microsoft.com/office/powerpoint/2010/main" val="4247389152"/>
-      </p:ext>
-    </p:extLst>
   </p:cSld>
   <p:clrMap bg1="lt1" tx1="dk1" bg2="lt2" tx2="dk2" accent1="accent1" accent2="accent2" accent3="accent3" accent4="accent4" accent5="accent5" accent6="accent6" hlink="hlink" folHlink="folHlink"/>
 </p:handoutMaster>
@@ -414,8 +386,6 @@
           <a:p>
             <a:fld id="{EA50F75F-AD11-4973-BAED-59A0098129E9}" type="datetime2">
               <a:rPr lang="zh-CN" altLang="en-US" smtClean="0"/>
-              <a:pPr/>
-              <a:t>2021年7月6日</a:t>
             </a:fld>
             <a:endParaRPr lang="zh-CN" altLang="en-US" dirty="0"/>
           </a:p>
@@ -483,6 +453,7 @@
               <a:rPr lang="zh-CN" altLang="en-US" noProof="0" dirty="0"/>
               <a:t>单击此处编辑母版文本样式</a:t>
             </a:r>
+            <a:endParaRPr lang="zh-CN" altLang="en-US" noProof="0" dirty="0"/>
           </a:p>
           <a:p>
             <a:pPr lvl="1" rtl="0"/>
@@ -490,6 +461,7 @@
               <a:rPr lang="zh-CN" altLang="en-US" noProof="0" dirty="0"/>
               <a:t>第二级</a:t>
             </a:r>
+            <a:endParaRPr lang="zh-CN" altLang="en-US" noProof="0" dirty="0"/>
           </a:p>
           <a:p>
             <a:pPr lvl="2" rtl="0"/>
@@ -497,6 +469,7 @@
               <a:rPr lang="zh-CN" altLang="en-US" noProof="0" dirty="0"/>
               <a:t>第三级</a:t>
             </a:r>
+            <a:endParaRPr lang="zh-CN" altLang="en-US" noProof="0" dirty="0"/>
           </a:p>
           <a:p>
             <a:pPr lvl="3" rtl="0"/>
@@ -504,6 +477,7 @@
               <a:rPr lang="zh-CN" altLang="en-US" noProof="0" dirty="0"/>
               <a:t>第四级</a:t>
             </a:r>
+            <a:endParaRPr lang="zh-CN" altLang="en-US" noProof="0" dirty="0"/>
           </a:p>
           <a:p>
             <a:pPr lvl="4" rtl="0"/>
@@ -511,6 +485,7 @@
               <a:rPr lang="zh-CN" altLang="en-US" noProof="0" dirty="0"/>
               <a:t>第五级</a:t>
             </a:r>
+            <a:endParaRPr lang="zh-CN" altLang="en-US" noProof="0" dirty="0"/>
           </a:p>
         </p:txBody>
       </p:sp>
@@ -580,19 +555,12 @@
           <a:p>
             <a:fld id="{82869989-EB00-4EE7-BCB5-25BDC5BB29F8}" type="slidenum">
               <a:rPr lang="en-US" altLang="zh-CN" smtClean="0"/>
-              <a:pPr/>
-              <a:t>‹#›</a:t>
             </a:fld>
             <a:endParaRPr lang="zh-CN" altLang="en-US" dirty="0"/>
           </a:p>
         </p:txBody>
       </p:sp>
     </p:spTree>
-    <p:extLst>
-      <p:ext uri="{BB962C8B-B14F-4D97-AF65-F5344CB8AC3E}">
-        <p14:creationId xmlns:p14="http://schemas.microsoft.com/office/powerpoint/2010/main" val="2193636149"/>
-      </p:ext>
-    </p:extLst>
   </p:cSld>
   <p:clrMap bg1="lt1" tx1="dk1" bg2="lt2" tx2="dk2" accent1="accent1" accent2="accent2" accent3="accent3" accent4="accent4" accent5="accent5" accent6="accent6" hlink="hlink" folHlink="folHlink"/>
   <p:notesStyle>
@@ -760,19 +728,12 @@
             <a:pPr rtl="0"/>
             <a:fld id="{82869989-EB00-4EE7-BCB5-25BDC5BB29F8}" type="slidenum">
               <a:rPr lang="en-US" altLang="zh-CN" smtClean="0"/>
-              <a:pPr rtl="0"/>
-              <a:t>1</a:t>
             </a:fld>
             <a:endParaRPr lang="zh-CN" altLang="en-US" dirty="0"/>
           </a:p>
         </p:txBody>
       </p:sp>
     </p:spTree>
-    <p:extLst>
-      <p:ext uri="{BB962C8B-B14F-4D97-AF65-F5344CB8AC3E}">
-        <p14:creationId xmlns:p14="http://schemas.microsoft.com/office/powerpoint/2010/main" val="1980303916"/>
-      </p:ext>
-    </p:extLst>
   </p:cSld>
   <p:clrMapOvr>
     <a:masterClrMapping/>
@@ -911,8 +872,6 @@
           <a:p>
             <a:fld id="{5DD292E4-C117-4AE5-8BCA-334E149AE116}" type="datetimeFigureOut">
               <a:rPr lang="zh-TW" altLang="en-US" smtClean="0"/>
-              <a:pPr/>
-              <a:t>2021/7/6</a:t>
             </a:fld>
             <a:endParaRPr lang="zh-TW" altLang="en-US"/>
           </a:p>
@@ -954,8 +913,6 @@
           <a:p>
             <a:fld id="{E31375A4-56A4-47D6-9801-1991572033F7}" type="slidenum">
               <a:rPr lang="en-US" altLang="zh-CN" noProof="0" smtClean="0"/>
-              <a:pPr/>
-              <a:t>‹#›</a:t>
             </a:fld>
             <a:endParaRPr lang="zh-CN" altLang="en-US" noProof="0" dirty="0"/>
           </a:p>
@@ -2816,22 +2773,17 @@
         </p:style>
       </p:cxnSp>
     </p:spTree>
-    <p:extLst>
-      <p:ext uri="{BB962C8B-B14F-4D97-AF65-F5344CB8AC3E}">
-        <p14:creationId xmlns:p14="http://schemas.microsoft.com/office/powerpoint/2010/main" val="3386584974"/>
-      </p:ext>
-    </p:extLst>
   </p:cSld>
   <p:clrMapOvr>
     <a:masterClrMapping/>
   </p:clrMapOvr>
-  <mc:AlternateContent xmlns:mc="http://schemas.openxmlformats.org/markup-compatibility/2006" xmlns:p14="http://schemas.microsoft.com/office/powerpoint/2010/main">
-    <mc:Choice Requires="p14">
+  <mc:AlternateContent xmlns:mc="http://schemas.openxmlformats.org/markup-compatibility/2006">
+    <mc:Choice xmlns:p14="http://schemas.microsoft.com/office/powerpoint/2010/main" Requires="p14">
       <p:transition spd="med" p14:dur="700">
         <p:fade/>
       </p:transition>
     </mc:Choice>
-    <mc:Fallback xmlns="">
+    <mc:Fallback>
       <p:transition spd="med">
         <p:fade/>
       </p:transition>
@@ -2907,6 +2859,7 @@
               <a:rPr lang="zh-CN" altLang="en-US" smtClean="0"/>
               <a:t>单击此处编辑母版文本样式</a:t>
             </a:r>
+            <a:endParaRPr lang="zh-CN" altLang="en-US" smtClean="0"/>
           </a:p>
           <a:p>
             <a:pPr lvl="1"/>
@@ -2914,6 +2867,7 @@
               <a:rPr lang="zh-CN" altLang="en-US" smtClean="0"/>
               <a:t>第二级</a:t>
             </a:r>
+            <a:endParaRPr lang="zh-CN" altLang="en-US" smtClean="0"/>
           </a:p>
           <a:p>
             <a:pPr lvl="2"/>
@@ -2921,6 +2875,7 @@
               <a:rPr lang="zh-CN" altLang="en-US" smtClean="0"/>
               <a:t>第三级</a:t>
             </a:r>
+            <a:endParaRPr lang="zh-CN" altLang="en-US" smtClean="0"/>
           </a:p>
           <a:p>
             <a:pPr lvl="3"/>
@@ -2928,6 +2883,7 @@
               <a:rPr lang="zh-CN" altLang="en-US" smtClean="0"/>
               <a:t>第四级</a:t>
             </a:r>
+            <a:endParaRPr lang="zh-CN" altLang="en-US" smtClean="0"/>
           </a:p>
           <a:p>
             <a:pPr lvl="4"/>
@@ -2956,8 +2912,6 @@
           <a:p>
             <a:fld id="{315EC09C-6658-4B3F-8DB1-134C6DD59176}" type="datetime2">
               <a:rPr lang="zh-CN" altLang="en-US" smtClean="0"/>
-              <a:pPr/>
-              <a:t>2021年7月6日</a:t>
             </a:fld>
             <a:endParaRPr lang="zh-CN" altLang="en-US" dirty="0"/>
           </a:p>
@@ -3005,30 +2959,23 @@
             <a:pPr rtl="0"/>
             <a:fld id="{E31375A4-56A4-47D6-9801-1991572033F7}" type="slidenum">
               <a:rPr lang="en-US" altLang="zh-CN" noProof="0" smtClean="0"/>
-              <a:pPr rtl="0"/>
-              <a:t>‹#›</a:t>
             </a:fld>
             <a:endParaRPr lang="zh-CN" altLang="en-US" noProof="0" dirty="0"/>
           </a:p>
         </p:txBody>
       </p:sp>
     </p:spTree>
-    <p:extLst>
-      <p:ext uri="{BB962C8B-B14F-4D97-AF65-F5344CB8AC3E}">
-        <p14:creationId xmlns:p14="http://schemas.microsoft.com/office/powerpoint/2010/main" val="195145007"/>
-      </p:ext>
-    </p:extLst>
   </p:cSld>
   <p:clrMapOvr>
     <a:masterClrMapping/>
   </p:clrMapOvr>
-  <mc:AlternateContent xmlns:mc="http://schemas.openxmlformats.org/markup-compatibility/2006" xmlns:p14="http://schemas.microsoft.com/office/powerpoint/2010/main">
-    <mc:Choice Requires="p14">
+  <mc:AlternateContent xmlns:mc="http://schemas.openxmlformats.org/markup-compatibility/2006">
+    <mc:Choice xmlns:p14="http://schemas.microsoft.com/office/powerpoint/2010/main" Requires="p14">
       <p:transition spd="med" p14:dur="700">
         <p:fade/>
       </p:transition>
     </mc:Choice>
-    <mc:Fallback xmlns="">
+    <mc:Fallback>
       <p:transition spd="med">
         <p:fade/>
       </p:transition>
@@ -3114,6 +3061,7 @@
               <a:rPr lang="zh-CN" altLang="en-US" smtClean="0"/>
               <a:t>单击此处编辑母版文本样式</a:t>
             </a:r>
+            <a:endParaRPr lang="zh-CN" altLang="en-US" smtClean="0"/>
           </a:p>
           <a:p>
             <a:pPr lvl="1"/>
@@ -3121,6 +3069,7 @@
               <a:rPr lang="zh-CN" altLang="en-US" smtClean="0"/>
               <a:t>第二级</a:t>
             </a:r>
+            <a:endParaRPr lang="zh-CN" altLang="en-US" smtClean="0"/>
           </a:p>
           <a:p>
             <a:pPr lvl="2"/>
@@ -3128,6 +3077,7 @@
               <a:rPr lang="zh-CN" altLang="en-US" smtClean="0"/>
               <a:t>第三级</a:t>
             </a:r>
+            <a:endParaRPr lang="zh-CN" altLang="en-US" smtClean="0"/>
           </a:p>
           <a:p>
             <a:pPr lvl="3"/>
@@ -3135,6 +3085,7 @@
               <a:rPr lang="zh-CN" altLang="en-US" smtClean="0"/>
               <a:t>第四级</a:t>
             </a:r>
+            <a:endParaRPr lang="zh-CN" altLang="en-US" smtClean="0"/>
           </a:p>
           <a:p>
             <a:pPr lvl="4"/>
@@ -3163,8 +3114,6 @@
           <a:p>
             <a:fld id="{597EE274-C014-4170-9D78-BB3EE034439F}" type="datetime2">
               <a:rPr lang="zh-CN" altLang="en-US" smtClean="0"/>
-              <a:pPr/>
-              <a:t>2021年7月6日</a:t>
             </a:fld>
             <a:endParaRPr lang="zh-CN" altLang="en-US" dirty="0"/>
           </a:p>
@@ -3210,23 +3159,28 @@
           <a:p>
             <a:fld id="{E31375A4-56A4-47D6-9801-1991572033F7}" type="slidenum">
               <a:rPr lang="en-US" altLang="zh-CN" noProof="0" smtClean="0"/>
-              <a:pPr/>
-              <a:t>‹#›</a:t>
             </a:fld>
             <a:endParaRPr lang="zh-CN" altLang="en-US" noProof="0" dirty="0"/>
           </a:p>
         </p:txBody>
       </p:sp>
     </p:spTree>
-    <p:extLst>
-      <p:ext uri="{BB962C8B-B14F-4D97-AF65-F5344CB8AC3E}">
-        <p14:creationId xmlns:p14="http://schemas.microsoft.com/office/powerpoint/2010/main" val="1773093264"/>
-      </p:ext>
-    </p:extLst>
   </p:cSld>
   <p:clrMapOvr>
     <a:masterClrMapping/>
   </p:clrMapOvr>
+  <mc:AlternateContent xmlns:mc="http://schemas.openxmlformats.org/markup-compatibility/2006">
+    <mc:Choice xmlns:p14="http://schemas.microsoft.com/office/powerpoint/2010/main" Requires="p14">
+      <p:transition spd="med" p14:dur="700">
+        <p:fade/>
+      </p:transition>
+    </mc:Choice>
+    <mc:Fallback>
+      <p:transition spd="med">
+        <p:fade/>
+      </p:transition>
+    </mc:Fallback>
+  </mc:AlternateContent>
   <p:hf hdr="0" ftr="0" dt="0"/>
 </p:sldLayout>
 </file>
@@ -3291,6 +3245,7 @@
               <a:rPr lang="zh-CN" altLang="en-US" smtClean="0"/>
               <a:t>单击此处编辑母版文本样式</a:t>
             </a:r>
+            <a:endParaRPr lang="zh-CN" altLang="en-US" smtClean="0"/>
           </a:p>
           <a:p>
             <a:pPr lvl="1"/>
@@ -3298,6 +3253,7 @@
               <a:rPr lang="zh-CN" altLang="en-US" smtClean="0"/>
               <a:t>第二级</a:t>
             </a:r>
+            <a:endParaRPr lang="zh-CN" altLang="en-US" smtClean="0"/>
           </a:p>
           <a:p>
             <a:pPr lvl="2"/>
@@ -3305,6 +3261,7 @@
               <a:rPr lang="zh-CN" altLang="en-US" smtClean="0"/>
               <a:t>第三级</a:t>
             </a:r>
+            <a:endParaRPr lang="zh-CN" altLang="en-US" smtClean="0"/>
           </a:p>
           <a:p>
             <a:pPr lvl="3"/>
@@ -3312,6 +3269,7 @@
               <a:rPr lang="zh-CN" altLang="en-US" smtClean="0"/>
               <a:t>第四级</a:t>
             </a:r>
+            <a:endParaRPr lang="zh-CN" altLang="en-US" smtClean="0"/>
           </a:p>
           <a:p>
             <a:pPr lvl="4"/>
@@ -3340,8 +3298,6 @@
           <a:p>
             <a:fld id="{76486692-0600-494D-A58B-8346A1607219}" type="datetime2">
               <a:rPr lang="zh-CN" altLang="en-US" smtClean="0"/>
-              <a:pPr/>
-              <a:t>2021年7月6日</a:t>
             </a:fld>
             <a:endParaRPr lang="zh-CN" altLang="en-US" dirty="0"/>
           </a:p>
@@ -3389,30 +3345,23 @@
             <a:pPr rtl="0"/>
             <a:fld id="{E31375A4-56A4-47D6-9801-1991572033F7}" type="slidenum">
               <a:rPr lang="en-US" altLang="zh-CN" smtClean="0"/>
-              <a:pPr rtl="0"/>
-              <a:t>‹#›</a:t>
             </a:fld>
             <a:endParaRPr lang="zh-CN" altLang="en-US" dirty="0"/>
           </a:p>
         </p:txBody>
       </p:sp>
     </p:spTree>
-    <p:extLst>
-      <p:ext uri="{BB962C8B-B14F-4D97-AF65-F5344CB8AC3E}">
-        <p14:creationId xmlns:p14="http://schemas.microsoft.com/office/powerpoint/2010/main" val="1104651104"/>
-      </p:ext>
-    </p:extLst>
   </p:cSld>
   <p:clrMapOvr>
     <a:masterClrMapping/>
   </p:clrMapOvr>
-  <mc:AlternateContent xmlns:mc="http://schemas.openxmlformats.org/markup-compatibility/2006" xmlns:p14="http://schemas.microsoft.com/office/powerpoint/2010/main">
-    <mc:Choice Requires="p14">
+  <mc:AlternateContent xmlns:mc="http://schemas.openxmlformats.org/markup-compatibility/2006">
+    <mc:Choice xmlns:p14="http://schemas.microsoft.com/office/powerpoint/2010/main" Requires="p14">
       <p:transition spd="med" p14:dur="700">
         <p:fade/>
       </p:transition>
     </mc:Choice>
-    <mc:Fallback xmlns="">
+    <mc:Fallback>
       <p:transition spd="med">
         <p:fade/>
       </p:transition>
@@ -3593,6 +3542,7 @@
               <a:rPr lang="zh-CN" altLang="en-US" smtClean="0"/>
               <a:t>单击此处编辑母版文本样式</a:t>
             </a:r>
+            <a:endParaRPr lang="zh-CN" altLang="en-US" smtClean="0"/>
           </a:p>
         </p:txBody>
       </p:sp>
@@ -3613,8 +3563,6 @@
           <a:p>
             <a:fld id="{5DD292E4-C117-4AE5-8BCA-334E149AE116}" type="datetimeFigureOut">
               <a:rPr lang="zh-TW" altLang="en-US" smtClean="0"/>
-              <a:pPr/>
-              <a:t>2021/7/6</a:t>
             </a:fld>
             <a:endParaRPr lang="zh-TW" altLang="en-US"/>
           </a:p>
@@ -3656,8 +3604,6 @@
           <a:p>
             <a:fld id="{FE844DCD-E941-46B3-ADE3-0AFD533C6B28}" type="slidenum">
               <a:rPr lang="zh-TW" altLang="en-US" smtClean="0"/>
-              <a:pPr/>
-              <a:t>‹#›</a:t>
             </a:fld>
             <a:endParaRPr lang="zh-TW" altLang="en-US"/>
           </a:p>
@@ -5522,22 +5468,17 @@
         </p:style>
       </p:cxnSp>
     </p:spTree>
-    <p:extLst>
-      <p:ext uri="{BB962C8B-B14F-4D97-AF65-F5344CB8AC3E}">
-        <p14:creationId xmlns:p14="http://schemas.microsoft.com/office/powerpoint/2010/main" val="2200040330"/>
-      </p:ext>
-    </p:extLst>
   </p:cSld>
   <p:clrMapOvr>
     <a:masterClrMapping/>
   </p:clrMapOvr>
-  <mc:AlternateContent xmlns:mc="http://schemas.openxmlformats.org/markup-compatibility/2006" xmlns:p14="http://schemas.microsoft.com/office/powerpoint/2010/main">
-    <mc:Choice Requires="p14">
+  <mc:AlternateContent xmlns:mc="http://schemas.openxmlformats.org/markup-compatibility/2006">
+    <mc:Choice xmlns:p14="http://schemas.microsoft.com/office/powerpoint/2010/main" Requires="p14">
       <p:transition spd="med" p14:dur="700">
         <p:fade/>
       </p:transition>
     </mc:Choice>
-    <mc:Fallback xmlns="">
+    <mc:Fallback>
       <p:transition spd="med">
         <p:fade/>
       </p:transition>
@@ -5618,6 +5559,7 @@
               <a:rPr lang="zh-CN" altLang="en-US" smtClean="0"/>
               <a:t>单击此处编辑母版文本样式</a:t>
             </a:r>
+            <a:endParaRPr lang="zh-CN" altLang="en-US" smtClean="0"/>
           </a:p>
           <a:p>
             <a:pPr lvl="1"/>
@@ -5625,6 +5567,7 @@
               <a:rPr lang="zh-CN" altLang="en-US" smtClean="0"/>
               <a:t>第二级</a:t>
             </a:r>
+            <a:endParaRPr lang="zh-CN" altLang="en-US" smtClean="0"/>
           </a:p>
           <a:p>
             <a:pPr lvl="2"/>
@@ -5632,6 +5575,7 @@
               <a:rPr lang="zh-CN" altLang="en-US" smtClean="0"/>
               <a:t>第三级</a:t>
             </a:r>
+            <a:endParaRPr lang="zh-CN" altLang="en-US" smtClean="0"/>
           </a:p>
           <a:p>
             <a:pPr lvl="3"/>
@@ -5639,6 +5583,7 @@
               <a:rPr lang="zh-CN" altLang="en-US" smtClean="0"/>
               <a:t>第四级</a:t>
             </a:r>
+            <a:endParaRPr lang="zh-CN" altLang="en-US" smtClean="0"/>
           </a:p>
           <a:p>
             <a:pPr lvl="4"/>
@@ -5675,6 +5620,7 @@
               <a:rPr lang="zh-CN" altLang="en-US" smtClean="0"/>
               <a:t>单击此处编辑母版文本样式</a:t>
             </a:r>
+            <a:endParaRPr lang="zh-CN" altLang="en-US" smtClean="0"/>
           </a:p>
           <a:p>
             <a:pPr lvl="1"/>
@@ -5682,6 +5628,7 @@
               <a:rPr lang="zh-CN" altLang="en-US" smtClean="0"/>
               <a:t>第二级</a:t>
             </a:r>
+            <a:endParaRPr lang="zh-CN" altLang="en-US" smtClean="0"/>
           </a:p>
           <a:p>
             <a:pPr lvl="2"/>
@@ -5689,6 +5636,7 @@
               <a:rPr lang="zh-CN" altLang="en-US" smtClean="0"/>
               <a:t>第三级</a:t>
             </a:r>
+            <a:endParaRPr lang="zh-CN" altLang="en-US" smtClean="0"/>
           </a:p>
           <a:p>
             <a:pPr lvl="3"/>
@@ -5696,6 +5644,7 @@
               <a:rPr lang="zh-CN" altLang="en-US" smtClean="0"/>
               <a:t>第四级</a:t>
             </a:r>
+            <a:endParaRPr lang="zh-CN" altLang="en-US" smtClean="0"/>
           </a:p>
           <a:p>
             <a:pPr lvl="4"/>
@@ -5724,8 +5673,6 @@
           <a:p>
             <a:fld id="{4FBFDCFB-9841-4E8E-A26A-EE55E04AFFB4}" type="datetime2">
               <a:rPr lang="zh-CN" altLang="en-US" smtClean="0"/>
-              <a:pPr/>
-              <a:t>2021年7月6日</a:t>
             </a:fld>
             <a:endParaRPr lang="zh-CN" altLang="en-US" dirty="0"/>
           </a:p>
@@ -5773,30 +5720,23 @@
             <a:pPr rtl="0"/>
             <a:fld id="{E31375A4-56A4-47D6-9801-1991572033F7}" type="slidenum">
               <a:rPr lang="en-US" altLang="zh-CN" smtClean="0"/>
-              <a:pPr rtl="0"/>
-              <a:t>‹#›</a:t>
             </a:fld>
             <a:endParaRPr lang="zh-CN" altLang="en-US" dirty="0"/>
           </a:p>
         </p:txBody>
       </p:sp>
     </p:spTree>
-    <p:extLst>
-      <p:ext uri="{BB962C8B-B14F-4D97-AF65-F5344CB8AC3E}">
-        <p14:creationId xmlns:p14="http://schemas.microsoft.com/office/powerpoint/2010/main" val="1069631654"/>
-      </p:ext>
-    </p:extLst>
   </p:cSld>
   <p:clrMapOvr>
     <a:masterClrMapping/>
   </p:clrMapOvr>
-  <mc:AlternateContent xmlns:mc="http://schemas.openxmlformats.org/markup-compatibility/2006" xmlns:p14="http://schemas.microsoft.com/office/powerpoint/2010/main">
-    <mc:Choice Requires="p14">
+  <mc:AlternateContent xmlns:mc="http://schemas.openxmlformats.org/markup-compatibility/2006">
+    <mc:Choice xmlns:p14="http://schemas.microsoft.com/office/powerpoint/2010/main" Requires="p14">
       <p:transition spd="med" p14:dur="700">
         <p:fade/>
       </p:transition>
     </mc:Choice>
-    <mc:Fallback xmlns="">
+    <mc:Fallback>
       <p:transition spd="med">
         <p:fade/>
       </p:transition>
@@ -5919,6 +5859,7 @@
               <a:rPr lang="zh-CN" altLang="en-US" smtClean="0"/>
               <a:t>单击此处编辑母版文本样式</a:t>
             </a:r>
+            <a:endParaRPr lang="zh-CN" altLang="en-US" smtClean="0"/>
           </a:p>
         </p:txBody>
       </p:sp>
@@ -5947,6 +5888,7 @@
               <a:rPr lang="zh-CN" altLang="en-US" smtClean="0"/>
               <a:t>单击此处编辑母版文本样式</a:t>
             </a:r>
+            <a:endParaRPr lang="zh-CN" altLang="en-US" smtClean="0"/>
           </a:p>
           <a:p>
             <a:pPr lvl="1"/>
@@ -5954,6 +5896,7 @@
               <a:rPr lang="zh-CN" altLang="en-US" smtClean="0"/>
               <a:t>第二级</a:t>
             </a:r>
+            <a:endParaRPr lang="zh-CN" altLang="en-US" smtClean="0"/>
           </a:p>
           <a:p>
             <a:pPr lvl="2"/>
@@ -5961,6 +5904,7 @@
               <a:rPr lang="zh-CN" altLang="en-US" smtClean="0"/>
               <a:t>第三级</a:t>
             </a:r>
+            <a:endParaRPr lang="zh-CN" altLang="en-US" smtClean="0"/>
           </a:p>
           <a:p>
             <a:pPr lvl="3"/>
@@ -5968,6 +5912,7 @@
               <a:rPr lang="zh-CN" altLang="en-US" smtClean="0"/>
               <a:t>第四级</a:t>
             </a:r>
+            <a:endParaRPr lang="zh-CN" altLang="en-US" smtClean="0"/>
           </a:p>
           <a:p>
             <a:pPr lvl="4"/>
@@ -6041,6 +5986,7 @@
               <a:rPr lang="zh-CN" altLang="en-US" smtClean="0"/>
               <a:t>单击此处编辑母版文本样式</a:t>
             </a:r>
+            <a:endParaRPr lang="zh-CN" altLang="en-US" smtClean="0"/>
           </a:p>
         </p:txBody>
       </p:sp>
@@ -6069,6 +6015,7 @@
               <a:rPr lang="zh-CN" altLang="en-US" smtClean="0"/>
               <a:t>单击此处编辑母版文本样式</a:t>
             </a:r>
+            <a:endParaRPr lang="zh-CN" altLang="en-US" smtClean="0"/>
           </a:p>
           <a:p>
             <a:pPr lvl="1"/>
@@ -6076,6 +6023,7 @@
               <a:rPr lang="zh-CN" altLang="en-US" smtClean="0"/>
               <a:t>第二级</a:t>
             </a:r>
+            <a:endParaRPr lang="zh-CN" altLang="en-US" smtClean="0"/>
           </a:p>
           <a:p>
             <a:pPr lvl="2"/>
@@ -6083,6 +6031,7 @@
               <a:rPr lang="zh-CN" altLang="en-US" smtClean="0"/>
               <a:t>第三级</a:t>
             </a:r>
+            <a:endParaRPr lang="zh-CN" altLang="en-US" smtClean="0"/>
           </a:p>
           <a:p>
             <a:pPr lvl="3"/>
@@ -6090,6 +6039,7 @@
               <a:rPr lang="zh-CN" altLang="en-US" smtClean="0"/>
               <a:t>第四级</a:t>
             </a:r>
+            <a:endParaRPr lang="zh-CN" altLang="en-US" smtClean="0"/>
           </a:p>
           <a:p>
             <a:pPr lvl="4"/>
@@ -6118,8 +6068,6 @@
           <a:p>
             <a:fld id="{1C3E997A-1EEE-4D88-AEC9-C83348780DB3}" type="datetime2">
               <a:rPr lang="zh-CN" altLang="en-US" smtClean="0"/>
-              <a:pPr/>
-              <a:t>2021年7月6日</a:t>
             </a:fld>
             <a:endParaRPr lang="zh-CN" altLang="en-US" dirty="0"/>
           </a:p>
@@ -6165,30 +6113,23 @@
           <a:p>
             <a:fld id="{E31375A4-56A4-47D6-9801-1991572033F7}" type="slidenum">
               <a:rPr lang="en-US" altLang="zh-CN" smtClean="0"/>
-              <a:pPr/>
-              <a:t>‹#›</a:t>
             </a:fld>
             <a:endParaRPr lang="zh-CN" altLang="en-US" dirty="0"/>
           </a:p>
         </p:txBody>
       </p:sp>
     </p:spTree>
-    <p:extLst>
-      <p:ext uri="{BB962C8B-B14F-4D97-AF65-F5344CB8AC3E}">
-        <p14:creationId xmlns:p14="http://schemas.microsoft.com/office/powerpoint/2010/main" val="81762796"/>
-      </p:ext>
-    </p:extLst>
   </p:cSld>
   <p:clrMapOvr>
     <a:masterClrMapping/>
   </p:clrMapOvr>
-  <mc:AlternateContent xmlns:mc="http://schemas.openxmlformats.org/markup-compatibility/2006" xmlns:p14="http://schemas.microsoft.com/office/powerpoint/2010/main">
-    <mc:Choice Requires="p14">
+  <mc:AlternateContent xmlns:mc="http://schemas.openxmlformats.org/markup-compatibility/2006">
+    <mc:Choice xmlns:p14="http://schemas.microsoft.com/office/powerpoint/2010/main" Requires="p14">
       <p:transition spd="med" p14:dur="700">
         <p:fade/>
       </p:transition>
     </mc:Choice>
-    <mc:Fallback xmlns="">
+    <mc:Fallback>
       <p:transition spd="med">
         <p:fade/>
       </p:transition>
@@ -6261,8 +6202,6 @@
           <a:p>
             <a:fld id="{018B8D67-B939-44AB-992D-F02AFF2C2399}" type="datetime2">
               <a:rPr lang="zh-CN" altLang="en-US" smtClean="0"/>
-              <a:pPr/>
-              <a:t>2021年7月6日</a:t>
             </a:fld>
             <a:endParaRPr lang="zh-CN" altLang="en-US" dirty="0"/>
           </a:p>
@@ -6310,30 +6249,23 @@
             <a:pPr rtl="0"/>
             <a:fld id="{E31375A4-56A4-47D6-9801-1991572033F7}" type="slidenum">
               <a:rPr lang="en-US" altLang="zh-CN" noProof="0" smtClean="0"/>
-              <a:pPr rtl="0"/>
-              <a:t>‹#›</a:t>
             </a:fld>
             <a:endParaRPr lang="zh-CN" altLang="en-US" noProof="0" dirty="0"/>
           </a:p>
         </p:txBody>
       </p:sp>
     </p:spTree>
-    <p:extLst>
-      <p:ext uri="{BB962C8B-B14F-4D97-AF65-F5344CB8AC3E}">
-        <p14:creationId xmlns:p14="http://schemas.microsoft.com/office/powerpoint/2010/main" val="3196151483"/>
-      </p:ext>
-    </p:extLst>
   </p:cSld>
   <p:clrMapOvr>
     <a:masterClrMapping/>
   </p:clrMapOvr>
-  <mc:AlternateContent xmlns:mc="http://schemas.openxmlformats.org/markup-compatibility/2006" xmlns:p14="http://schemas.microsoft.com/office/powerpoint/2010/main">
-    <mc:Choice Requires="p14">
+  <mc:AlternateContent xmlns:mc="http://schemas.openxmlformats.org/markup-compatibility/2006">
+    <mc:Choice xmlns:p14="http://schemas.microsoft.com/office/powerpoint/2010/main" Requires="p14">
       <p:transition spd="med" p14:dur="700">
         <p:fade/>
       </p:transition>
     </mc:Choice>
-    <mc:Fallback xmlns="">
+    <mc:Fallback>
       <p:transition spd="med">
         <p:fade/>
       </p:transition>
@@ -6383,8 +6315,6 @@
           <a:p>
             <a:fld id="{9F278190-531B-41DD-AD7A-47EC2C22B86C}" type="datetime2">
               <a:rPr lang="zh-CN" altLang="en-US" smtClean="0"/>
-              <a:pPr/>
-              <a:t>2021年7月6日</a:t>
             </a:fld>
             <a:endParaRPr lang="zh-CN" altLang="en-US" dirty="0"/>
           </a:p>
@@ -6432,8 +6362,6 @@
             <a:pPr rtl="0"/>
             <a:fld id="{E31375A4-56A4-47D6-9801-1991572033F7}" type="slidenum">
               <a:rPr lang="en-US" altLang="zh-CN" smtClean="0"/>
-              <a:pPr rtl="0"/>
-              <a:t>‹#›</a:t>
             </a:fld>
             <a:endParaRPr lang="zh-CN" altLang="en-US" dirty="0"/>
           </a:p>
@@ -8263,22 +8191,17 @@
         </p:grpSp>
       </p:grpSp>
     </p:spTree>
-    <p:extLst>
-      <p:ext uri="{BB962C8B-B14F-4D97-AF65-F5344CB8AC3E}">
-        <p14:creationId xmlns:p14="http://schemas.microsoft.com/office/powerpoint/2010/main" val="3758244984"/>
-      </p:ext>
-    </p:extLst>
   </p:cSld>
   <p:clrMapOvr>
     <a:masterClrMapping/>
   </p:clrMapOvr>
-  <mc:AlternateContent xmlns:mc="http://schemas.openxmlformats.org/markup-compatibility/2006" xmlns:p14="http://schemas.microsoft.com/office/powerpoint/2010/main">
-    <mc:Choice Requires="p14">
+  <mc:AlternateContent xmlns:mc="http://schemas.openxmlformats.org/markup-compatibility/2006">
+    <mc:Choice xmlns:p14="http://schemas.microsoft.com/office/powerpoint/2010/main" Requires="p14">
       <p:transition spd="med" p14:dur="700">
         <p:fade/>
       </p:transition>
     </mc:Choice>
-    <mc:Fallback xmlns="">
+    <mc:Fallback>
       <p:transition spd="med">
         <p:fade/>
       </p:transition>
@@ -8396,6 +8319,7 @@
               <a:rPr lang="zh-CN" altLang="en-US" smtClean="0"/>
               <a:t>单击此处编辑母版文本样式</a:t>
             </a:r>
+            <a:endParaRPr lang="zh-CN" altLang="en-US" smtClean="0"/>
           </a:p>
           <a:p>
             <a:pPr lvl="1"/>
@@ -8403,6 +8327,7 @@
               <a:rPr lang="zh-CN" altLang="en-US" smtClean="0"/>
               <a:t>第二级</a:t>
             </a:r>
+            <a:endParaRPr lang="zh-CN" altLang="en-US" smtClean="0"/>
           </a:p>
           <a:p>
             <a:pPr lvl="2"/>
@@ -8410,6 +8335,7 @@
               <a:rPr lang="zh-CN" altLang="en-US" smtClean="0"/>
               <a:t>第三级</a:t>
             </a:r>
+            <a:endParaRPr lang="zh-CN" altLang="en-US" smtClean="0"/>
           </a:p>
           <a:p>
             <a:pPr lvl="3"/>
@@ -8417,6 +8343,7 @@
               <a:rPr lang="zh-CN" altLang="en-US" smtClean="0"/>
               <a:t>第四级</a:t>
             </a:r>
+            <a:endParaRPr lang="zh-CN" altLang="en-US" smtClean="0"/>
           </a:p>
           <a:p>
             <a:pPr lvl="4"/>
@@ -8490,6 +8417,7 @@
               <a:rPr lang="zh-CN" altLang="en-US" smtClean="0"/>
               <a:t>单击此处编辑母版文本样式</a:t>
             </a:r>
+            <a:endParaRPr lang="zh-CN" altLang="en-US" smtClean="0"/>
           </a:p>
         </p:txBody>
       </p:sp>
@@ -8510,8 +8438,6 @@
           <a:p>
             <a:fld id="{597EE274-C014-4170-9D78-BB3EE034439F}" type="datetime2">
               <a:rPr lang="zh-CN" altLang="en-US" smtClean="0"/>
-              <a:pPr/>
-              <a:t>2021年7月6日</a:t>
             </a:fld>
             <a:endParaRPr lang="zh-CN" altLang="en-US" dirty="0"/>
           </a:p>
@@ -8557,23 +8483,28 @@
           <a:p>
             <a:fld id="{E31375A4-56A4-47D6-9801-1991572033F7}" type="slidenum">
               <a:rPr lang="en-US" altLang="zh-CN" noProof="0" smtClean="0"/>
-              <a:pPr/>
-              <a:t>‹#›</a:t>
             </a:fld>
             <a:endParaRPr lang="zh-CN" altLang="en-US" noProof="0" dirty="0"/>
           </a:p>
         </p:txBody>
       </p:sp>
     </p:spTree>
-    <p:extLst>
-      <p:ext uri="{BB962C8B-B14F-4D97-AF65-F5344CB8AC3E}">
-        <p14:creationId xmlns:p14="http://schemas.microsoft.com/office/powerpoint/2010/main" val="3023846253"/>
-      </p:ext>
-    </p:extLst>
   </p:cSld>
   <p:clrMapOvr>
     <a:masterClrMapping/>
   </p:clrMapOvr>
+  <mc:AlternateContent xmlns:mc="http://schemas.openxmlformats.org/markup-compatibility/2006">
+    <mc:Choice xmlns:p14="http://schemas.microsoft.com/office/powerpoint/2010/main" Requires="p14">
+      <p:transition spd="med" p14:dur="700">
+        <p:fade/>
+      </p:transition>
+    </mc:Choice>
+    <mc:Fallback>
+      <p:transition spd="med">
+        <p:fade/>
+      </p:transition>
+    </mc:Fallback>
+  </mc:AlternateContent>
   <p:hf hdr="0" ftr="0" dt="0"/>
 </p:sldLayout>
 </file>
@@ -8750,6 +8681,7 @@
               <a:rPr lang="zh-CN" altLang="en-US" smtClean="0"/>
               <a:t>单击此处编辑母版文本样式</a:t>
             </a:r>
+            <a:endParaRPr lang="zh-CN" altLang="en-US" smtClean="0"/>
           </a:p>
         </p:txBody>
       </p:sp>
@@ -8770,8 +8702,6 @@
           <a:p>
             <a:fld id="{597EE274-C014-4170-9D78-BB3EE034439F}" type="datetime2">
               <a:rPr lang="zh-CN" altLang="en-US" smtClean="0"/>
-              <a:pPr/>
-              <a:t>2021年7月6日</a:t>
             </a:fld>
             <a:endParaRPr lang="zh-CN" altLang="en-US" dirty="0"/>
           </a:p>
@@ -8817,23 +8747,28 @@
           <a:p>
             <a:fld id="{E31375A4-56A4-47D6-9801-1991572033F7}" type="slidenum">
               <a:rPr lang="en-US" altLang="zh-CN" noProof="0" smtClean="0"/>
-              <a:pPr/>
-              <a:t>‹#›</a:t>
             </a:fld>
             <a:endParaRPr lang="zh-CN" altLang="en-US" noProof="0" dirty="0"/>
           </a:p>
         </p:txBody>
       </p:sp>
     </p:spTree>
-    <p:extLst>
-      <p:ext uri="{BB962C8B-B14F-4D97-AF65-F5344CB8AC3E}">
-        <p14:creationId xmlns:p14="http://schemas.microsoft.com/office/powerpoint/2010/main" val="3429935826"/>
-      </p:ext>
-    </p:extLst>
   </p:cSld>
   <p:clrMapOvr>
     <a:masterClrMapping/>
   </p:clrMapOvr>
+  <mc:AlternateContent xmlns:mc="http://schemas.openxmlformats.org/markup-compatibility/2006">
+    <mc:Choice xmlns:p14="http://schemas.microsoft.com/office/powerpoint/2010/main" Requires="p14">
+      <p:transition spd="med" p14:dur="700">
+        <p:fade/>
+      </p:transition>
+    </mc:Choice>
+    <mc:Fallback>
+      <p:transition spd="med">
+        <p:fade/>
+      </p:transition>
+    </mc:Fallback>
+  </mc:AlternateContent>
   <p:hf hdr="0" ftr="0" dt="0"/>
 </p:sldLayout>
 </file>
@@ -8923,6 +8858,7 @@
               <a:rPr lang="zh-CN" altLang="en-US" smtClean="0"/>
               <a:t>单击此处编辑母版文本样式</a:t>
             </a:r>
+            <a:endParaRPr lang="zh-CN" altLang="en-US" smtClean="0"/>
           </a:p>
           <a:p>
             <a:pPr lvl="1"/>
@@ -8930,6 +8866,7 @@
               <a:rPr lang="zh-CN" altLang="en-US" smtClean="0"/>
               <a:t>第二级</a:t>
             </a:r>
+            <a:endParaRPr lang="zh-CN" altLang="en-US" smtClean="0"/>
           </a:p>
           <a:p>
             <a:pPr lvl="2"/>
@@ -8937,6 +8874,7 @@
               <a:rPr lang="zh-CN" altLang="en-US" smtClean="0"/>
               <a:t>第三级</a:t>
             </a:r>
+            <a:endParaRPr lang="zh-CN" altLang="en-US" smtClean="0"/>
           </a:p>
           <a:p>
             <a:pPr lvl="3"/>
@@ -8944,6 +8882,7 @@
               <a:rPr lang="zh-CN" altLang="en-US" smtClean="0"/>
               <a:t>第四级</a:t>
             </a:r>
+            <a:endParaRPr lang="zh-CN" altLang="en-US" smtClean="0"/>
           </a:p>
           <a:p>
             <a:pPr lvl="4"/>
@@ -8990,8 +8929,6 @@
           <a:p>
             <a:fld id="{597EE274-C014-4170-9D78-BB3EE034439F}" type="datetime2">
               <a:rPr lang="zh-CN" altLang="en-US" smtClean="0"/>
-              <a:pPr/>
-              <a:t>2021年7月6日</a:t>
             </a:fld>
             <a:endParaRPr lang="zh-CN" altLang="en-US" dirty="0"/>
           </a:p>
@@ -9073,8 +9010,6 @@
           <a:p>
             <a:fld id="{E31375A4-56A4-47D6-9801-1991572033F7}" type="slidenum">
               <a:rPr lang="en-US" altLang="zh-CN" noProof="0" smtClean="0"/>
-              <a:pPr/>
-              <a:t>‹#›</a:t>
             </a:fld>
             <a:endParaRPr lang="zh-CN" altLang="en-US" noProof="0" dirty="0"/>
           </a:p>
@@ -10949,7 +10884,7 @@
           <p:nvPr userDrawn="1"/>
         </p:nvPicPr>
         <p:blipFill>
-          <a:blip r:embed="rId13">
+          <a:blip r:embed="rId12">
             <a:extLst>
               <a:ext uri="{28A0092B-C50C-407E-A947-70E740481C1C}">
                 <a14:useLocalDpi xmlns:a14="http://schemas.microsoft.com/office/drawing/2010/main" val="0"/>
@@ -10979,7 +10914,7 @@
           <p:nvPr userDrawn="1"/>
         </p:nvPicPr>
         <p:blipFill>
-          <a:blip r:embed="rId14">
+          <a:blip r:embed="rId13">
             <a:extLst>
               <a:ext uri="{28A0092B-C50C-407E-A947-70E740481C1C}">
                 <a14:useLocalDpi xmlns:a14="http://schemas.microsoft.com/office/drawing/2010/main" val="0"/>
@@ -11012,33 +10947,28 @@
         </p:spPr>
       </p:pic>
     </p:spTree>
-    <p:extLst>
-      <p:ext uri="{BB962C8B-B14F-4D97-AF65-F5344CB8AC3E}">
-        <p14:creationId xmlns:p14="http://schemas.microsoft.com/office/powerpoint/2010/main" val="1754804598"/>
-      </p:ext>
-    </p:extLst>
   </p:cSld>
   <p:clrMap bg1="lt1" tx1="dk1" bg2="lt2" tx2="dk2" accent1="accent1" accent2="accent2" accent3="accent3" accent4="accent4" accent5="accent5" accent6="accent6" hlink="hlink" folHlink="folHlink"/>
   <p:sldLayoutIdLst>
-    <p:sldLayoutId id="2147483671" r:id="rId1"/>
-    <p:sldLayoutId id="2147483672" r:id="rId2"/>
-    <p:sldLayoutId id="2147483673" r:id="rId3"/>
-    <p:sldLayoutId id="2147483674" r:id="rId4"/>
-    <p:sldLayoutId id="2147483675" r:id="rId5"/>
-    <p:sldLayoutId id="2147483676" r:id="rId6"/>
-    <p:sldLayoutId id="2147483677" r:id="rId7"/>
-    <p:sldLayoutId id="2147483678" r:id="rId8"/>
-    <p:sldLayoutId id="2147483679" r:id="rId9"/>
-    <p:sldLayoutId id="2147483680" r:id="rId10"/>
-    <p:sldLayoutId id="2147483681" r:id="rId11"/>
+    <p:sldLayoutId id="2147483649" r:id="rId1"/>
+    <p:sldLayoutId id="2147483650" r:id="rId2"/>
+    <p:sldLayoutId id="2147483651" r:id="rId3"/>
+    <p:sldLayoutId id="2147483652" r:id="rId4"/>
+    <p:sldLayoutId id="2147483653" r:id="rId5"/>
+    <p:sldLayoutId id="2147483654" r:id="rId6"/>
+    <p:sldLayoutId id="2147483655" r:id="rId7"/>
+    <p:sldLayoutId id="2147483656" r:id="rId8"/>
+    <p:sldLayoutId id="2147483657" r:id="rId9"/>
+    <p:sldLayoutId id="2147483658" r:id="rId10"/>
+    <p:sldLayoutId id="2147483659" r:id="rId11"/>
   </p:sldLayoutIdLst>
-  <mc:AlternateContent xmlns:mc="http://schemas.openxmlformats.org/markup-compatibility/2006" xmlns:p14="http://schemas.microsoft.com/office/powerpoint/2010/main">
-    <mc:Choice Requires="p14">
+  <mc:AlternateContent xmlns:mc="http://schemas.openxmlformats.org/markup-compatibility/2006">
+    <mc:Choice xmlns:p14="http://schemas.microsoft.com/office/powerpoint/2010/main" Requires="p14">
       <p:transition spd="med" p14:dur="700">
         <p:fade/>
       </p:transition>
     </mc:Choice>
-    <mc:Fallback xmlns="">
+    <mc:Fallback>
       <p:transition spd="med">
         <p:fade/>
       </p:transition>
@@ -11080,7 +11010,7 @@
         <a:spcBef>
           <a:spcPts val="1000"/>
         </a:spcBef>
-        <a:buFont typeface="Arial" panose="020B0604020202020204" pitchFamily="34" charset="0"/>
+        <a:buFont typeface="Arial" panose="020B0604020202090204" pitchFamily="34" charset="0"/>
         <a:buChar char="•"/>
         <a:defRPr sz="2800" kern="1200">
           <a:solidFill>
@@ -11098,7 +11028,7 @@
         <a:spcBef>
           <a:spcPts val="500"/>
         </a:spcBef>
-        <a:buFont typeface="Arial" panose="020B0604020202020204" pitchFamily="34" charset="0"/>
+        <a:buFont typeface="Arial" panose="020B0604020202090204" pitchFamily="34" charset="0"/>
         <a:buChar char="•"/>
         <a:defRPr sz="2400" kern="1200">
           <a:solidFill>
@@ -11116,7 +11046,7 @@
         <a:spcBef>
           <a:spcPts val="500"/>
         </a:spcBef>
-        <a:buFont typeface="Arial" panose="020B0604020202020204" pitchFamily="34" charset="0"/>
+        <a:buFont typeface="Arial" panose="020B0604020202090204" pitchFamily="34" charset="0"/>
         <a:buChar char="•"/>
         <a:defRPr sz="2000" kern="1200">
           <a:solidFill>
@@ -11134,7 +11064,7 @@
         <a:spcBef>
           <a:spcPts val="500"/>
         </a:spcBef>
-        <a:buFont typeface="Arial" panose="020B0604020202020204" pitchFamily="34" charset="0"/>
+        <a:buFont typeface="Arial" panose="020B0604020202090204" pitchFamily="34" charset="0"/>
         <a:buChar char="•"/>
         <a:defRPr sz="1800" kern="1200">
           <a:solidFill>
@@ -11152,7 +11082,7 @@
         <a:spcBef>
           <a:spcPts val="500"/>
         </a:spcBef>
-        <a:buFont typeface="Arial" panose="020B0604020202020204" pitchFamily="34" charset="0"/>
+        <a:buFont typeface="Arial" panose="020B0604020202090204" pitchFamily="34" charset="0"/>
         <a:buChar char="•"/>
         <a:defRPr sz="1800" kern="1200">
           <a:solidFill>
@@ -11170,7 +11100,7 @@
         <a:spcBef>
           <a:spcPts val="500"/>
         </a:spcBef>
-        <a:buFont typeface="Arial" panose="020B0604020202020204" pitchFamily="34" charset="0"/>
+        <a:buFont typeface="Arial" panose="020B0604020202090204" pitchFamily="34" charset="0"/>
         <a:buChar char="•"/>
         <a:defRPr sz="1800" kern="1200">
           <a:solidFill>
@@ -11188,7 +11118,7 @@
         <a:spcBef>
           <a:spcPts val="500"/>
         </a:spcBef>
-        <a:buFont typeface="Arial" panose="020B0604020202020204" pitchFamily="34" charset="0"/>
+        <a:buFont typeface="Arial" panose="020B0604020202090204" pitchFamily="34" charset="0"/>
         <a:buChar char="•"/>
         <a:defRPr sz="1800" kern="1200">
           <a:solidFill>
@@ -11206,7 +11136,7 @@
         <a:spcBef>
           <a:spcPts val="500"/>
         </a:spcBef>
-        <a:buFont typeface="Arial" panose="020B0604020202020204" pitchFamily="34" charset="0"/>
+        <a:buFont typeface="Arial" panose="020B0604020202090204" pitchFamily="34" charset="0"/>
         <a:buChar char="•"/>
         <a:defRPr sz="1800" kern="1200">
           <a:solidFill>
@@ -11224,7 +11154,7 @@
         <a:spcBef>
           <a:spcPts val="500"/>
         </a:spcBef>
-        <a:buFont typeface="Arial" panose="020B0604020202020204" pitchFamily="34" charset="0"/>
+        <a:buFont typeface="Arial" panose="020B0604020202090204" pitchFamily="34" charset="0"/>
         <a:buChar char="•"/>
         <a:defRPr sz="1800" kern="1200">
           <a:solidFill>
@@ -11332,22 +11262,6 @@
       </a:lvl9pPr>
     </p:otherStyle>
   </p:txStyles>
-  <p:extLst>
-    <p:ext uri="{27BBF7A9-308A-43DC-89C8-2F10F3537804}">
-      <p15:sldGuideLst xmlns:p15="http://schemas.microsoft.com/office/powerpoint/2012/main">
-        <p15:guide id="1" orient="horz" pos="2160" userDrawn="1">
-          <p15:clr>
-            <a:srgbClr val="F26B43"/>
-          </p15:clr>
-        </p15:guide>
-        <p15:guide id="2" pos="3840" userDrawn="1">
-          <p15:clr>
-            <a:srgbClr val="F26B43"/>
-          </p15:clr>
-        </p15:guide>
-      </p15:sldGuideLst>
-    </p:ext>
-  </p:extLst>
 </p:sldMaster>
 </file>
 
@@ -11395,14 +11309,14 @@
               <a:rPr lang="zh-CN" altLang="en-US" sz="2000" b="1" dirty="0" smtClean="0">
                 <a:latin typeface="Microsoft JhengHei UI" pitchFamily="34" charset="-120"/>
                 <a:ea typeface="Microsoft JhengHei UI" pitchFamily="34" charset="-120"/>
-                <a:sym typeface="Arial" panose="020B0604020202020204" pitchFamily="34" charset="0"/>
+                <a:sym typeface="Arial" panose="020B0604020202090204" pitchFamily="34" charset="0"/>
               </a:rPr>
               <a:t>編寫說明：</a:t>
             </a:r>
             <a:endParaRPr lang="zh-CN" altLang="en-US" sz="2000" b="1" dirty="0">
               <a:latin typeface="Microsoft JhengHei UI" pitchFamily="34" charset="-120"/>
               <a:ea typeface="Microsoft JhengHei UI" pitchFamily="34" charset="-120"/>
-              <a:sym typeface="Arial" panose="020B0604020202020204" pitchFamily="34" charset="0"/>
+              <a:sym typeface="Arial" panose="020B0604020202090204" pitchFamily="34" charset="0"/>
             </a:endParaRPr>
           </a:p>
         </p:txBody>
@@ -11414,11 +11328,9 @@
             <a:graphicFrameLocks noGrp="1"/>
           </p:cNvGraphicFramePr>
           <p:nvPr>
-            <p:extLst>
-              <p:ext uri="{D42A27DB-BD31-4B8C-83A1-F6EECF244321}">
-                <p14:modId xmlns:p14="http://schemas.microsoft.com/office/powerpoint/2010/main" val="1225231472"/>
-              </p:ext>
-            </p:extLst>
+            <p:custDataLst>
+              <p:tags r:id="rId1"/>
+            </p:custDataLst>
           </p:nvPr>
         </p:nvGraphicFramePr>
         <p:xfrm>
@@ -11546,7 +11458,6 @@
                         <a:buSzTx/>
                         <a:buFontTx/>
                         <a:buNone/>
-                        <a:tabLst/>
                         <a:defRPr/>
                       </a:pPr>
                       <a:r>
@@ -11556,7 +11467,7 @@
                           </a:solidFill>
                           <a:latin typeface="Microsoft JhengHei UI" pitchFamily="34" charset="-120"/>
                           <a:ea typeface="Microsoft JhengHei UI" pitchFamily="34" charset="-120"/>
-                          <a:sym typeface="Arial" panose="020B0604020202020204" pitchFamily="34" charset="0"/>
+                          <a:sym typeface="Arial" panose="020B0604020202090204" pitchFamily="34" charset="0"/>
                         </a:rPr>
                         <a:t>1.</a:t>
                       </a:r>
@@ -11567,7 +11478,7 @@
                           </a:solidFill>
                           <a:latin typeface="Microsoft JhengHei UI" pitchFamily="34" charset="-120"/>
                           <a:ea typeface="Microsoft JhengHei UI" pitchFamily="34" charset="-120"/>
-                          <a:sym typeface="Arial" panose="020B0604020202020204" pitchFamily="34" charset="0"/>
+                          <a:sym typeface="Arial" panose="020B0604020202090204" pitchFamily="34" charset="0"/>
                         </a:rPr>
                         <a:t>報告必須包括每個能力要素，不能有缺失，呈現形式不限</a:t>
                       </a:r>
@@ -11577,7 +11488,7 @@
                         </a:solidFill>
                         <a:latin typeface="Microsoft JhengHei UI" pitchFamily="34" charset="-120"/>
                         <a:ea typeface="Microsoft JhengHei UI" pitchFamily="34" charset="-120"/>
-                        <a:sym typeface="Arial" panose="020B0604020202020204" pitchFamily="34" charset="0"/>
+                        <a:sym typeface="Arial" panose="020B0604020202090204" pitchFamily="34" charset="0"/>
                       </a:endParaRPr>
                     </a:p>
                     <a:p>
@@ -11595,7 +11506,6 @@
                         <a:buSzTx/>
                         <a:buFontTx/>
                         <a:buNone/>
-                        <a:tabLst/>
                         <a:defRPr/>
                       </a:pPr>
                       <a:r>
@@ -11605,7 +11515,7 @@
                           </a:solidFill>
                           <a:latin typeface="Microsoft JhengHei UI" pitchFamily="34" charset="-120"/>
                           <a:ea typeface="Microsoft JhengHei UI" pitchFamily="34" charset="-120"/>
-                          <a:sym typeface="Arial" panose="020B0604020202020204" pitchFamily="34" charset="0"/>
+                          <a:sym typeface="Arial" panose="020B0604020202090204" pitchFamily="34" charset="0"/>
                         </a:rPr>
                         <a:t>2.</a:t>
                       </a:r>
@@ -11616,7 +11526,7 @@
                           </a:solidFill>
                           <a:latin typeface="Microsoft JhengHei UI" pitchFamily="34" charset="-120"/>
                           <a:ea typeface="Microsoft JhengHei UI" pitchFamily="34" charset="-120"/>
-                          <a:sym typeface="Arial" panose="020B0604020202020204" pitchFamily="34" charset="0"/>
+                          <a:sym typeface="Arial" panose="020B0604020202090204" pitchFamily="34" charset="0"/>
                         </a:rPr>
                         <a:t>語言簡練，避免過多的文字描述</a:t>
                       </a:r>
@@ -11626,7 +11536,7 @@
                         </a:solidFill>
                         <a:latin typeface="Microsoft JhengHei UI" pitchFamily="34" charset="-120"/>
                         <a:ea typeface="Microsoft JhengHei UI" pitchFamily="34" charset="-120"/>
-                        <a:sym typeface="Arial" panose="020B0604020202020204" pitchFamily="34" charset="0"/>
+                        <a:sym typeface="Arial" panose="020B0604020202090204" pitchFamily="34" charset="0"/>
                       </a:endParaRPr>
                     </a:p>
                     <a:p>
@@ -11644,7 +11554,6 @@
                         <a:buSzTx/>
                         <a:buFontTx/>
                         <a:buNone/>
-                        <a:tabLst/>
                         <a:defRPr/>
                       </a:pPr>
                       <a:r>
@@ -11654,7 +11563,7 @@
                           </a:solidFill>
                           <a:latin typeface="Microsoft JhengHei UI" pitchFamily="34" charset="-120"/>
                           <a:ea typeface="Microsoft JhengHei UI" pitchFamily="34" charset="-120"/>
-                          <a:sym typeface="Arial" panose="020B0604020202020204" pitchFamily="34" charset="0"/>
+                          <a:sym typeface="Arial" panose="020B0604020202090204" pitchFamily="34" charset="0"/>
                         </a:rPr>
                         <a:t>3.</a:t>
                       </a:r>
@@ -11665,7 +11574,7 @@
                           </a:solidFill>
                           <a:latin typeface="Microsoft JhengHei UI" pitchFamily="34" charset="-120"/>
                           <a:ea typeface="Microsoft JhengHei UI" pitchFamily="34" charset="-120"/>
-                          <a:sym typeface="Arial" panose="020B0604020202020204" pitchFamily="34" charset="0"/>
+                          <a:sym typeface="Arial" panose="020B0604020202090204" pitchFamily="34" charset="0"/>
                         </a:rPr>
                         <a:t>結構清晰，證據確著，以實例、數據等作為舉證材料</a:t>
                       </a:r>
@@ -11675,7 +11584,7 @@
                         </a:solidFill>
                         <a:latin typeface="Microsoft JhengHei UI" pitchFamily="34" charset="-120"/>
                         <a:ea typeface="Microsoft JhengHei UI" pitchFamily="34" charset="-120"/>
-                        <a:sym typeface="Arial" panose="020B0604020202020204" pitchFamily="34" charset="0"/>
+                        <a:sym typeface="Arial" panose="020B0604020202090204" pitchFamily="34" charset="0"/>
                       </a:endParaRPr>
                     </a:p>
                     <a:p>
@@ -11693,7 +11602,6 @@
                         <a:buSzTx/>
                         <a:buFontTx/>
                         <a:buNone/>
-                        <a:tabLst/>
                         <a:defRPr/>
                       </a:pPr>
                       <a:r>
@@ -11703,7 +11611,7 @@
                           </a:solidFill>
                           <a:latin typeface="Microsoft JhengHei UI" pitchFamily="34" charset="-120"/>
                           <a:ea typeface="Microsoft JhengHei UI" pitchFamily="34" charset="-120"/>
-                          <a:sym typeface="Arial" panose="020B0604020202020204" pitchFamily="34" charset="0"/>
+                          <a:sym typeface="Arial" panose="020B0604020202090204" pitchFamily="34" charset="0"/>
                         </a:rPr>
                         <a:t>4.</a:t>
                       </a:r>
@@ -11714,7 +11622,7 @@
                           </a:solidFill>
                           <a:latin typeface="Microsoft JhengHei UI" pitchFamily="34" charset="-120"/>
                           <a:ea typeface="Microsoft JhengHei UI" pitchFamily="34" charset="-120"/>
-                          <a:sym typeface="Arial" panose="020B0604020202020204" pitchFamily="34" charset="0"/>
+                          <a:sym typeface="Arial" panose="020B0604020202090204" pitchFamily="34" charset="0"/>
                         </a:rPr>
                         <a:t>舉證材料可另外附件。</a:t>
                       </a:r>
@@ -11782,9 +11690,7 @@
       <p:sp>
         <p:nvSpPr>
           <p:cNvPr id="5" name="标题 1"/>
-          <p:cNvSpPr txBox="1">
-            <a:spLocks/>
-          </p:cNvSpPr>
+          <p:cNvSpPr txBox="1"/>
           <p:nvPr/>
         </p:nvSpPr>
         <p:spPr>
@@ -11830,7 +11736,7 @@
                 </a:solidFill>
                 <a:latin typeface="Microsoft JhengHei UI" pitchFamily="34" charset="-120"/>
                 <a:ea typeface="Microsoft JhengHei UI" pitchFamily="34" charset="-120"/>
-                <a:sym typeface="Arial" panose="020B0604020202020204" pitchFamily="34" charset="0"/>
+                <a:sym typeface="Arial" panose="020B0604020202090204" pitchFamily="34" charset="0"/>
               </a:rPr>
               <a:t>中原資訊總處技術職認證答辯報告</a:t>
             </a:r>
@@ -11842,7 +11748,7 @@
               </a:solidFill>
               <a:latin typeface="Microsoft JhengHei UI" pitchFamily="34" charset="-120"/>
               <a:ea typeface="Microsoft JhengHei UI" pitchFamily="34" charset="-120"/>
-              <a:sym typeface="Arial" panose="020B0604020202020204" pitchFamily="34" charset="0"/>
+              <a:sym typeface="Arial" panose="020B0604020202090204" pitchFamily="34" charset="0"/>
             </a:endParaRPr>
           </a:p>
         </p:txBody>
@@ -11850,9 +11756,7 @@
       <p:sp>
         <p:nvSpPr>
           <p:cNvPr id="7" name="标题 1"/>
-          <p:cNvSpPr txBox="1">
-            <a:spLocks/>
-          </p:cNvSpPr>
+          <p:cNvSpPr txBox="1"/>
           <p:nvPr/>
         </p:nvSpPr>
         <p:spPr>
@@ -11884,7 +11788,6 @@
               <a:buSzTx/>
               <a:buFontTx/>
               <a:buNone/>
-              <a:tabLst/>
               <a:defRPr/>
             </a:pPr>
             <a:r>
@@ -11901,7 +11804,7 @@
                 <a:latin typeface="Microsoft JhengHei UI" pitchFamily="34" charset="-120"/>
                 <a:ea typeface="Microsoft JhengHei UI" pitchFamily="34" charset="-120"/>
                 <a:cs typeface="+mj-cs"/>
-                <a:sym typeface="Arial" panose="020B0604020202020204" pitchFamily="34" charset="0"/>
+                <a:sym typeface="Arial" panose="020B0604020202090204" pitchFamily="34" charset="0"/>
               </a:rPr>
               <a:t>能力要求：</a:t>
             </a:r>
@@ -11918,7 +11821,7 @@
               <a:latin typeface="Microsoft JhengHei UI" pitchFamily="34" charset="-120"/>
               <a:ea typeface="Microsoft JhengHei UI" pitchFamily="34" charset="-120"/>
               <a:cs typeface="+mj-cs"/>
-              <a:sym typeface="Arial" panose="020B0604020202020204" pitchFamily="34" charset="0"/>
+              <a:sym typeface="Arial" panose="020B0604020202090204" pitchFamily="34" charset="0"/>
             </a:endParaRPr>
           </a:p>
         </p:txBody>
@@ -11930,11 +11833,9 @@
             <a:graphicFrameLocks noGrp="1"/>
           </p:cNvGraphicFramePr>
           <p:nvPr>
-            <p:extLst>
-              <p:ext uri="{D42A27DB-BD31-4B8C-83A1-F6EECF244321}">
-                <p14:modId xmlns:p14="http://schemas.microsoft.com/office/powerpoint/2010/main" val="2670580465"/>
-              </p:ext>
-            </p:extLst>
+            <p:custDataLst>
+              <p:tags r:id="rId2"/>
+            </p:custDataLst>
           </p:nvPr>
         </p:nvGraphicFramePr>
         <p:xfrm>
@@ -11968,6 +11869,13 @@
                         </a:rPr>
                         <a:t>能力項</a:t>
                       </a:r>
+                      <a:endParaRPr lang="zh-TW" altLang="en-US" sz="1050" b="0" i="0" u="none" strike="noStrike" dirty="0">
+                        <a:solidFill>
+                          <a:srgbClr val="000000"/>
+                        </a:solidFill>
+                        <a:latin typeface="Microsoft JhengHei UI" pitchFamily="34" charset="-120"/>
+                        <a:ea typeface="Microsoft JhengHei UI" pitchFamily="34" charset="-120"/>
+                      </a:endParaRPr>
                     </a:p>
                   </a:txBody>
                   <a:tcPr marL="0" marR="0" marT="0" marB="0" anchor="ctr">
@@ -12025,6 +11933,13 @@
                         </a:rPr>
                         <a:t>能力描述</a:t>
                       </a:r>
+                      <a:endParaRPr lang="zh-TW" altLang="en-US" sz="1050" b="0" i="0" u="none" strike="noStrike" dirty="0">
+                        <a:solidFill>
+                          <a:srgbClr val="000000"/>
+                        </a:solidFill>
+                        <a:latin typeface="Microsoft JhengHei UI" pitchFamily="34" charset="-120"/>
+                        <a:ea typeface="Microsoft JhengHei UI" pitchFamily="34" charset="-120"/>
+                      </a:endParaRPr>
                     </a:p>
                   </a:txBody>
                   <a:tcPr marL="0" marR="0" marT="0" marB="0" anchor="ctr">
@@ -12082,6 +11997,13 @@
                         </a:rPr>
                         <a:t>2-1</a:t>
                       </a:r>
+                      <a:endParaRPr lang="en-US" altLang="zh-TW" sz="1000" b="0" i="0" u="none" strike="noStrike" dirty="0" smtClean="0">
+                        <a:solidFill>
+                          <a:srgbClr val="000000"/>
+                        </a:solidFill>
+                        <a:latin typeface="Microsoft JhengHei UI" pitchFamily="34" charset="-120"/>
+                        <a:ea typeface="Microsoft JhengHei UI" pitchFamily="34" charset="-120"/>
+                      </a:endParaRPr>
                     </a:p>
                     <a:p>
                       <a:pPr algn="ctr" fontAlgn="ctr"/>
@@ -12159,6 +12081,13 @@
                         </a:rPr>
                         <a:t>2-2</a:t>
                       </a:r>
+                      <a:endParaRPr lang="en-US" altLang="zh-TW" sz="1000" b="0" i="0" u="none" strike="noStrike" dirty="0" smtClean="0">
+                        <a:solidFill>
+                          <a:srgbClr val="000000"/>
+                        </a:solidFill>
+                        <a:latin typeface="Microsoft JhengHei UI" pitchFamily="34" charset="-120"/>
+                        <a:ea typeface="Microsoft JhengHei UI" pitchFamily="34" charset="-120"/>
+                      </a:endParaRPr>
                     </a:p>
                     <a:p>
                       <a:pPr algn="ctr" fontAlgn="ctr"/>
@@ -12312,6 +12241,13 @@
                         </a:rPr>
                         <a:t>①熟悉所使用的主要技術，能够独立分析、快速排查和解決問題</a:t>
                       </a:r>
+                      <a:endParaRPr lang="zh-TW" altLang="en-US" sz="1100" b="0" i="0" u="none" strike="noStrike" dirty="0" smtClean="0">
+                        <a:solidFill>
+                          <a:srgbClr val="000000"/>
+                        </a:solidFill>
+                        <a:latin typeface="Microsoft JhengHei UI" pitchFamily="34" charset="-120"/>
+                        <a:ea typeface="Microsoft JhengHei UI" pitchFamily="34" charset="-120"/>
+                      </a:endParaRPr>
                     </a:p>
                     <a:p>
                       <a:pPr algn="l" fontAlgn="ctr"/>
@@ -12325,6 +12261,13 @@
                         </a:rPr>
                         <a:t>②某一專業領域比較精通，具有一定權威，具备辅导他人的能力和技能</a:t>
                       </a:r>
+                      <a:endParaRPr lang="zh-TW" altLang="en-US" sz="1100" b="0" i="0" u="none" strike="noStrike" dirty="0" smtClean="0">
+                        <a:solidFill>
+                          <a:srgbClr val="000000"/>
+                        </a:solidFill>
+                        <a:latin typeface="Microsoft JhengHei UI" pitchFamily="34" charset="-120"/>
+                        <a:ea typeface="Microsoft JhengHei UI" pitchFamily="34" charset="-120"/>
+                      </a:endParaRPr>
                     </a:p>
                     <a:p>
                       <a:pPr algn="l" fontAlgn="ctr"/>
@@ -12596,6 +12539,13 @@
                         </a:rPr>
                         <a:t>①深入瞭解行業趨勢，掌握前沿知識和方法，業界成功經驗和最佳實踐案例</a:t>
                       </a:r>
+                      <a:endParaRPr lang="zh-TW" altLang="en-US" sz="1100" b="0" i="0" u="none" strike="noStrike" dirty="0" smtClean="0">
+                        <a:solidFill>
+                          <a:srgbClr val="000000"/>
+                        </a:solidFill>
+                        <a:latin typeface="Microsoft JhengHei UI" pitchFamily="34" charset="-120"/>
+                        <a:ea typeface="Microsoft JhengHei UI" pitchFamily="34" charset="-120"/>
+                      </a:endParaRPr>
                     </a:p>
                     <a:p>
                       <a:pPr algn="l" fontAlgn="ctr"/>
@@ -12609,6 +12559,13 @@
                         </a:rPr>
                         <a:t>②結合業務實際成功導入有價值的技術，并在組織內部推廣適用</a:t>
                       </a:r>
+                      <a:endParaRPr lang="zh-TW" altLang="en-US" sz="1100" b="0" i="0" u="none" strike="noStrike" dirty="0" smtClean="0">
+                        <a:solidFill>
+                          <a:srgbClr val="000000"/>
+                        </a:solidFill>
+                        <a:latin typeface="Microsoft JhengHei UI" pitchFamily="34" charset="-120"/>
+                        <a:ea typeface="Microsoft JhengHei UI" pitchFamily="34" charset="-120"/>
+                      </a:endParaRPr>
                     </a:p>
                     <a:p>
                       <a:pPr algn="l" fontAlgn="ctr"/>
@@ -12880,6 +12837,13 @@
                         </a:rPr>
                         <a:t>①專案资源配置與運用：有效控制專案成本，利用最少的成本實現最大效益</a:t>
                       </a:r>
+                      <a:endParaRPr lang="zh-TW" altLang="en-US" sz="1100" b="0" i="0" u="none" strike="noStrike" dirty="0" smtClean="0">
+                        <a:solidFill>
+                          <a:srgbClr val="000000"/>
+                        </a:solidFill>
+                        <a:latin typeface="Microsoft JhengHei UI" pitchFamily="34" charset="-120"/>
+                        <a:ea typeface="Microsoft JhengHei UI" pitchFamily="34" charset="-120"/>
+                      </a:endParaRPr>
                     </a:p>
                     <a:p>
                       <a:pPr algn="l" fontAlgn="ctr"/>
@@ -12893,6 +12857,13 @@
                         </a:rPr>
                         <a:t>②專案時程掌控：進行有效合理分解及優先級排序，確保專案按期交付</a:t>
                       </a:r>
+                      <a:endParaRPr lang="zh-TW" altLang="en-US" sz="1100" b="0" i="0" u="none" strike="noStrike" dirty="0" smtClean="0">
+                        <a:solidFill>
+                          <a:srgbClr val="000000"/>
+                        </a:solidFill>
+                        <a:latin typeface="Microsoft JhengHei UI" pitchFamily="34" charset="-120"/>
+                        <a:ea typeface="Microsoft JhengHei UI" pitchFamily="34" charset="-120"/>
+                      </a:endParaRPr>
                     </a:p>
                     <a:p>
                       <a:pPr algn="l" fontAlgn="ctr"/>
@@ -12906,6 +12877,13 @@
                         </a:rPr>
                         <a:t>③專案風險評估：能有針對性的制定風險應對措施，有效控制風險</a:t>
                       </a:r>
+                      <a:endParaRPr lang="zh-TW" altLang="en-US" sz="1100" b="0" i="0" u="none" strike="noStrike" dirty="0" smtClean="0">
+                        <a:solidFill>
+                          <a:srgbClr val="000000"/>
+                        </a:solidFill>
+                        <a:latin typeface="Microsoft JhengHei UI" pitchFamily="34" charset="-120"/>
+                        <a:ea typeface="Microsoft JhengHei UI" pitchFamily="34" charset="-120"/>
+                      </a:endParaRPr>
                     </a:p>
                     <a:p>
                       <a:pPr algn="l" fontAlgn="ctr"/>
@@ -13177,6 +13155,13 @@
                         </a:rPr>
                         <a:t>①能結合員工績效、技術能力特點，制定針對性的培養計劃幷指導實施</a:t>
                       </a:r>
+                      <a:endParaRPr lang="zh-TW" altLang="en-US" sz="1100" b="0" i="0" u="none" strike="noStrike" dirty="0" smtClean="0">
+                        <a:solidFill>
+                          <a:srgbClr val="000000"/>
+                        </a:solidFill>
+                        <a:latin typeface="Microsoft JhengHei UI" pitchFamily="34" charset="-120"/>
+                        <a:ea typeface="Microsoft JhengHei UI" pitchFamily="34" charset="-120"/>
+                      </a:endParaRPr>
                     </a:p>
                     <a:p>
                       <a:pPr algn="l" fontAlgn="ctr"/>
@@ -13190,6 +13175,13 @@
                         </a:rPr>
                         <a:t>②履行導師職責，做好團隊教練，及時輔導，合理授權</a:t>
                       </a:r>
+                      <a:endParaRPr lang="zh-TW" altLang="en-US" sz="1100" b="0" i="0" u="none" strike="noStrike" dirty="0" smtClean="0">
+                        <a:solidFill>
+                          <a:srgbClr val="000000"/>
+                        </a:solidFill>
+                        <a:latin typeface="Microsoft JhengHei UI" pitchFamily="34" charset="-120"/>
+                        <a:ea typeface="Microsoft JhengHei UI" pitchFamily="34" charset="-120"/>
+                      </a:endParaRPr>
                     </a:p>
                     <a:p>
                       <a:pPr algn="l" fontAlgn="ctr"/>
@@ -13334,7 +13326,6 @@
                         <a:buSzTx/>
                         <a:buFontTx/>
                         <a:buNone/>
-                        <a:tabLst/>
                         <a:defRPr/>
                       </a:pPr>
                       <a:r>
@@ -13423,16 +13414,6 @@
                         </a:rPr>
                         <a:t>：</a:t>
                       </a:r>
-                      <a:r>
-                        <a:rPr lang="zh-TW" altLang="en-US" sz="1050" b="0" i="0" u="none" strike="noStrike" dirty="0">
-                          <a:solidFill>
-                            <a:srgbClr val="000000"/>
-                          </a:solidFill>
-                          <a:latin typeface="Microsoft JhengHei UI" pitchFamily="34" charset="-120"/>
-                          <a:ea typeface="Microsoft JhengHei UI" pitchFamily="34" charset="-120"/>
-                        </a:rPr>
-                        <a:t/>
-                      </a:r>
                       <a:br>
                         <a:rPr lang="zh-TW" altLang="en-US" sz="1050" b="0" i="0" u="none" strike="noStrike" dirty="0">
                           <a:solidFill>
@@ -13462,6 +13443,13 @@
                         </a:rPr>
                         <a:t>水平高，完全可以成爲他人學習的楷模 </a:t>
                       </a:r>
+                      <a:endParaRPr lang="zh-TW" altLang="en-US" sz="1050" b="0" i="0" u="none" strike="noStrike" dirty="0" smtClean="0">
+                        <a:solidFill>
+                          <a:srgbClr val="000000"/>
+                        </a:solidFill>
+                        <a:latin typeface="Microsoft JhengHei UI" pitchFamily="34" charset="-120"/>
+                        <a:ea typeface="Microsoft JhengHei UI" pitchFamily="34" charset="-120"/>
+                      </a:endParaRPr>
                     </a:p>
                     <a:p>
                       <a:pPr algn="l" fontAlgn="ctr"/>
@@ -13564,33 +13552,12 @@
                   </a:tcPr>
                 </a:tc>
                 <a:tc hMerge="1">
-                  <a:txBody>
-                    <a:bodyPr/>
-                    <a:lstStyle/>
-                    <a:p>
-                      <a:endParaRPr lang="zh-TW" altLang="en-US"/>
-                    </a:p>
-                  </a:txBody>
                   <a:tcPr/>
                 </a:tc>
                 <a:tc hMerge="1">
-                  <a:txBody>
-                    <a:bodyPr/>
-                    <a:lstStyle/>
-                    <a:p>
-                      <a:endParaRPr lang="zh-TW" altLang="en-US"/>
-                    </a:p>
-                  </a:txBody>
                   <a:tcPr/>
                 </a:tc>
                 <a:tc hMerge="1">
-                  <a:txBody>
-                    <a:bodyPr/>
-                    <a:lstStyle/>
-                    <a:p>
-                      <a:endParaRPr lang="zh-TW" altLang="en-US"/>
-                    </a:p>
-                  </a:txBody>
                   <a:tcPr/>
                 </a:tc>
               </a:tr>
@@ -13599,22 +13566,17 @@
         </a:graphic>
       </p:graphicFrame>
     </p:spTree>
-    <p:extLst>
-      <p:ext uri="{BB962C8B-B14F-4D97-AF65-F5344CB8AC3E}">
-        <p14:creationId xmlns:p14="http://schemas.microsoft.com/office/powerpoint/2010/main" val="3984617762"/>
-      </p:ext>
-    </p:extLst>
   </p:cSld>
   <p:clrMapOvr>
     <a:masterClrMapping/>
   </p:clrMapOvr>
-  <mc:AlternateContent xmlns:mc="http://schemas.openxmlformats.org/markup-compatibility/2006" xmlns:p14="http://schemas.microsoft.com/office/powerpoint/2010/main">
-    <mc:Choice Requires="p14">
+  <mc:AlternateContent xmlns:mc="http://schemas.openxmlformats.org/markup-compatibility/2006">
+    <mc:Choice xmlns:p14="http://schemas.microsoft.com/office/powerpoint/2010/main" Requires="p14">
       <p:transition spd="med" p14:dur="700">
         <p:fade/>
       </p:transition>
     </mc:Choice>
-    <mc:Fallback xmlns="">
+    <mc:Fallback>
       <p:transition spd="med">
         <p:fade/>
       </p:transition>
@@ -13653,11 +13615,15 @@
           <p:cNvGraphicFramePr>
             <a:graphicFrameLocks noGrp="1"/>
           </p:cNvGraphicFramePr>
-          <p:nvPr/>
+          <p:nvPr>
+            <p:custDataLst>
+              <p:tags r:id="rId1"/>
+            </p:custDataLst>
+          </p:nvPr>
         </p:nvGraphicFramePr>
         <p:xfrm>
           <a:off x="1031363" y="1463314"/>
-          <a:ext cx="10129275" cy="4233780"/>
+          <a:ext cx="10129520" cy="4232910"/>
         </p:xfrm>
         <a:graphic>
           <a:graphicData uri="http://schemas.openxmlformats.org/drawingml/2006/table">
@@ -13686,11 +13652,18 @@
                           <a:solidFill>
                             <a:srgbClr val="000000"/>
                           </a:solidFill>
-                          <a:latin typeface="微软雅黑" pitchFamily="34" charset="-122"/>
-                          <a:ea typeface="微软雅黑" pitchFamily="34" charset="-122"/>
+                          <a:latin typeface="微软雅黑" panose="020B0503020204020204" pitchFamily="34" charset="-122"/>
+                          <a:ea typeface="微软雅黑" panose="020B0503020204020204" pitchFamily="34" charset="-122"/>
                         </a:rPr>
                         <a:t>基本信息</a:t>
                       </a:r>
+                      <a:endParaRPr lang="zh-CN" altLang="en-US" sz="1200" b="1" i="0" u="none" strike="noStrike" dirty="0">
+                        <a:solidFill>
+                          <a:srgbClr val="000000"/>
+                        </a:solidFill>
+                        <a:latin typeface="微软雅黑" panose="020B0503020204020204" pitchFamily="34" charset="-122"/>
+                        <a:ea typeface="微软雅黑" panose="020B0503020204020204" pitchFamily="34" charset="-122"/>
+                      </a:endParaRPr>
                     </a:p>
                   </a:txBody>
                   <a:tcPr marL="10079" marR="10079" marT="10080" marB="0" anchor="ctr">
@@ -13739,83 +13712,27 @@
                   </a:tcPr>
                 </a:tc>
                 <a:tc hMerge="1">
-                  <a:txBody>
-                    <a:bodyPr/>
-                    <a:lstStyle/>
-                    <a:p>
-                      <a:endParaRPr lang="zh-CN" altLang="en-US"/>
-                    </a:p>
-                  </a:txBody>
                   <a:tcPr/>
                 </a:tc>
                 <a:tc hMerge="1">
-                  <a:txBody>
-                    <a:bodyPr/>
-                    <a:lstStyle/>
-                    <a:p>
-                      <a:endParaRPr lang="zh-TW" altLang="en-US"/>
-                    </a:p>
-                  </a:txBody>
                   <a:tcPr/>
                 </a:tc>
                 <a:tc hMerge="1">
-                  <a:txBody>
-                    <a:bodyPr/>
-                    <a:lstStyle/>
-                    <a:p>
-                      <a:endParaRPr lang="zh-TW" altLang="en-US"/>
-                    </a:p>
-                  </a:txBody>
                   <a:tcPr/>
                 </a:tc>
                 <a:tc hMerge="1">
-                  <a:txBody>
-                    <a:bodyPr/>
-                    <a:lstStyle/>
-                    <a:p>
-                      <a:endParaRPr lang="zh-CN" altLang="en-US"/>
-                    </a:p>
-                  </a:txBody>
                   <a:tcPr/>
                 </a:tc>
                 <a:tc hMerge="1">
-                  <a:txBody>
-                    <a:bodyPr/>
-                    <a:lstStyle/>
-                    <a:p>
-                      <a:endParaRPr lang="zh-CN" altLang="en-US"/>
-                    </a:p>
-                  </a:txBody>
                   <a:tcPr/>
                 </a:tc>
                 <a:tc hMerge="1">
-                  <a:txBody>
-                    <a:bodyPr/>
-                    <a:lstStyle/>
-                    <a:p>
-                      <a:endParaRPr lang="zh-TW" altLang="en-US"/>
-                    </a:p>
-                  </a:txBody>
                   <a:tcPr/>
                 </a:tc>
                 <a:tc hMerge="1">
-                  <a:txBody>
-                    <a:bodyPr/>
-                    <a:lstStyle/>
-                    <a:p>
-                      <a:endParaRPr lang="zh-CN" altLang="en-US"/>
-                    </a:p>
-                  </a:txBody>
                   <a:tcPr/>
                 </a:tc>
                 <a:tc hMerge="1">
-                  <a:txBody>
-                    <a:bodyPr/>
-                    <a:lstStyle/>
-                    <a:p>
-                      <a:endParaRPr lang="zh-CN" altLang="en-US"/>
-                    </a:p>
-                  </a:txBody>
                   <a:tcPr/>
                 </a:tc>
               </a:tr>
@@ -13831,11 +13748,18 @@
                           <a:solidFill>
                             <a:srgbClr val="000000"/>
                           </a:solidFill>
-                          <a:latin typeface="微软雅黑" pitchFamily="34" charset="-122"/>
-                          <a:ea typeface="微软雅黑" pitchFamily="34" charset="-122"/>
+                          <a:latin typeface="微软雅黑" panose="020B0503020204020204" pitchFamily="34" charset="-122"/>
+                          <a:ea typeface="微软雅黑" panose="020B0503020204020204" pitchFamily="34" charset="-122"/>
                         </a:rPr>
                         <a:t>姓名</a:t>
                       </a:r>
+                      <a:endParaRPr lang="zh-CN" altLang="en-US" sz="1200" b="1" i="0" u="none" strike="noStrike" dirty="0">
+                        <a:solidFill>
+                          <a:srgbClr val="000000"/>
+                        </a:solidFill>
+                        <a:latin typeface="微软雅黑" panose="020B0503020204020204" pitchFamily="34" charset="-122"/>
+                        <a:ea typeface="微软雅黑" panose="020B0503020204020204" pitchFamily="34" charset="-122"/>
+                      </a:endParaRPr>
                     </a:p>
                   </a:txBody>
                   <a:tcPr marL="10079" marR="10079" marT="10080" marB="0" anchor="ctr">
@@ -13884,15 +13808,32 @@
                     <a:p>
                       <a:pPr algn="ctr" fontAlgn="ctr"/>
                       <a:r>
+                        <a:rPr lang="zh-TW" altLang="zh-CN" sz="1200" b="0" i="0" u="none" strike="noStrike" dirty="0">
+                          <a:solidFill>
+                            <a:srgbClr val="000000"/>
+                          </a:solidFill>
+                          <a:latin typeface="微软雅黑" panose="020B0503020204020204" pitchFamily="34" charset="-122"/>
+                          <a:ea typeface="微软雅黑" panose="020B0503020204020204" pitchFamily="34" charset="-122"/>
+                        </a:rPr>
+                        <a:t>張豪</a:t>
+                      </a:r>
+                      <a:r>
                         <a:rPr lang="zh-CN" altLang="en-US" sz="1200" b="0" i="0" u="none" strike="noStrike" dirty="0">
                           <a:solidFill>
                             <a:srgbClr val="000000"/>
                           </a:solidFill>
-                          <a:latin typeface="微软雅黑" pitchFamily="34" charset="-122"/>
-                          <a:ea typeface="微软雅黑" pitchFamily="34" charset="-122"/>
+                          <a:latin typeface="微软雅黑" panose="020B0503020204020204" pitchFamily="34" charset="-122"/>
+                          <a:ea typeface="微软雅黑" panose="020B0503020204020204" pitchFamily="34" charset="-122"/>
                         </a:rPr>
                         <a:t>　</a:t>
                       </a:r>
+                      <a:endParaRPr lang="zh-CN" altLang="en-US" sz="1200" b="0" i="0" u="none" strike="noStrike" dirty="0">
+                        <a:solidFill>
+                          <a:srgbClr val="000000"/>
+                        </a:solidFill>
+                        <a:latin typeface="微软雅黑" panose="020B0503020204020204" pitchFamily="34" charset="-122"/>
+                        <a:ea typeface="微软雅黑" panose="020B0503020204020204" pitchFamily="34" charset="-122"/>
+                      </a:endParaRPr>
                     </a:p>
                   </a:txBody>
                   <a:tcPr marL="10079" marR="10079" marT="10080" marB="0" anchor="ctr">
@@ -13935,23 +13876,9 @@
                   </a:tcPr>
                 </a:tc>
                 <a:tc hMerge="1">
-                  <a:txBody>
-                    <a:bodyPr/>
-                    <a:lstStyle/>
-                    <a:p>
-                      <a:endParaRPr lang="zh-TW" altLang="en-US"/>
-                    </a:p>
-                  </a:txBody>
                   <a:tcPr/>
                 </a:tc>
                 <a:tc hMerge="1">
-                  <a:txBody>
-                    <a:bodyPr/>
-                    <a:lstStyle/>
-                    <a:p>
-                      <a:endParaRPr lang="zh-TW" altLang="en-US"/>
-                    </a:p>
-                  </a:txBody>
                   <a:tcPr/>
                 </a:tc>
                 <a:tc>
@@ -13965,8 +13892,8 @@
                           <a:solidFill>
                             <a:srgbClr val="000000"/>
                           </a:solidFill>
-                          <a:latin typeface="微软雅黑" pitchFamily="34" charset="-122"/>
-                          <a:ea typeface="微软雅黑" pitchFamily="34" charset="-122"/>
+                          <a:latin typeface="微软雅黑" panose="020B0503020204020204" pitchFamily="34" charset="-122"/>
+                          <a:ea typeface="微软雅黑" panose="020B0503020204020204" pitchFamily="34" charset="-122"/>
                         </a:rPr>
                         <a:t>年齡</a:t>
                       </a:r>
@@ -13974,8 +13901,8 @@
                         <a:solidFill>
                           <a:srgbClr val="000000"/>
                         </a:solidFill>
-                        <a:latin typeface="微软雅黑" pitchFamily="34" charset="-122"/>
-                        <a:ea typeface="微软雅黑" pitchFamily="34" charset="-122"/>
+                        <a:latin typeface="微软雅黑" panose="020B0503020204020204" pitchFamily="34" charset="-122"/>
+                        <a:ea typeface="微软雅黑" panose="020B0503020204020204" pitchFamily="34" charset="-122"/>
                       </a:endParaRPr>
                     </a:p>
                   </a:txBody>
@@ -14025,15 +13952,32 @@
                     <a:p>
                       <a:pPr algn="ctr" fontAlgn="ctr"/>
                       <a:r>
+                        <a:rPr lang="en-US" altLang="zh-CN" sz="1200" b="0" i="0" u="none" strike="noStrike" dirty="0">
+                          <a:solidFill>
+                            <a:srgbClr val="000000"/>
+                          </a:solidFill>
+                          <a:latin typeface="微软雅黑" panose="020B0503020204020204" pitchFamily="34" charset="-122"/>
+                          <a:ea typeface="微软雅黑" panose="020B0503020204020204" pitchFamily="34" charset="-122"/>
+                        </a:rPr>
+                        <a:t>31</a:t>
+                      </a:r>
+                      <a:r>
                         <a:rPr lang="zh-CN" altLang="en-US" sz="1200" b="0" i="0" u="none" strike="noStrike" dirty="0">
                           <a:solidFill>
                             <a:srgbClr val="000000"/>
                           </a:solidFill>
-                          <a:latin typeface="微软雅黑" pitchFamily="34" charset="-122"/>
-                          <a:ea typeface="微软雅黑" pitchFamily="34" charset="-122"/>
+                          <a:latin typeface="微软雅黑" panose="020B0503020204020204" pitchFamily="34" charset="-122"/>
+                          <a:ea typeface="微软雅黑" panose="020B0503020204020204" pitchFamily="34" charset="-122"/>
                         </a:rPr>
                         <a:t>　</a:t>
                       </a:r>
+                      <a:endParaRPr lang="zh-CN" altLang="en-US" sz="1200" b="0" i="0" u="none" strike="noStrike" dirty="0">
+                        <a:solidFill>
+                          <a:srgbClr val="000000"/>
+                        </a:solidFill>
+                        <a:latin typeface="微软雅黑" panose="020B0503020204020204" pitchFamily="34" charset="-122"/>
+                        <a:ea typeface="微软雅黑" panose="020B0503020204020204" pitchFamily="34" charset="-122"/>
+                      </a:endParaRPr>
                     </a:p>
                   </a:txBody>
                   <a:tcPr marL="10079" marR="10079" marT="10080" marB="0" anchor="ctr">
@@ -14076,13 +14020,6 @@
                   </a:tcPr>
                 </a:tc>
                 <a:tc hMerge="1">
-                  <a:txBody>
-                    <a:bodyPr/>
-                    <a:lstStyle/>
-                    <a:p>
-                      <a:endParaRPr lang="zh-TW" altLang="en-US"/>
-                    </a:p>
-                  </a:txBody>
                   <a:tcPr/>
                 </a:tc>
                 <a:tc>
@@ -14104,7 +14041,6 @@
                         <a:buSzTx/>
                         <a:buFontTx/>
                         <a:buNone/>
-                        <a:tabLst/>
                         <a:defRPr/>
                       </a:pPr>
                       <a:r>
@@ -14112,11 +14048,18 @@
                           <a:solidFill>
                             <a:srgbClr val="000000"/>
                           </a:solidFill>
-                          <a:latin typeface="微软雅黑" pitchFamily="34" charset="-122"/>
-                          <a:ea typeface="微软雅黑" pitchFamily="34" charset="-122"/>
+                          <a:latin typeface="微软雅黑" panose="020B0503020204020204" pitchFamily="34" charset="-122"/>
+                          <a:ea typeface="微软雅黑" panose="020B0503020204020204" pitchFamily="34" charset="-122"/>
                         </a:rPr>
                         <a:t>資位</a:t>
                       </a:r>
+                      <a:endParaRPr lang="zh-CN" altLang="en-US" sz="1200" b="1" i="0" u="none" strike="noStrike" dirty="0" smtClean="0">
+                        <a:solidFill>
+                          <a:srgbClr val="000000"/>
+                        </a:solidFill>
+                        <a:latin typeface="微软雅黑" panose="020B0503020204020204" pitchFamily="34" charset="-122"/>
+                        <a:ea typeface="微软雅黑" panose="020B0503020204020204" pitchFamily="34" charset="-122"/>
+                      </a:endParaRPr>
                     </a:p>
                   </a:txBody>
                   <a:tcPr marL="10079" marR="10079" marT="10080" marB="0" anchor="ctr">
@@ -14164,12 +14107,32 @@
                     <a:lstStyle/>
                     <a:p>
                       <a:pPr algn="ctr" fontAlgn="ctr"/>
-                      <a:endParaRPr lang="zh-CN" altLang="en-US" sz="1200" b="0" i="0" u="none" strike="noStrike" dirty="0">
+                      <a:r>
+                        <a:rPr lang="zh-TW" altLang="zh-CN" sz="1200" b="0" i="0" u="none" strike="noStrike" dirty="0">
+                          <a:solidFill>
+                            <a:srgbClr val="000000"/>
+                          </a:solidFill>
+                          <a:latin typeface="微软雅黑" panose="020B0503020204020204" pitchFamily="34" charset="-122"/>
+                          <a:ea typeface="微软雅黑" panose="020B0503020204020204" pitchFamily="34" charset="-122"/>
+                        </a:rPr>
+                        <a:t>師</a:t>
+                      </a:r>
+                      <a:r>
+                        <a:rPr lang="en-US" altLang="zh-TW" sz="1200" b="0" i="0" u="none" strike="noStrike" dirty="0">
+                          <a:solidFill>
+                            <a:srgbClr val="000000"/>
+                          </a:solidFill>
+                          <a:latin typeface="微软雅黑" panose="020B0503020204020204" pitchFamily="34" charset="-122"/>
+                          <a:ea typeface="微软雅黑" panose="020B0503020204020204" pitchFamily="34" charset="-122"/>
+                        </a:rPr>
+                        <a:t>4</a:t>
+                      </a:r>
+                      <a:endParaRPr lang="en-US" altLang="zh-TW" sz="1200" b="0" i="0" u="none" strike="noStrike" dirty="0">
                         <a:solidFill>
                           <a:srgbClr val="000000"/>
                         </a:solidFill>
-                        <a:latin typeface="微软雅黑" pitchFamily="34" charset="-122"/>
-                        <a:ea typeface="微软雅黑" pitchFamily="34" charset="-122"/>
+                        <a:latin typeface="微软雅黑" panose="020B0503020204020204" pitchFamily="34" charset="-122"/>
+                        <a:ea typeface="微软雅黑" panose="020B0503020204020204" pitchFamily="34" charset="-122"/>
                       </a:endParaRPr>
                     </a:p>
                   </a:txBody>
@@ -14225,8 +14188,8 @@
                           <a:solidFill>
                             <a:srgbClr val="000000"/>
                           </a:solidFill>
-                          <a:latin typeface="微软雅黑" pitchFamily="34" charset="-122"/>
-                          <a:ea typeface="微软雅黑" pitchFamily="34" charset="-122"/>
+                          <a:latin typeface="微软雅黑" panose="020B0503020204020204" pitchFamily="34" charset="-122"/>
+                          <a:ea typeface="微软雅黑" panose="020B0503020204020204" pitchFamily="34" charset="-122"/>
                         </a:rPr>
                         <a:t>學歷</a:t>
                       </a:r>
@@ -14234,8 +14197,8 @@
                         <a:solidFill>
                           <a:srgbClr val="000000"/>
                         </a:solidFill>
-                        <a:latin typeface="微软雅黑" pitchFamily="34" charset="-122"/>
-                        <a:ea typeface="微软雅黑" pitchFamily="34" charset="-122"/>
+                        <a:latin typeface="微软雅黑" panose="020B0503020204020204" pitchFamily="34" charset="-122"/>
+                        <a:ea typeface="微软雅黑" panose="020B0503020204020204" pitchFamily="34" charset="-122"/>
                       </a:endParaRPr>
                     </a:p>
                   </a:txBody>
@@ -14285,15 +14248,32 @@
                     <a:p>
                       <a:pPr algn="ctr" fontAlgn="ctr"/>
                       <a:r>
+                        <a:rPr lang="zh-TW" altLang="zh-CN" sz="1200" b="0" i="0" u="none" strike="noStrike" dirty="0">
+                          <a:solidFill>
+                            <a:srgbClr val="000000"/>
+                          </a:solidFill>
+                          <a:latin typeface="微软雅黑" panose="020B0503020204020204" pitchFamily="34" charset="-122"/>
+                          <a:ea typeface="微软雅黑" panose="020B0503020204020204" pitchFamily="34" charset="-122"/>
+                        </a:rPr>
+                        <a:t>本科</a:t>
+                      </a:r>
+                      <a:r>
                         <a:rPr lang="zh-CN" altLang="en-US" sz="1200" b="0" i="0" u="none" strike="noStrike" dirty="0">
                           <a:solidFill>
                             <a:srgbClr val="000000"/>
                           </a:solidFill>
-                          <a:latin typeface="微软雅黑" pitchFamily="34" charset="-122"/>
-                          <a:ea typeface="微软雅黑" pitchFamily="34" charset="-122"/>
+                          <a:latin typeface="微软雅黑" panose="020B0503020204020204" pitchFamily="34" charset="-122"/>
+                          <a:ea typeface="微软雅黑" panose="020B0503020204020204" pitchFamily="34" charset="-122"/>
                         </a:rPr>
                         <a:t>　</a:t>
                       </a:r>
+                      <a:endParaRPr lang="zh-CN" altLang="en-US" sz="1200" b="0" i="0" u="none" strike="noStrike" dirty="0">
+                        <a:solidFill>
+                          <a:srgbClr val="000000"/>
+                        </a:solidFill>
+                        <a:latin typeface="微软雅黑" panose="020B0503020204020204" pitchFamily="34" charset="-122"/>
+                        <a:ea typeface="微软雅黑" panose="020B0503020204020204" pitchFamily="34" charset="-122"/>
+                      </a:endParaRPr>
                     </a:p>
                   </a:txBody>
                   <a:tcPr marL="10079" marR="10079" marT="10080" marB="0" anchor="ctr">
@@ -14336,23 +14316,9 @@
                   </a:tcPr>
                 </a:tc>
                 <a:tc hMerge="1">
-                  <a:txBody>
-                    <a:bodyPr/>
-                    <a:lstStyle/>
-                    <a:p>
-                      <a:endParaRPr lang="zh-TW" altLang="en-US"/>
-                    </a:p>
-                  </a:txBody>
                   <a:tcPr/>
                 </a:tc>
                 <a:tc hMerge="1">
-                  <a:txBody>
-                    <a:bodyPr/>
-                    <a:lstStyle/>
-                    <a:p>
-                      <a:endParaRPr lang="zh-TW" altLang="en-US"/>
-                    </a:p>
-                  </a:txBody>
                   <a:tcPr/>
                 </a:tc>
                 <a:tc>
@@ -14366,8 +14332,8 @@
                           <a:solidFill>
                             <a:srgbClr val="000000"/>
                           </a:solidFill>
-                          <a:latin typeface="微软雅黑" pitchFamily="34" charset="-122"/>
-                          <a:ea typeface="微软雅黑" pitchFamily="34" charset="-122"/>
+                          <a:latin typeface="微软雅黑" panose="020B0503020204020204" pitchFamily="34" charset="-122"/>
+                          <a:ea typeface="微软雅黑" panose="020B0503020204020204" pitchFamily="34" charset="-122"/>
                         </a:rPr>
                         <a:t>畢業學校</a:t>
                       </a:r>
@@ -14375,8 +14341,8 @@
                         <a:solidFill>
                           <a:srgbClr val="000000"/>
                         </a:solidFill>
-                        <a:latin typeface="微软雅黑" pitchFamily="34" charset="-122"/>
-                        <a:ea typeface="微软雅黑" pitchFamily="34" charset="-122"/>
+                        <a:latin typeface="微软雅黑" panose="020B0503020204020204" pitchFamily="34" charset="-122"/>
+                        <a:ea typeface="微软雅黑" panose="020B0503020204020204" pitchFamily="34" charset="-122"/>
                       </a:endParaRPr>
                     </a:p>
                   </a:txBody>
@@ -14426,15 +14392,32 @@
                     <a:p>
                       <a:pPr algn="ctr" fontAlgn="ctr"/>
                       <a:r>
+                        <a:rPr lang="zh-TW" altLang="zh-CN" sz="1200" b="0" i="0" u="none" strike="noStrike" dirty="0">
+                          <a:solidFill>
+                            <a:srgbClr val="000000"/>
+                          </a:solidFill>
+                          <a:latin typeface="微软雅黑" panose="020B0503020204020204" pitchFamily="34" charset="-122"/>
+                          <a:ea typeface="微软雅黑" panose="020B0503020204020204" pitchFamily="34" charset="-122"/>
+                        </a:rPr>
+                        <a:t>山西大同大學</a:t>
+                      </a:r>
+                      <a:r>
                         <a:rPr lang="zh-CN" altLang="en-US" sz="1200" b="0" i="0" u="none" strike="noStrike" dirty="0">
                           <a:solidFill>
                             <a:srgbClr val="000000"/>
                           </a:solidFill>
-                          <a:latin typeface="微软雅黑" pitchFamily="34" charset="-122"/>
-                          <a:ea typeface="微软雅黑" pitchFamily="34" charset="-122"/>
+                          <a:latin typeface="微软雅黑" panose="020B0503020204020204" pitchFamily="34" charset="-122"/>
+                          <a:ea typeface="微软雅黑" panose="020B0503020204020204" pitchFamily="34" charset="-122"/>
                         </a:rPr>
                         <a:t>　</a:t>
                       </a:r>
+                      <a:endParaRPr lang="zh-CN" altLang="en-US" sz="1200" b="0" i="0" u="none" strike="noStrike" dirty="0">
+                        <a:solidFill>
+                          <a:srgbClr val="000000"/>
+                        </a:solidFill>
+                        <a:latin typeface="微软雅黑" panose="020B0503020204020204" pitchFamily="34" charset="-122"/>
+                        <a:ea typeface="微软雅黑" panose="020B0503020204020204" pitchFamily="34" charset="-122"/>
+                      </a:endParaRPr>
                     </a:p>
                   </a:txBody>
                   <a:tcPr marL="10079" marR="10079" marT="10080" marB="0" anchor="ctr">
@@ -14477,13 +14460,6 @@
                   </a:tcPr>
                 </a:tc>
                 <a:tc hMerge="1">
-                  <a:txBody>
-                    <a:bodyPr/>
-                    <a:lstStyle/>
-                    <a:p>
-                      <a:endParaRPr lang="zh-TW" altLang="en-US"/>
-                    </a:p>
-                  </a:txBody>
                   <a:tcPr/>
                 </a:tc>
                 <a:tc>
@@ -14497,8 +14473,8 @@
                           <a:solidFill>
                             <a:srgbClr val="000000"/>
                           </a:solidFill>
-                          <a:latin typeface="微软雅黑" pitchFamily="34" charset="-122"/>
-                          <a:ea typeface="微软雅黑" pitchFamily="34" charset="-122"/>
+                          <a:latin typeface="微软雅黑" panose="020B0503020204020204" pitchFamily="34" charset="-122"/>
+                          <a:ea typeface="微软雅黑" panose="020B0503020204020204" pitchFamily="34" charset="-122"/>
                         </a:rPr>
                         <a:t>專業</a:t>
                       </a:r>
@@ -14506,8 +14482,8 @@
                         <a:solidFill>
                           <a:srgbClr val="000000"/>
                         </a:solidFill>
-                        <a:latin typeface="微软雅黑" pitchFamily="34" charset="-122"/>
-                        <a:ea typeface="微软雅黑" pitchFamily="34" charset="-122"/>
+                        <a:latin typeface="微软雅黑" panose="020B0503020204020204" pitchFamily="34" charset="-122"/>
+                        <a:ea typeface="微软雅黑" panose="020B0503020204020204" pitchFamily="34" charset="-122"/>
                       </a:endParaRPr>
                     </a:p>
                   </a:txBody>
@@ -14556,12 +14532,22 @@
                     <a:lstStyle/>
                     <a:p>
                       <a:pPr algn="ctr" fontAlgn="ctr"/>
-                      <a:endParaRPr lang="zh-CN" altLang="en-US" sz="1200" b="0" i="0" u="none" strike="noStrike" dirty="0">
+                      <a:r>
+                        <a:rPr lang="zh-TW" altLang="zh-CN" sz="1200" b="0" i="0" u="none" strike="noStrike" dirty="0">
+                          <a:solidFill>
+                            <a:srgbClr val="000000"/>
+                          </a:solidFill>
+                          <a:latin typeface="微软雅黑" panose="020B0503020204020204" pitchFamily="34" charset="-122"/>
+                          <a:ea typeface="微软雅黑" panose="020B0503020204020204" pitchFamily="34" charset="-122"/>
+                        </a:rPr>
+                        <a:t>計算機科學與技術</a:t>
+                      </a:r>
+                      <a:endParaRPr lang="zh-TW" altLang="zh-CN" sz="1200" b="0" i="0" u="none" strike="noStrike" dirty="0">
                         <a:solidFill>
                           <a:srgbClr val="000000"/>
                         </a:solidFill>
-                        <a:latin typeface="微软雅黑" pitchFamily="34" charset="-122"/>
-                        <a:ea typeface="微软雅黑" pitchFamily="34" charset="-122"/>
+                        <a:latin typeface="微软雅黑" panose="020B0503020204020204" pitchFamily="34" charset="-122"/>
+                        <a:ea typeface="微软雅黑" panose="020B0503020204020204" pitchFamily="34" charset="-122"/>
                       </a:endParaRPr>
                     </a:p>
                   </a:txBody>
@@ -14617,8 +14603,8 @@
                           <a:solidFill>
                             <a:srgbClr val="000000"/>
                           </a:solidFill>
-                          <a:latin typeface="微软雅黑" pitchFamily="34" charset="-122"/>
-                          <a:ea typeface="微软雅黑" pitchFamily="34" charset="-122"/>
+                          <a:latin typeface="微软雅黑" panose="020B0503020204020204" pitchFamily="34" charset="-122"/>
+                          <a:ea typeface="微软雅黑" panose="020B0503020204020204" pitchFamily="34" charset="-122"/>
                         </a:rPr>
                         <a:t>現部門</a:t>
                       </a:r>
@@ -14626,8 +14612,8 @@
                         <a:solidFill>
                           <a:srgbClr val="000000"/>
                         </a:solidFill>
-                        <a:latin typeface="微软雅黑" pitchFamily="34" charset="-122"/>
-                        <a:ea typeface="微软雅黑" pitchFamily="34" charset="-122"/>
+                        <a:latin typeface="微软雅黑" panose="020B0503020204020204" pitchFamily="34" charset="-122"/>
+                        <a:ea typeface="微软雅黑" panose="020B0503020204020204" pitchFamily="34" charset="-122"/>
                       </a:endParaRPr>
                     </a:p>
                   </a:txBody>
@@ -14677,15 +14663,32 @@
                     <a:p>
                       <a:pPr algn="ctr" fontAlgn="ctr"/>
                       <a:r>
+                        <a:rPr lang="zh-TW" altLang="zh-CN" sz="1200" b="0" i="0" u="none" strike="noStrike" dirty="0">
+                          <a:solidFill>
+                            <a:srgbClr val="000000"/>
+                          </a:solidFill>
+                          <a:latin typeface="微软雅黑" panose="020B0503020204020204" pitchFamily="34" charset="-122"/>
+                          <a:ea typeface="微软雅黑" panose="020B0503020204020204" pitchFamily="34" charset="-122"/>
+                        </a:rPr>
+                        <a:t>精益管理系統開發中心園區管理系統開發部</a:t>
+                      </a:r>
+                      <a:r>
                         <a:rPr lang="zh-CN" altLang="en-US" sz="1200" b="0" i="0" u="none" strike="noStrike" dirty="0">
                           <a:solidFill>
                             <a:srgbClr val="000000"/>
                           </a:solidFill>
-                          <a:latin typeface="微软雅黑" pitchFamily="34" charset="-122"/>
-                          <a:ea typeface="微软雅黑" pitchFamily="34" charset="-122"/>
+                          <a:latin typeface="微软雅黑" panose="020B0503020204020204" pitchFamily="34" charset="-122"/>
+                          <a:ea typeface="微软雅黑" panose="020B0503020204020204" pitchFamily="34" charset="-122"/>
                         </a:rPr>
                         <a:t>　</a:t>
                       </a:r>
+                      <a:endParaRPr lang="zh-CN" altLang="en-US" sz="1200" b="0" i="0" u="none" strike="noStrike" dirty="0">
+                        <a:solidFill>
+                          <a:srgbClr val="000000"/>
+                        </a:solidFill>
+                        <a:latin typeface="微软雅黑" panose="020B0503020204020204" pitchFamily="34" charset="-122"/>
+                        <a:ea typeface="微软雅黑" panose="020B0503020204020204" pitchFamily="34" charset="-122"/>
+                      </a:endParaRPr>
                     </a:p>
                   </a:txBody>
                   <a:tcPr marL="10079" marR="10079" marT="10080" marB="0" anchor="ctr">
@@ -14728,23 +14731,9 @@
                   </a:tcPr>
                 </a:tc>
                 <a:tc hMerge="1">
-                  <a:txBody>
-                    <a:bodyPr/>
-                    <a:lstStyle/>
-                    <a:p>
-                      <a:endParaRPr lang="zh-TW" altLang="en-US"/>
-                    </a:p>
-                  </a:txBody>
                   <a:tcPr/>
                 </a:tc>
                 <a:tc hMerge="1">
-                  <a:txBody>
-                    <a:bodyPr/>
-                    <a:lstStyle/>
-                    <a:p>
-                      <a:endParaRPr lang="zh-TW" altLang="en-US"/>
-                    </a:p>
-                  </a:txBody>
                   <a:tcPr/>
                 </a:tc>
                 <a:tc>
@@ -14758,8 +14747,8 @@
                           <a:solidFill>
                             <a:srgbClr val="000000"/>
                           </a:solidFill>
-                          <a:latin typeface="微软雅黑" pitchFamily="34" charset="-122"/>
-                          <a:ea typeface="微软雅黑" pitchFamily="34" charset="-122"/>
+                          <a:latin typeface="微软雅黑" panose="020B0503020204020204" pitchFamily="34" charset="-122"/>
+                          <a:ea typeface="微软雅黑" panose="020B0503020204020204" pitchFamily="34" charset="-122"/>
                         </a:rPr>
                         <a:t>申報職級</a:t>
                       </a:r>
@@ -14767,8 +14756,8 @@
                         <a:solidFill>
                           <a:srgbClr val="000000"/>
                         </a:solidFill>
-                        <a:latin typeface="微软雅黑" pitchFamily="34" charset="-122"/>
-                        <a:ea typeface="微软雅黑" pitchFamily="34" charset="-122"/>
+                        <a:latin typeface="微软雅黑" panose="020B0503020204020204" pitchFamily="34" charset="-122"/>
+                        <a:ea typeface="微软雅黑" panose="020B0503020204020204" pitchFamily="34" charset="-122"/>
                       </a:endParaRPr>
                     </a:p>
                   </a:txBody>
@@ -14817,12 +14806,32 @@
                     <a:lstStyle/>
                     <a:p>
                       <a:pPr algn="ctr" fontAlgn="ctr"/>
-                      <a:endParaRPr lang="zh-CN" altLang="en-US" sz="1200" b="0" i="0" u="none" strike="noStrike" dirty="0">
+                      <a:r>
+                        <a:rPr lang="en-US" altLang="zh-CN" sz="1200" b="0" i="0" u="none" strike="noStrike" dirty="0">
+                          <a:solidFill>
+                            <a:srgbClr val="000000"/>
+                          </a:solidFill>
+                          <a:latin typeface="微软雅黑" panose="020B0503020204020204" pitchFamily="34" charset="-122"/>
+                          <a:ea typeface="微软雅黑" panose="020B0503020204020204" pitchFamily="34" charset="-122"/>
+                        </a:rPr>
+                        <a:t>2-1</a:t>
+                      </a:r>
+                      <a:r>
+                        <a:rPr lang="zh-TW" altLang="en-US" sz="1200" b="0" i="0" u="none" strike="noStrike" dirty="0">
+                          <a:solidFill>
+                            <a:srgbClr val="000000"/>
+                          </a:solidFill>
+                          <a:latin typeface="微软雅黑" panose="020B0503020204020204" pitchFamily="34" charset="-122"/>
+                          <a:ea typeface="微软雅黑" panose="020B0503020204020204" pitchFamily="34" charset="-122"/>
+                        </a:rPr>
+                        <a:t>研發工程師</a:t>
+                      </a:r>
+                      <a:endParaRPr lang="zh-TW" altLang="en-US" sz="1200" b="0" i="0" u="none" strike="noStrike" dirty="0">
                         <a:solidFill>
                           <a:srgbClr val="000000"/>
                         </a:solidFill>
-                        <a:latin typeface="微软雅黑" pitchFamily="34" charset="-122"/>
-                        <a:ea typeface="微软雅黑" pitchFamily="34" charset="-122"/>
+                        <a:latin typeface="微软雅黑" panose="020B0503020204020204" pitchFamily="34" charset="-122"/>
+                        <a:ea typeface="微软雅黑" panose="020B0503020204020204" pitchFamily="34" charset="-122"/>
                       </a:endParaRPr>
                     </a:p>
                   </a:txBody>
@@ -14866,13 +14875,6 @@
                   </a:tcPr>
                 </a:tc>
                 <a:tc hMerge="1">
-                  <a:txBody>
-                    <a:bodyPr/>
-                    <a:lstStyle/>
-                    <a:p>
-                      <a:endParaRPr lang="zh-TW" altLang="en-US"/>
-                    </a:p>
-                  </a:txBody>
                   <a:tcPr/>
                 </a:tc>
                 <a:tc>
@@ -14894,7 +14896,6 @@
                         <a:buSzTx/>
                         <a:buFontTx/>
                         <a:buNone/>
-                        <a:tabLst/>
                         <a:defRPr/>
                       </a:pPr>
                       <a:r>
@@ -14902,11 +14903,18 @@
                           <a:solidFill>
                             <a:srgbClr val="000000"/>
                           </a:solidFill>
-                          <a:latin typeface="微软雅黑" pitchFamily="34" charset="-122"/>
-                          <a:ea typeface="微软雅黑" pitchFamily="34" charset="-122"/>
+                          <a:latin typeface="微软雅黑" panose="020B0503020204020204" pitchFamily="34" charset="-122"/>
+                          <a:ea typeface="微软雅黑" panose="020B0503020204020204" pitchFamily="34" charset="-122"/>
                         </a:rPr>
                         <a:t>集團年資</a:t>
                       </a:r>
+                      <a:endParaRPr lang="zh-CN" altLang="en-US" sz="1200" b="1" i="0" u="none" strike="noStrike" dirty="0" smtClean="0">
+                        <a:solidFill>
+                          <a:srgbClr val="000000"/>
+                        </a:solidFill>
+                        <a:latin typeface="微软雅黑" panose="020B0503020204020204" pitchFamily="34" charset="-122"/>
+                        <a:ea typeface="微软雅黑" panose="020B0503020204020204" pitchFamily="34" charset="-122"/>
+                      </a:endParaRPr>
                     </a:p>
                   </a:txBody>
                   <a:tcPr marL="10079" marR="10079" marT="10080" marB="0" anchor="ctr">
@@ -14954,12 +14962,22 @@
                     <a:lstStyle/>
                     <a:p>
                       <a:pPr algn="ctr" fontAlgn="ctr"/>
-                      <a:endParaRPr lang="zh-CN" altLang="en-US" sz="1200" b="0" i="0" u="none" strike="noStrike" dirty="0">
+                      <a:r>
+                        <a:rPr lang="en-US" altLang="zh-CN" sz="1200" b="0" i="0" u="none" strike="noStrike" dirty="0">
+                          <a:solidFill>
+                            <a:srgbClr val="000000"/>
+                          </a:solidFill>
+                          <a:latin typeface="微软雅黑" panose="020B0503020204020204" pitchFamily="34" charset="-122"/>
+                          <a:ea typeface="微软雅黑" panose="020B0503020204020204" pitchFamily="34" charset="-122"/>
+                        </a:rPr>
+                        <a:t>2.58</a:t>
+                      </a:r>
+                      <a:endParaRPr lang="en-US" altLang="zh-CN" sz="1200" b="0" i="0" u="none" strike="noStrike" dirty="0">
                         <a:solidFill>
                           <a:srgbClr val="000000"/>
                         </a:solidFill>
-                        <a:latin typeface="微软雅黑" pitchFamily="34" charset="-122"/>
-                        <a:ea typeface="微软雅黑" pitchFamily="34" charset="-122"/>
+                        <a:latin typeface="微软雅黑" panose="020B0503020204020204" pitchFamily="34" charset="-122"/>
+                        <a:ea typeface="微软雅黑" panose="020B0503020204020204" pitchFamily="34" charset="-122"/>
                       </a:endParaRPr>
                     </a:p>
                   </a:txBody>
@@ -15015,8 +15033,8 @@
                           <a:solidFill>
                             <a:srgbClr val="000000"/>
                           </a:solidFill>
-                          <a:latin typeface="微软雅黑" pitchFamily="34" charset="-122"/>
-                          <a:ea typeface="微软雅黑" pitchFamily="34" charset="-122"/>
+                          <a:latin typeface="微软雅黑" panose="020B0503020204020204" pitchFamily="34" charset="-122"/>
+                          <a:ea typeface="微软雅黑" panose="020B0503020204020204" pitchFamily="34" charset="-122"/>
                         </a:rPr>
                         <a:t>工作履歷（從集團外經歷起，倒序填寫）</a:t>
                       </a:r>
@@ -15024,8 +15042,8 @@
                         <a:solidFill>
                           <a:srgbClr val="000000"/>
                         </a:solidFill>
-                        <a:latin typeface="微软雅黑" pitchFamily="34" charset="-122"/>
-                        <a:ea typeface="微软雅黑" pitchFamily="34" charset="-122"/>
+                        <a:latin typeface="微软雅黑" panose="020B0503020204020204" pitchFamily="34" charset="-122"/>
+                        <a:ea typeface="微软雅黑" panose="020B0503020204020204" pitchFamily="34" charset="-122"/>
                       </a:endParaRPr>
                     </a:p>
                   </a:txBody>
@@ -15075,87 +15093,31 @@
                   </a:tcPr>
                 </a:tc>
                 <a:tc hMerge="1">
-                  <a:txBody>
-                    <a:bodyPr/>
-                    <a:lstStyle/>
-                    <a:p>
-                      <a:endParaRPr lang="zh-CN" altLang="en-US"/>
-                    </a:p>
-                  </a:txBody>
                   <a:tcPr/>
                 </a:tc>
                 <a:tc hMerge="1">
-                  <a:txBody>
-                    <a:bodyPr/>
-                    <a:lstStyle/>
-                    <a:p>
-                      <a:endParaRPr lang="zh-TW" altLang="en-US"/>
-                    </a:p>
-                  </a:txBody>
                   <a:tcPr/>
                 </a:tc>
                 <a:tc hMerge="1">
-                  <a:txBody>
-                    <a:bodyPr/>
-                    <a:lstStyle/>
-                    <a:p>
-                      <a:endParaRPr lang="zh-TW" altLang="en-US"/>
-                    </a:p>
-                  </a:txBody>
                   <a:tcPr/>
                 </a:tc>
                 <a:tc hMerge="1">
-                  <a:txBody>
-                    <a:bodyPr/>
-                    <a:lstStyle/>
-                    <a:p>
-                      <a:endParaRPr lang="zh-CN" altLang="en-US"/>
-                    </a:p>
-                  </a:txBody>
                   <a:tcPr/>
                 </a:tc>
                 <a:tc hMerge="1">
-                  <a:txBody>
-                    <a:bodyPr/>
-                    <a:lstStyle/>
-                    <a:p>
-                      <a:endParaRPr lang="zh-CN" altLang="en-US"/>
-                    </a:p>
-                  </a:txBody>
                   <a:tcPr/>
                 </a:tc>
                 <a:tc hMerge="1">
-                  <a:txBody>
-                    <a:bodyPr/>
-                    <a:lstStyle/>
-                    <a:p>
-                      <a:endParaRPr lang="zh-TW" altLang="en-US"/>
-                    </a:p>
-                  </a:txBody>
                   <a:tcPr/>
                 </a:tc>
                 <a:tc hMerge="1">
-                  <a:txBody>
-                    <a:bodyPr/>
-                    <a:lstStyle/>
-                    <a:p>
-                      <a:endParaRPr lang="zh-CN" altLang="en-US"/>
-                    </a:p>
-                  </a:txBody>
                   <a:tcPr/>
                 </a:tc>
                 <a:tc hMerge="1">
-                  <a:txBody>
-                    <a:bodyPr/>
-                    <a:lstStyle/>
-                    <a:p>
-                      <a:endParaRPr lang="zh-CN" altLang="en-US"/>
-                    </a:p>
-                  </a:txBody>
                   <a:tcPr/>
                 </a:tc>
               </a:tr>
-              <a:tr h="423378">
+              <a:tr h="422910">
                 <a:tc gridSpan="2">
                   <a:txBody>
                     <a:bodyPr/>
@@ -15167,8 +15129,8 @@
                           <a:solidFill>
                             <a:srgbClr val="000000"/>
                           </a:solidFill>
-                          <a:latin typeface="微软雅黑" pitchFamily="34" charset="-122"/>
-                          <a:ea typeface="微软雅黑" pitchFamily="34" charset="-122"/>
+                          <a:latin typeface="微软雅黑" panose="020B0503020204020204" pitchFamily="34" charset="-122"/>
+                          <a:ea typeface="微软雅黑" panose="020B0503020204020204" pitchFamily="34" charset="-122"/>
                         </a:rPr>
                         <a:t>起止時間</a:t>
                       </a:r>
@@ -15176,8 +15138,8 @@
                         <a:solidFill>
                           <a:srgbClr val="000000"/>
                         </a:solidFill>
-                        <a:latin typeface="微软雅黑" pitchFamily="34" charset="-122"/>
-                        <a:ea typeface="微软雅黑" pitchFamily="34" charset="-122"/>
+                        <a:latin typeface="微软雅黑" panose="020B0503020204020204" pitchFamily="34" charset="-122"/>
+                        <a:ea typeface="微软雅黑" panose="020B0503020204020204" pitchFamily="34" charset="-122"/>
                       </a:endParaRPr>
                     </a:p>
                   </a:txBody>
@@ -15221,13 +15183,6 @@
                   </a:tcPr>
                 </a:tc>
                 <a:tc hMerge="1">
-                  <a:txBody>
-                    <a:bodyPr/>
-                    <a:lstStyle/>
-                    <a:p>
-                      <a:endParaRPr lang="zh-CN" altLang="en-US"/>
-                    </a:p>
-                  </a:txBody>
                   <a:tcPr/>
                 </a:tc>
                 <a:tc>
@@ -15241,8 +15196,8 @@
                           <a:solidFill>
                             <a:srgbClr val="000000"/>
                           </a:solidFill>
-                          <a:latin typeface="微软雅黑" pitchFamily="34" charset="-122"/>
-                          <a:ea typeface="微软雅黑" pitchFamily="34" charset="-122"/>
+                          <a:latin typeface="微软雅黑" panose="020B0503020204020204" pitchFamily="34" charset="-122"/>
+                          <a:ea typeface="微软雅黑" panose="020B0503020204020204" pitchFamily="34" charset="-122"/>
                         </a:rPr>
                         <a:t>任職單位</a:t>
                       </a:r>
@@ -15250,8 +15205,8 @@
                         <a:solidFill>
                           <a:srgbClr val="000000"/>
                         </a:solidFill>
-                        <a:latin typeface="微软雅黑" pitchFamily="34" charset="-122"/>
-                        <a:ea typeface="微软雅黑" pitchFamily="34" charset="-122"/>
+                        <a:latin typeface="微软雅黑" panose="020B0503020204020204" pitchFamily="34" charset="-122"/>
+                        <a:ea typeface="微软雅黑" panose="020B0503020204020204" pitchFamily="34" charset="-122"/>
                       </a:endParaRPr>
                     </a:p>
                   </a:txBody>
@@ -15305,8 +15260,8 @@
                           <a:solidFill>
                             <a:srgbClr val="000000"/>
                           </a:solidFill>
-                          <a:latin typeface="微软雅黑" pitchFamily="34" charset="-122"/>
-                          <a:ea typeface="微软雅黑" pitchFamily="34" charset="-122"/>
+                          <a:latin typeface="微软雅黑" panose="020B0503020204020204" pitchFamily="34" charset="-122"/>
+                          <a:ea typeface="微软雅黑" panose="020B0503020204020204" pitchFamily="34" charset="-122"/>
                         </a:rPr>
                         <a:t>崗位</a:t>
                       </a:r>
@@ -15314,8 +15269,8 @@
                         <a:solidFill>
                           <a:srgbClr val="000000"/>
                         </a:solidFill>
-                        <a:latin typeface="微软雅黑" pitchFamily="34" charset="-122"/>
-                        <a:ea typeface="微软雅黑" pitchFamily="34" charset="-122"/>
+                        <a:latin typeface="微软雅黑" panose="020B0503020204020204" pitchFamily="34" charset="-122"/>
+                        <a:ea typeface="微软雅黑" panose="020B0503020204020204" pitchFamily="34" charset="-122"/>
                       </a:endParaRPr>
                     </a:p>
                   </a:txBody>
@@ -15359,23 +15314,9 @@
                   </a:tcPr>
                 </a:tc>
                 <a:tc hMerge="1">
-                  <a:txBody>
-                    <a:bodyPr/>
-                    <a:lstStyle/>
-                    <a:p>
-                      <a:endParaRPr lang="zh-CN" altLang="en-US"/>
-                    </a:p>
-                  </a:txBody>
                   <a:tcPr/>
                 </a:tc>
                 <a:tc hMerge="1">
-                  <a:txBody>
-                    <a:bodyPr/>
-                    <a:lstStyle/>
-                    <a:p>
-                      <a:endParaRPr lang="zh-CN" altLang="en-US"/>
-                    </a:p>
-                  </a:txBody>
                   <a:tcPr/>
                 </a:tc>
                 <a:tc gridSpan="3">
@@ -15389,8 +15330,8 @@
                           <a:solidFill>
                             <a:srgbClr val="000000"/>
                           </a:solidFill>
-                          <a:latin typeface="微软雅黑" pitchFamily="34" charset="-122"/>
-                          <a:ea typeface="微软雅黑" pitchFamily="34" charset="-122"/>
+                          <a:latin typeface="微软雅黑" panose="020B0503020204020204" pitchFamily="34" charset="-122"/>
+                          <a:ea typeface="微软雅黑" panose="020B0503020204020204" pitchFamily="34" charset="-122"/>
                         </a:rPr>
                         <a:t>工作執掌</a:t>
                       </a:r>
@@ -15398,8 +15339,8 @@
                         <a:solidFill>
                           <a:srgbClr val="000000"/>
                         </a:solidFill>
-                        <a:latin typeface="微软雅黑" pitchFamily="34" charset="-122"/>
-                        <a:ea typeface="微软雅黑" pitchFamily="34" charset="-122"/>
+                        <a:latin typeface="微软雅黑" panose="020B0503020204020204" pitchFamily="34" charset="-122"/>
+                        <a:ea typeface="微软雅黑" panose="020B0503020204020204" pitchFamily="34" charset="-122"/>
                       </a:endParaRPr>
                     </a:p>
                   </a:txBody>
@@ -15443,23 +15384,923 @@
                   </a:tcPr>
                 </a:tc>
                 <a:tc hMerge="1">
+                  <a:tcPr/>
+                </a:tc>
+                <a:tc hMerge="1">
+                  <a:tcPr/>
+                </a:tc>
+              </a:tr>
+              <a:tr h="422910">
+                <a:tc gridSpan="2">
                   <a:txBody>
                     <a:bodyPr/>
                     <a:lstStyle/>
                     <a:p>
-                      <a:endParaRPr lang="zh-CN" altLang="en-US"/>
+                      <a:pPr algn="ctr" fontAlgn="ctr"/>
+                      <a:r>
+                        <a:rPr lang="en-US" altLang="zh-CN" sz="1300" b="0" i="0" u="none" strike="noStrike" dirty="0">
+                          <a:solidFill>
+                            <a:srgbClr val="000000"/>
+                          </a:solidFill>
+                          <a:latin typeface="微软雅黑" panose="020B0503020204020204" pitchFamily="34" charset="-122"/>
+                          <a:ea typeface="微软雅黑" panose="020B0503020204020204" pitchFamily="34" charset="-122"/>
+                        </a:rPr>
+                        <a:t>2015/9/17</a:t>
+                      </a:r>
+                      <a:r>
+                        <a:rPr lang="zh-TW" altLang="en-US" sz="1300" b="0" i="0" u="none" strike="noStrike" dirty="0">
+                          <a:solidFill>
+                            <a:srgbClr val="000000"/>
+                          </a:solidFill>
+                          <a:latin typeface="微软雅黑" panose="020B0503020204020204" pitchFamily="34" charset="-122"/>
+                          <a:ea typeface="PMingLiU" charset="0"/>
+                        </a:rPr>
+                        <a:t>～</a:t>
+                      </a:r>
+                      <a:r>
+                        <a:rPr lang="en-US" altLang="zh-CN" sz="1300" b="0" i="0" u="none" strike="noStrike" dirty="0">
+                          <a:solidFill>
+                            <a:srgbClr val="000000"/>
+                          </a:solidFill>
+                          <a:latin typeface="微软雅黑" panose="020B0503020204020204" pitchFamily="34" charset="-122"/>
+                          <a:ea typeface="微软雅黑" panose="020B0503020204020204" pitchFamily="34" charset="-122"/>
+                        </a:rPr>
+                        <a:t>2018/11/30</a:t>
+                      </a:r>
+                      <a:endParaRPr lang="en-US" altLang="zh-CN" sz="1300" b="0" i="0" u="none" strike="noStrike" dirty="0">
+                        <a:solidFill>
+                          <a:srgbClr val="000000"/>
+                        </a:solidFill>
+                        <a:latin typeface="微软雅黑" panose="020B0503020204020204" pitchFamily="34" charset="-122"/>
+                        <a:ea typeface="微软雅黑" panose="020B0503020204020204" pitchFamily="34" charset="-122"/>
+                      </a:endParaRPr>
                     </a:p>
                   </a:txBody>
+                  <a:tcPr marL="10079" marR="10079" marT="10080" marB="0" anchor="ctr">
+                    <a:lnL w="6350" cap="flat" cmpd="sng" algn="ctr">
+                      <a:solidFill>
+                        <a:srgbClr val="000000"/>
+                      </a:solidFill>
+                      <a:prstDash val="solid"/>
+                      <a:round/>
+                      <a:headEnd type="none" w="med" len="med"/>
+                      <a:tailEnd type="none" w="med" len="med"/>
+                    </a:lnL>
+                    <a:lnR w="6350" cap="flat" cmpd="sng" algn="ctr">
+                      <a:solidFill>
+                        <a:srgbClr val="000000"/>
+                      </a:solidFill>
+                      <a:prstDash val="solid"/>
+                      <a:round/>
+                      <a:headEnd type="none" w="med" len="med"/>
+                      <a:tailEnd type="none" w="med" len="med"/>
+                    </a:lnR>
+                    <a:lnT w="6350" cap="flat" cmpd="sng" algn="ctr">
+                      <a:solidFill>
+                        <a:srgbClr val="000000"/>
+                      </a:solidFill>
+                      <a:prstDash val="solid"/>
+                      <a:round/>
+                      <a:headEnd type="none" w="med" len="med"/>
+                      <a:tailEnd type="none" w="med" len="med"/>
+                    </a:lnT>
+                    <a:lnB w="6350" cap="flat" cmpd="sng" algn="ctr">
+                      <a:solidFill>
+                        <a:srgbClr val="000000"/>
+                      </a:solidFill>
+                      <a:prstDash val="solid"/>
+                      <a:round/>
+                      <a:headEnd type="none" w="med" len="med"/>
+                      <a:tailEnd type="none" w="med" len="med"/>
+                    </a:lnB>
+                  </a:tcPr>
+                </a:tc>
+                <a:tc hMerge="1">
                   <a:tcPr/>
                 </a:tc>
-                <a:tc hMerge="1">
+                <a:tc>
                   <a:txBody>
                     <a:bodyPr/>
                     <a:lstStyle/>
                     <a:p>
-                      <a:endParaRPr lang="zh-CN" altLang="en-US"/>
+                      <a:pPr algn="ctr" fontAlgn="ctr"/>
+                      <a:r>
+                        <a:rPr lang="zh-TW" altLang="zh-CN" sz="1300" b="0" i="0" u="none" strike="noStrike" dirty="0">
+                          <a:solidFill>
+                            <a:srgbClr val="000000"/>
+                          </a:solidFill>
+                          <a:latin typeface="微软雅黑" panose="020B0503020204020204" pitchFamily="34" charset="-122"/>
+                          <a:ea typeface="微软雅黑" panose="020B0503020204020204" pitchFamily="34" charset="-122"/>
+                        </a:rPr>
+                        <a:t>北京鳳凰学易科技有限公司</a:t>
+                      </a:r>
+                      <a:endParaRPr lang="zh-TW" altLang="zh-CN" sz="1300" b="0" i="0" u="none" strike="noStrike" dirty="0">
+                        <a:solidFill>
+                          <a:srgbClr val="000000"/>
+                        </a:solidFill>
+                        <a:latin typeface="微软雅黑" panose="020B0503020204020204" pitchFamily="34" charset="-122"/>
+                        <a:ea typeface="微软雅黑" panose="020B0503020204020204" pitchFamily="34" charset="-122"/>
+                      </a:endParaRPr>
                     </a:p>
                   </a:txBody>
+                  <a:tcPr marL="10079" marR="10079" marT="10080" marB="0" anchor="ctr">
+                    <a:lnL w="6350" cap="flat" cmpd="sng" algn="ctr">
+                      <a:solidFill>
+                        <a:srgbClr val="000000"/>
+                      </a:solidFill>
+                      <a:prstDash val="solid"/>
+                      <a:round/>
+                      <a:headEnd type="none" w="med" len="med"/>
+                      <a:tailEnd type="none" w="med" len="med"/>
+                    </a:lnL>
+                    <a:lnR w="6350" cap="flat" cmpd="sng" algn="ctr">
+                      <a:solidFill>
+                        <a:srgbClr val="000000"/>
+                      </a:solidFill>
+                      <a:prstDash val="solid"/>
+                      <a:round/>
+                      <a:headEnd type="none" w="med" len="med"/>
+                      <a:tailEnd type="none" w="med" len="med"/>
+                    </a:lnR>
+                    <a:lnT w="6350" cap="flat" cmpd="sng" algn="ctr">
+                      <a:solidFill>
+                        <a:srgbClr val="000000"/>
+                      </a:solidFill>
+                      <a:prstDash val="solid"/>
+                      <a:round/>
+                      <a:headEnd type="none" w="med" len="med"/>
+                      <a:tailEnd type="none" w="med" len="med"/>
+                    </a:lnT>
+                    <a:lnB w="6350" cap="flat" cmpd="sng" algn="ctr">
+                      <a:solidFill>
+                        <a:srgbClr val="000000"/>
+                      </a:solidFill>
+                      <a:prstDash val="solid"/>
+                      <a:round/>
+                      <a:headEnd type="none" w="med" len="med"/>
+                      <a:tailEnd type="none" w="med" len="med"/>
+                    </a:lnB>
+                  </a:tcPr>
+                </a:tc>
+                <a:tc gridSpan="3">
+                  <a:txBody>
+                    <a:bodyPr/>
+                    <a:lstStyle/>
+                    <a:p>
+                      <a:pPr algn="ctr" fontAlgn="ctr"/>
+                      <a:r>
+                        <a:rPr lang="en-US" altLang="zh-CN" sz="1300" b="0" i="0" u="none" strike="noStrike" dirty="0">
+                          <a:solidFill>
+                            <a:srgbClr val="000000"/>
+                          </a:solidFill>
+                          <a:latin typeface="微软雅黑" panose="020B0503020204020204" pitchFamily="34" charset="-122"/>
+                          <a:ea typeface="微软雅黑" panose="020B0503020204020204" pitchFamily="34" charset="-122"/>
+                        </a:rPr>
+                        <a:t>iOS </a:t>
+                      </a:r>
+                      <a:r>
+                        <a:rPr lang="zh-TW" altLang="en-US" sz="1300" b="0" i="0" u="none" strike="noStrike" dirty="0">
+                          <a:solidFill>
+                            <a:srgbClr val="000000"/>
+                          </a:solidFill>
+                          <a:latin typeface="微软雅黑" panose="020B0503020204020204" pitchFamily="34" charset="-122"/>
+                          <a:ea typeface="微软雅黑" panose="020B0503020204020204" pitchFamily="34" charset="-122"/>
+                        </a:rPr>
+                        <a:t>開發工程師</a:t>
+                      </a:r>
+                      <a:endParaRPr lang="zh-TW" altLang="en-US" sz="1300" b="0" i="0" u="none" strike="noStrike" dirty="0">
+                        <a:solidFill>
+                          <a:srgbClr val="000000"/>
+                        </a:solidFill>
+                        <a:latin typeface="微软雅黑" panose="020B0503020204020204" pitchFamily="34" charset="-122"/>
+                        <a:ea typeface="微软雅黑" panose="020B0503020204020204" pitchFamily="34" charset="-122"/>
+                      </a:endParaRPr>
+                    </a:p>
+                  </a:txBody>
+                  <a:tcPr marL="10079" marR="10079" marT="10080" marB="0" anchor="ctr">
+                    <a:lnL w="6350" cap="flat" cmpd="sng" algn="ctr">
+                      <a:solidFill>
+                        <a:srgbClr val="000000"/>
+                      </a:solidFill>
+                      <a:prstDash val="solid"/>
+                      <a:round/>
+                      <a:headEnd type="none" w="med" len="med"/>
+                      <a:tailEnd type="none" w="med" len="med"/>
+                    </a:lnL>
+                    <a:lnR w="6350" cap="flat" cmpd="sng" algn="ctr">
+                      <a:solidFill>
+                        <a:srgbClr val="000000"/>
+                      </a:solidFill>
+                      <a:prstDash val="solid"/>
+                      <a:round/>
+                      <a:headEnd type="none" w="med" len="med"/>
+                      <a:tailEnd type="none" w="med" len="med"/>
+                    </a:lnR>
+                    <a:lnT w="6350" cap="flat" cmpd="sng" algn="ctr">
+                      <a:solidFill>
+                        <a:srgbClr val="000000"/>
+                      </a:solidFill>
+                      <a:prstDash val="solid"/>
+                      <a:round/>
+                      <a:headEnd type="none" w="med" len="med"/>
+                      <a:tailEnd type="none" w="med" len="med"/>
+                    </a:lnT>
+                    <a:lnB w="6350" cap="flat" cmpd="sng" algn="ctr">
+                      <a:solidFill>
+                        <a:srgbClr val="000000"/>
+                      </a:solidFill>
+                      <a:prstDash val="solid"/>
+                      <a:round/>
+                      <a:headEnd type="none" w="med" len="med"/>
+                      <a:tailEnd type="none" w="med" len="med"/>
+                    </a:lnB>
+                  </a:tcPr>
+                </a:tc>
+                <a:tc hMerge="1">
+                  <a:tcPr/>
+                </a:tc>
+                <a:tc hMerge="1">
+                  <a:tcPr/>
+                </a:tc>
+                <a:tc gridSpan="3">
+                  <a:txBody>
+                    <a:bodyPr/>
+                    <a:lstStyle/>
+                    <a:p>
+                      <a:r>
+                        <a:rPr lang="zh-TW" altLang="en-US" sz="1400"/>
+                        <a:t>学易學堂、学易提分系統、高考必備</a:t>
+                      </a:r>
+                      <a:r>
+                        <a:rPr lang="en-US" altLang="zh-TW" sz="1400"/>
+                        <a:t>App iOS </a:t>
+                      </a:r>
+                      <a:r>
+                        <a:rPr lang="zh-TW" altLang="en-US" sz="1400"/>
+                        <a:t>版本開發</a:t>
+                      </a:r>
+                      <a:endParaRPr lang="zh-TW" altLang="en-US" sz="1400"/>
+                    </a:p>
+                  </a:txBody>
+                  <a:tcPr marL="10079" marR="10079" marT="10080" marB="0" anchor="ctr">
+                    <a:lnL w="6350" cap="flat" cmpd="sng" algn="ctr">
+                      <a:solidFill>
+                        <a:srgbClr val="000000"/>
+                      </a:solidFill>
+                      <a:prstDash val="solid"/>
+                      <a:round/>
+                      <a:headEnd type="none" w="med" len="med"/>
+                      <a:tailEnd type="none" w="med" len="med"/>
+                    </a:lnL>
+                    <a:lnR w="6350" cap="flat" cmpd="sng" algn="ctr">
+                      <a:solidFill>
+                        <a:srgbClr val="000000"/>
+                      </a:solidFill>
+                      <a:prstDash val="solid"/>
+                      <a:round/>
+                      <a:headEnd type="none" w="med" len="med"/>
+                      <a:tailEnd type="none" w="med" len="med"/>
+                    </a:lnR>
+                    <a:lnT w="6350" cap="flat" cmpd="sng" algn="ctr">
+                      <a:solidFill>
+                        <a:srgbClr val="000000"/>
+                      </a:solidFill>
+                      <a:prstDash val="solid"/>
+                      <a:round/>
+                      <a:headEnd type="none" w="med" len="med"/>
+                      <a:tailEnd type="none" w="med" len="med"/>
+                    </a:lnT>
+                    <a:lnB w="6350" cap="flat" cmpd="sng" algn="ctr">
+                      <a:solidFill>
+                        <a:srgbClr val="000000"/>
+                      </a:solidFill>
+                      <a:prstDash val="solid"/>
+                      <a:round/>
+                      <a:headEnd type="none" w="med" len="med"/>
+                      <a:tailEnd type="none" w="med" len="med"/>
+                    </a:lnB>
+                  </a:tcPr>
+                </a:tc>
+                <a:tc hMerge="1">
+                  <a:tcPr/>
+                </a:tc>
+                <a:tc hMerge="1">
+                  <a:tcPr/>
+                </a:tc>
+              </a:tr>
+              <a:tr h="423545">
+                <a:tc gridSpan="2">
+                  <a:txBody>
+                    <a:bodyPr/>
+                    <a:lstStyle/>
+                    <a:p>
+                      <a:pPr algn="ctr" fontAlgn="ctr"/>
+                      <a:r>
+                        <a:rPr lang="en-US" altLang="zh-CN" sz="1300" b="0" i="0" u="none" strike="noStrike" dirty="0">
+                          <a:solidFill>
+                            <a:srgbClr val="000000"/>
+                          </a:solidFill>
+                          <a:latin typeface="微软雅黑" panose="020B0503020204020204" pitchFamily="34" charset="-122"/>
+                          <a:ea typeface="微软雅黑" panose="020B0503020204020204" pitchFamily="34" charset="-122"/>
+                        </a:rPr>
+                        <a:t>2015/2/9</a:t>
+                      </a:r>
+                      <a:r>
+                        <a:rPr lang="zh-TW" altLang="en-US" sz="1300" b="0" i="0" u="none" strike="noStrike" dirty="0">
+                          <a:solidFill>
+                            <a:srgbClr val="000000"/>
+                          </a:solidFill>
+                          <a:latin typeface="微软雅黑" panose="020B0503020204020204" pitchFamily="34" charset="-122"/>
+                          <a:ea typeface="PMingLiU" charset="0"/>
+                        </a:rPr>
+                        <a:t>～</a:t>
+                      </a:r>
+                      <a:r>
+                        <a:rPr lang="en-US" altLang="zh-TW" sz="1300" b="0" i="0" u="none" strike="noStrike" dirty="0">
+                          <a:solidFill>
+                            <a:srgbClr val="000000"/>
+                          </a:solidFill>
+                          <a:latin typeface="微软雅黑" panose="020B0503020204020204" pitchFamily="34" charset="-122"/>
+                          <a:ea typeface="PMingLiU" charset="0"/>
+                        </a:rPr>
+                        <a:t>2015/9/9</a:t>
+                      </a:r>
+                      <a:endParaRPr lang="en-US" altLang="zh-TW" sz="1300" b="0" i="0" u="none" strike="noStrike" dirty="0">
+                        <a:solidFill>
+                          <a:srgbClr val="000000"/>
+                        </a:solidFill>
+                        <a:latin typeface="微软雅黑" panose="020B0503020204020204" pitchFamily="34" charset="-122"/>
+                        <a:ea typeface="PMingLiU" charset="0"/>
+                      </a:endParaRPr>
+                    </a:p>
+                  </a:txBody>
+                  <a:tcPr marL="10079" marR="10079" marT="10080" marB="0" anchor="ctr">
+                    <a:lnL w="6350" cap="flat" cmpd="sng" algn="ctr">
+                      <a:solidFill>
+                        <a:srgbClr val="000000"/>
+                      </a:solidFill>
+                      <a:prstDash val="solid"/>
+                      <a:round/>
+                      <a:headEnd type="none" w="med" len="med"/>
+                      <a:tailEnd type="none" w="med" len="med"/>
+                    </a:lnL>
+                    <a:lnR w="6350" cap="flat" cmpd="sng" algn="ctr">
+                      <a:solidFill>
+                        <a:srgbClr val="000000"/>
+                      </a:solidFill>
+                      <a:prstDash val="solid"/>
+                      <a:round/>
+                      <a:headEnd type="none" w="med" len="med"/>
+                      <a:tailEnd type="none" w="med" len="med"/>
+                    </a:lnR>
+                    <a:lnT w="6350" cap="flat" cmpd="sng" algn="ctr">
+                      <a:solidFill>
+                        <a:srgbClr val="000000"/>
+                      </a:solidFill>
+                      <a:prstDash val="solid"/>
+                      <a:round/>
+                      <a:headEnd type="none" w="med" len="med"/>
+                      <a:tailEnd type="none" w="med" len="med"/>
+                    </a:lnT>
+                    <a:lnB w="6350" cap="flat" cmpd="sng" algn="ctr">
+                      <a:solidFill>
+                        <a:srgbClr val="000000"/>
+                      </a:solidFill>
+                      <a:prstDash val="solid"/>
+                      <a:round/>
+                      <a:headEnd type="none" w="med" len="med"/>
+                      <a:tailEnd type="none" w="med" len="med"/>
+                    </a:lnB>
+                  </a:tcPr>
+                </a:tc>
+                <a:tc hMerge="1">
+                  <a:tcPr/>
+                </a:tc>
+                <a:tc>
+                  <a:txBody>
+                    <a:bodyPr/>
+                    <a:lstStyle/>
+                    <a:p>
+                      <a:pPr algn="ctr" fontAlgn="ctr"/>
+                      <a:r>
+                        <a:rPr lang="zh-TW" altLang="zh-CN" sz="1300" b="0" i="0" u="none" strike="noStrike" dirty="0">
+                          <a:solidFill>
+                            <a:srgbClr val="000000"/>
+                          </a:solidFill>
+                          <a:latin typeface="微软雅黑" panose="020B0503020204020204" pitchFamily="34" charset="-122"/>
+                          <a:ea typeface="微软雅黑" panose="020B0503020204020204" pitchFamily="34" charset="-122"/>
+                        </a:rPr>
+                        <a:t>上海吟隆信息科技有限公司</a:t>
+                      </a:r>
+                      <a:endParaRPr lang="zh-TW" altLang="zh-CN" sz="1300" b="0" i="0" u="none" strike="noStrike" dirty="0">
+                        <a:solidFill>
+                          <a:srgbClr val="000000"/>
+                        </a:solidFill>
+                        <a:latin typeface="微软雅黑" panose="020B0503020204020204" pitchFamily="34" charset="-122"/>
+                        <a:ea typeface="微软雅黑" panose="020B0503020204020204" pitchFamily="34" charset="-122"/>
+                      </a:endParaRPr>
+                    </a:p>
+                  </a:txBody>
+                  <a:tcPr marL="10079" marR="10079" marT="10080" marB="0" anchor="ctr">
+                    <a:lnL w="6350" cap="flat" cmpd="sng" algn="ctr">
+                      <a:solidFill>
+                        <a:srgbClr val="000000"/>
+                      </a:solidFill>
+                      <a:prstDash val="solid"/>
+                      <a:round/>
+                      <a:headEnd type="none" w="med" len="med"/>
+                      <a:tailEnd type="none" w="med" len="med"/>
+                    </a:lnL>
+                    <a:lnR w="6350" cap="flat" cmpd="sng" algn="ctr">
+                      <a:solidFill>
+                        <a:srgbClr val="000000"/>
+                      </a:solidFill>
+                      <a:prstDash val="solid"/>
+                      <a:round/>
+                      <a:headEnd type="none" w="med" len="med"/>
+                      <a:tailEnd type="none" w="med" len="med"/>
+                    </a:lnR>
+                    <a:lnT w="6350" cap="flat" cmpd="sng" algn="ctr">
+                      <a:solidFill>
+                        <a:srgbClr val="000000"/>
+                      </a:solidFill>
+                      <a:prstDash val="solid"/>
+                      <a:round/>
+                      <a:headEnd type="none" w="med" len="med"/>
+                      <a:tailEnd type="none" w="med" len="med"/>
+                    </a:lnT>
+                    <a:lnB w="6350" cap="flat" cmpd="sng" algn="ctr">
+                      <a:solidFill>
+                        <a:srgbClr val="000000"/>
+                      </a:solidFill>
+                      <a:prstDash val="solid"/>
+                      <a:round/>
+                      <a:headEnd type="none" w="med" len="med"/>
+                      <a:tailEnd type="none" w="med" len="med"/>
+                    </a:lnB>
+                  </a:tcPr>
+                </a:tc>
+                <a:tc gridSpan="3">
+                  <a:txBody>
+                    <a:bodyPr/>
+                    <a:lstStyle/>
+                    <a:p>
+                      <a:pPr algn="ctr" fontAlgn="ctr"/>
+                      <a:r>
+                        <a:rPr lang="en-US" altLang="zh-CN" sz="1300" dirty="0">
+                          <a:solidFill>
+                            <a:srgbClr val="000000"/>
+                          </a:solidFill>
+                          <a:latin typeface="微软雅黑" panose="020B0503020204020204" pitchFamily="34" charset="-122"/>
+                          <a:ea typeface="微软雅黑" panose="020B0503020204020204" pitchFamily="34" charset="-122"/>
+                          <a:sym typeface="+mn-ea"/>
+                        </a:rPr>
+                        <a:t>iOS </a:t>
+                      </a:r>
+                      <a:r>
+                        <a:rPr lang="zh-TW" altLang="en-US" sz="1300" dirty="0">
+                          <a:solidFill>
+                            <a:srgbClr val="000000"/>
+                          </a:solidFill>
+                          <a:latin typeface="微软雅黑" panose="020B0503020204020204" pitchFamily="34" charset="-122"/>
+                          <a:ea typeface="微软雅黑" panose="020B0503020204020204" pitchFamily="34" charset="-122"/>
+                          <a:sym typeface="+mn-ea"/>
+                        </a:rPr>
+                        <a:t>開發工程師</a:t>
+                      </a:r>
+                      <a:endParaRPr lang="zh-CN" altLang="en-US" sz="1300" b="0" i="0" u="none" strike="noStrike" dirty="0">
+                        <a:solidFill>
+                          <a:srgbClr val="000000"/>
+                        </a:solidFill>
+                        <a:latin typeface="微软雅黑" panose="020B0503020204020204" pitchFamily="34" charset="-122"/>
+                        <a:ea typeface="微软雅黑" panose="020B0503020204020204" pitchFamily="34" charset="-122"/>
+                      </a:endParaRPr>
+                    </a:p>
+                  </a:txBody>
+                  <a:tcPr marL="10079" marR="10079" marT="10080" marB="0" anchor="ctr">
+                    <a:lnL w="6350" cap="flat" cmpd="sng" algn="ctr">
+                      <a:solidFill>
+                        <a:srgbClr val="000000"/>
+                      </a:solidFill>
+                      <a:prstDash val="solid"/>
+                      <a:round/>
+                      <a:headEnd type="none" w="med" len="med"/>
+                      <a:tailEnd type="none" w="med" len="med"/>
+                    </a:lnL>
+                    <a:lnR w="6350" cap="flat" cmpd="sng" algn="ctr">
+                      <a:solidFill>
+                        <a:srgbClr val="000000"/>
+                      </a:solidFill>
+                      <a:prstDash val="solid"/>
+                      <a:round/>
+                      <a:headEnd type="none" w="med" len="med"/>
+                      <a:tailEnd type="none" w="med" len="med"/>
+                    </a:lnR>
+                    <a:lnT w="6350" cap="flat" cmpd="sng" algn="ctr">
+                      <a:solidFill>
+                        <a:srgbClr val="000000"/>
+                      </a:solidFill>
+                      <a:prstDash val="solid"/>
+                      <a:round/>
+                      <a:headEnd type="none" w="med" len="med"/>
+                      <a:tailEnd type="none" w="med" len="med"/>
+                    </a:lnT>
+                    <a:lnB w="6350" cap="flat" cmpd="sng" algn="ctr">
+                      <a:solidFill>
+                        <a:srgbClr val="000000"/>
+                      </a:solidFill>
+                      <a:prstDash val="solid"/>
+                      <a:round/>
+                      <a:headEnd type="none" w="med" len="med"/>
+                      <a:tailEnd type="none" w="med" len="med"/>
+                    </a:lnB>
+                  </a:tcPr>
+                </a:tc>
+                <a:tc hMerge="1">
+                  <a:tcPr/>
+                </a:tc>
+                <a:tc hMerge="1">
+                  <a:tcPr/>
+                </a:tc>
+                <a:tc gridSpan="3">
+                  <a:txBody>
+                    <a:bodyPr/>
+                    <a:lstStyle/>
+                    <a:p>
+                      <a:r>
+                        <a:rPr lang="zh-TW" altLang="en-US" sz="1400" dirty="0"/>
+                        <a:t>音樂雷達 </a:t>
+                      </a:r>
+                      <a:r>
+                        <a:rPr lang="en-US" altLang="zh-TW" sz="1400" dirty="0"/>
+                        <a:t>App</a:t>
+                      </a:r>
+                      <a:r>
+                        <a:rPr lang="en-US" altLang="zh-TW" sz="1400">
+                          <a:sym typeface="+mn-ea"/>
+                        </a:rPr>
+                        <a:t> iOS </a:t>
+                      </a:r>
+                      <a:r>
+                        <a:rPr lang="zh-TW" altLang="en-US" sz="1400">
+                          <a:sym typeface="+mn-ea"/>
+                        </a:rPr>
+                        <a:t>版本開發</a:t>
+                      </a:r>
+                      <a:endParaRPr lang="en-US" altLang="zh-TW" sz="1400" dirty="0"/>
+                    </a:p>
+                  </a:txBody>
+                  <a:tcPr marL="10079" marR="10079" marT="10080" marB="0" anchor="ctr">
+                    <a:lnL w="6350" cap="flat" cmpd="sng" algn="ctr">
+                      <a:solidFill>
+                        <a:srgbClr val="000000"/>
+                      </a:solidFill>
+                      <a:prstDash val="solid"/>
+                      <a:round/>
+                      <a:headEnd type="none" w="med" len="med"/>
+                      <a:tailEnd type="none" w="med" len="med"/>
+                    </a:lnL>
+                    <a:lnR w="6350" cap="flat" cmpd="sng" algn="ctr">
+                      <a:solidFill>
+                        <a:srgbClr val="000000"/>
+                      </a:solidFill>
+                      <a:prstDash val="solid"/>
+                      <a:round/>
+                      <a:headEnd type="none" w="med" len="med"/>
+                      <a:tailEnd type="none" w="med" len="med"/>
+                    </a:lnR>
+                    <a:lnT w="6350" cap="flat" cmpd="sng" algn="ctr">
+                      <a:solidFill>
+                        <a:srgbClr val="000000"/>
+                      </a:solidFill>
+                      <a:prstDash val="solid"/>
+                      <a:round/>
+                      <a:headEnd type="none" w="med" len="med"/>
+                      <a:tailEnd type="none" w="med" len="med"/>
+                    </a:lnT>
+                    <a:lnB w="6350" cap="flat" cmpd="sng" algn="ctr">
+                      <a:solidFill>
+                        <a:srgbClr val="000000"/>
+                      </a:solidFill>
+                      <a:prstDash val="solid"/>
+                      <a:round/>
+                      <a:headEnd type="none" w="med" len="med"/>
+                      <a:tailEnd type="none" w="med" len="med"/>
+                    </a:lnB>
+                  </a:tcPr>
+                </a:tc>
+                <a:tc hMerge="1">
+                  <a:tcPr/>
+                </a:tc>
+                <a:tc hMerge="1">
+                  <a:tcPr/>
+                </a:tc>
+              </a:tr>
+              <a:tr h="423378">
+                <a:tc gridSpan="2">
+                  <a:txBody>
+                    <a:bodyPr/>
+                    <a:lstStyle/>
+                    <a:p>
+                      <a:pPr algn="ctr" fontAlgn="ctr"/>
+                      <a:r>
+                        <a:rPr lang="en-US" altLang="zh-CN" sz="1300" b="0" i="0" u="none" strike="noStrike" dirty="0">
+                          <a:solidFill>
+                            <a:srgbClr val="000000"/>
+                          </a:solidFill>
+                          <a:latin typeface="微软雅黑" panose="020B0503020204020204" pitchFamily="34" charset="-122"/>
+                          <a:ea typeface="微软雅黑" panose="020B0503020204020204" pitchFamily="34" charset="-122"/>
+                        </a:rPr>
+                        <a:t>2013/4/7</a:t>
+                      </a:r>
+                      <a:r>
+                        <a:rPr lang="zh-TW" altLang="en-US" sz="1300" b="0" i="0" u="none" strike="noStrike" dirty="0">
+                          <a:solidFill>
+                            <a:srgbClr val="000000"/>
+                          </a:solidFill>
+                          <a:latin typeface="微软雅黑" panose="020B0503020204020204" pitchFamily="34" charset="-122"/>
+                          <a:ea typeface="PMingLiU" charset="0"/>
+                        </a:rPr>
+                        <a:t>～</a:t>
+                      </a:r>
+                      <a:r>
+                        <a:rPr lang="en-US" altLang="zh-TW" sz="1300" b="0" i="0" u="none" strike="noStrike" dirty="0">
+                          <a:solidFill>
+                            <a:srgbClr val="000000"/>
+                          </a:solidFill>
+                          <a:latin typeface="微软雅黑" panose="020B0503020204020204" pitchFamily="34" charset="-122"/>
+                          <a:ea typeface="PMingLiU" charset="0"/>
+                        </a:rPr>
+                        <a:t>2016/2/6</a:t>
+                      </a:r>
+                      <a:endParaRPr lang="en-US" altLang="zh-TW" sz="1300" b="0" i="0" u="none" strike="noStrike" dirty="0">
+                        <a:solidFill>
+                          <a:srgbClr val="000000"/>
+                        </a:solidFill>
+                        <a:latin typeface="微软雅黑" panose="020B0503020204020204" pitchFamily="34" charset="-122"/>
+                        <a:ea typeface="PMingLiU" charset="0"/>
+                      </a:endParaRPr>
+                    </a:p>
+                  </a:txBody>
+                  <a:tcPr marL="10079" marR="10079" marT="10080" marB="0" anchor="ctr">
+                    <a:lnL w="6350" cap="flat" cmpd="sng" algn="ctr">
+                      <a:solidFill>
+                        <a:srgbClr val="000000"/>
+                      </a:solidFill>
+                      <a:prstDash val="solid"/>
+                      <a:round/>
+                      <a:headEnd type="none" w="med" len="med"/>
+                      <a:tailEnd type="none" w="med" len="med"/>
+                    </a:lnL>
+                    <a:lnR w="6350" cap="flat" cmpd="sng" algn="ctr">
+                      <a:solidFill>
+                        <a:srgbClr val="000000"/>
+                      </a:solidFill>
+                      <a:prstDash val="solid"/>
+                      <a:round/>
+                      <a:headEnd type="none" w="med" len="med"/>
+                      <a:tailEnd type="none" w="med" len="med"/>
+                    </a:lnR>
+                    <a:lnT w="6350" cap="flat" cmpd="sng" algn="ctr">
+                      <a:solidFill>
+                        <a:srgbClr val="000000"/>
+                      </a:solidFill>
+                      <a:prstDash val="solid"/>
+                      <a:round/>
+                      <a:headEnd type="none" w="med" len="med"/>
+                      <a:tailEnd type="none" w="med" len="med"/>
+                    </a:lnT>
+                    <a:lnB w="6350" cap="flat" cmpd="sng" algn="ctr">
+                      <a:solidFill>
+                        <a:srgbClr val="000000"/>
+                      </a:solidFill>
+                      <a:prstDash val="solid"/>
+                      <a:round/>
+                      <a:headEnd type="none" w="med" len="med"/>
+                      <a:tailEnd type="none" w="med" len="med"/>
+                    </a:lnB>
+                  </a:tcPr>
+                </a:tc>
+                <a:tc hMerge="1">
+                  <a:tcPr/>
+                </a:tc>
+                <a:tc>
+                  <a:txBody>
+                    <a:bodyPr/>
+                    <a:lstStyle/>
+                    <a:p>
+                      <a:pPr algn="ctr" fontAlgn="ctr"/>
+                      <a:r>
+                        <a:rPr lang="zh-TW" altLang="zh-CN" sz="1300" b="0" i="0" u="none" strike="noStrike" dirty="0">
+                          <a:solidFill>
+                            <a:srgbClr val="000000"/>
+                          </a:solidFill>
+                          <a:latin typeface="微软雅黑" panose="020B0503020204020204" pitchFamily="34" charset="-122"/>
+                          <a:ea typeface="微软雅黑" panose="020B0503020204020204" pitchFamily="34" charset="-122"/>
+                        </a:rPr>
+                        <a:t>太原優聯科技有限公司</a:t>
+                      </a:r>
+                      <a:endParaRPr lang="zh-TW" altLang="zh-CN" sz="1300" b="0" i="0" u="none" strike="noStrike" dirty="0">
+                        <a:solidFill>
+                          <a:srgbClr val="000000"/>
+                        </a:solidFill>
+                        <a:latin typeface="微软雅黑" panose="020B0503020204020204" pitchFamily="34" charset="-122"/>
+                        <a:ea typeface="微软雅黑" panose="020B0503020204020204" pitchFamily="34" charset="-122"/>
+                      </a:endParaRPr>
+                    </a:p>
+                  </a:txBody>
+                  <a:tcPr marL="10079" marR="10079" marT="10080" marB="0" anchor="ctr">
+                    <a:lnL w="6350" cap="flat" cmpd="sng" algn="ctr">
+                      <a:solidFill>
+                        <a:srgbClr val="000000"/>
+                      </a:solidFill>
+                      <a:prstDash val="solid"/>
+                      <a:round/>
+                      <a:headEnd type="none" w="med" len="med"/>
+                      <a:tailEnd type="none" w="med" len="med"/>
+                    </a:lnL>
+                    <a:lnR w="6350" cap="flat" cmpd="sng" algn="ctr">
+                      <a:solidFill>
+                        <a:srgbClr val="000000"/>
+                      </a:solidFill>
+                      <a:prstDash val="solid"/>
+                      <a:round/>
+                      <a:headEnd type="none" w="med" len="med"/>
+                      <a:tailEnd type="none" w="med" len="med"/>
+                    </a:lnR>
+                    <a:lnT w="6350" cap="flat" cmpd="sng" algn="ctr">
+                      <a:solidFill>
+                        <a:srgbClr val="000000"/>
+                      </a:solidFill>
+                      <a:prstDash val="solid"/>
+                      <a:round/>
+                      <a:headEnd type="none" w="med" len="med"/>
+                      <a:tailEnd type="none" w="med" len="med"/>
+                    </a:lnT>
+                    <a:lnB w="6350" cap="flat" cmpd="sng" algn="ctr">
+                      <a:solidFill>
+                        <a:srgbClr val="000000"/>
+                      </a:solidFill>
+                      <a:prstDash val="solid"/>
+                      <a:round/>
+                      <a:headEnd type="none" w="med" len="med"/>
+                      <a:tailEnd type="none" w="med" len="med"/>
+                    </a:lnB>
+                  </a:tcPr>
+                </a:tc>
+                <a:tc gridSpan="3">
+                  <a:txBody>
+                    <a:bodyPr/>
+                    <a:lstStyle/>
+                    <a:p>
+                      <a:pPr algn="ctr" fontAlgn="ctr"/>
+                      <a:r>
+                        <a:rPr lang="en-US" altLang="zh-CN" sz="1300" dirty="0">
+                          <a:solidFill>
+                            <a:srgbClr val="000000"/>
+                          </a:solidFill>
+                          <a:latin typeface="微软雅黑" panose="020B0503020204020204" pitchFamily="34" charset="-122"/>
+                          <a:ea typeface="微软雅黑" panose="020B0503020204020204" pitchFamily="34" charset="-122"/>
+                          <a:sym typeface="+mn-ea"/>
+                        </a:rPr>
+                        <a:t>iOS </a:t>
+                      </a:r>
+                      <a:r>
+                        <a:rPr lang="zh-TW" altLang="en-US" sz="1300" dirty="0">
+                          <a:solidFill>
+                            <a:srgbClr val="000000"/>
+                          </a:solidFill>
+                          <a:latin typeface="微软雅黑" panose="020B0503020204020204" pitchFamily="34" charset="-122"/>
+                          <a:ea typeface="微软雅黑" panose="020B0503020204020204" pitchFamily="34" charset="-122"/>
+                          <a:sym typeface="+mn-ea"/>
+                        </a:rPr>
+                        <a:t>開發工程師</a:t>
+                      </a:r>
+                      <a:endParaRPr lang="zh-CN" altLang="en-US" sz="1300" b="0" i="0" u="none" strike="noStrike" dirty="0">
+                        <a:solidFill>
+                          <a:srgbClr val="000000"/>
+                        </a:solidFill>
+                        <a:latin typeface="微软雅黑" panose="020B0503020204020204" pitchFamily="34" charset="-122"/>
+                        <a:ea typeface="微软雅黑" panose="020B0503020204020204" pitchFamily="34" charset="-122"/>
+                      </a:endParaRPr>
+                    </a:p>
+                  </a:txBody>
+                  <a:tcPr marL="10079" marR="10079" marT="10080" marB="0" anchor="ctr">
+                    <a:lnL w="6350" cap="flat" cmpd="sng" algn="ctr">
+                      <a:solidFill>
+                        <a:srgbClr val="000000"/>
+                      </a:solidFill>
+                      <a:prstDash val="solid"/>
+                      <a:round/>
+                      <a:headEnd type="none" w="med" len="med"/>
+                      <a:tailEnd type="none" w="med" len="med"/>
+                    </a:lnL>
+                    <a:lnR w="6350" cap="flat" cmpd="sng" algn="ctr">
+                      <a:solidFill>
+                        <a:srgbClr val="000000"/>
+                      </a:solidFill>
+                      <a:prstDash val="solid"/>
+                      <a:round/>
+                      <a:headEnd type="none" w="med" len="med"/>
+                      <a:tailEnd type="none" w="med" len="med"/>
+                    </a:lnR>
+                    <a:lnT w="6350" cap="flat" cmpd="sng" algn="ctr">
+                      <a:solidFill>
+                        <a:srgbClr val="000000"/>
+                      </a:solidFill>
+                      <a:prstDash val="solid"/>
+                      <a:round/>
+                      <a:headEnd type="none" w="med" len="med"/>
+                      <a:tailEnd type="none" w="med" len="med"/>
+                    </a:lnT>
+                    <a:lnB w="6350" cap="flat" cmpd="sng" algn="ctr">
+                      <a:solidFill>
+                        <a:srgbClr val="000000"/>
+                      </a:solidFill>
+                      <a:prstDash val="solid"/>
+                      <a:round/>
+                      <a:headEnd type="none" w="med" len="med"/>
+                      <a:tailEnd type="none" w="med" len="med"/>
+                    </a:lnB>
+                  </a:tcPr>
+                </a:tc>
+                <a:tc hMerge="1">
+                  <a:tcPr/>
+                </a:tc>
+                <a:tc hMerge="1">
+                  <a:tcPr/>
+                </a:tc>
+                <a:tc gridSpan="3">
+                  <a:txBody>
+                    <a:bodyPr/>
+                    <a:lstStyle/>
+                    <a:p>
+                      <a:r>
+                        <a:rPr lang="zh-TW" altLang="en-US" sz="1400" dirty="0"/>
+                        <a:t>山西移動</a:t>
+                      </a:r>
+                      <a:r>
+                        <a:rPr lang="en-US" altLang="zh-TW" sz="1400" dirty="0"/>
+                        <a:t>OA</a:t>
+                      </a:r>
+                      <a:r>
+                        <a:rPr lang="zh-TW" altLang="en-US" sz="1400" dirty="0"/>
+                        <a:t>、陽煤在線學習</a:t>
+                      </a:r>
+                      <a:r>
+                        <a:rPr lang="en-US" altLang="zh-TW" sz="1400" dirty="0"/>
+                        <a:t>App iOS</a:t>
+                      </a:r>
+                      <a:r>
+                        <a:rPr lang="zh-TW" altLang="en-US" sz="1400" dirty="0"/>
+                        <a:t>版本開發</a:t>
+                      </a:r>
+                      <a:endParaRPr lang="zh-TW" altLang="en-US" sz="1400" dirty="0"/>
+                    </a:p>
+                  </a:txBody>
+                  <a:tcPr marL="10079" marR="10079" marT="10080" marB="0" anchor="ctr">
+                    <a:lnL w="6350" cap="flat" cmpd="sng" algn="ctr">
+                      <a:solidFill>
+                        <a:srgbClr val="000000"/>
+                      </a:solidFill>
+                      <a:prstDash val="solid"/>
+                      <a:round/>
+                      <a:headEnd type="none" w="med" len="med"/>
+                      <a:tailEnd type="none" w="med" len="med"/>
+                    </a:lnL>
+                    <a:lnR w="6350" cap="flat" cmpd="sng" algn="ctr">
+                      <a:solidFill>
+                        <a:srgbClr val="000000"/>
+                      </a:solidFill>
+                      <a:prstDash val="solid"/>
+                      <a:round/>
+                      <a:headEnd type="none" w="med" len="med"/>
+                      <a:tailEnd type="none" w="med" len="med"/>
+                    </a:lnR>
+                    <a:lnT w="6350" cap="flat" cmpd="sng" algn="ctr">
+                      <a:solidFill>
+                        <a:srgbClr val="000000"/>
+                      </a:solidFill>
+                      <a:prstDash val="solid"/>
+                      <a:round/>
+                      <a:headEnd type="none" w="med" len="med"/>
+                      <a:tailEnd type="none" w="med" len="med"/>
+                    </a:lnT>
+                    <a:lnB w="6350" cap="flat" cmpd="sng" algn="ctr">
+                      <a:solidFill>
+                        <a:srgbClr val="000000"/>
+                      </a:solidFill>
+                      <a:prstDash val="solid"/>
+                      <a:round/>
+                      <a:headEnd type="none" w="med" len="med"/>
+                      <a:tailEnd type="none" w="med" len="med"/>
+                    </a:lnB>
+                  </a:tcPr>
+                </a:tc>
+                <a:tc hMerge="1">
+                  <a:tcPr/>
+                </a:tc>
+                <a:tc hMerge="1">
                   <a:tcPr/>
                 </a:tc>
               </a:tr>
@@ -15474,8 +16315,8 @@
                         <a:solidFill>
                           <a:srgbClr val="000000"/>
                         </a:solidFill>
-                        <a:latin typeface="微软雅黑" pitchFamily="34" charset="-122"/>
-                        <a:ea typeface="微软雅黑" pitchFamily="34" charset="-122"/>
+                        <a:latin typeface="微软雅黑" panose="020B0503020204020204" pitchFamily="34" charset="-122"/>
+                        <a:ea typeface="微软雅黑" panose="020B0503020204020204" pitchFamily="34" charset="-122"/>
                       </a:endParaRPr>
                     </a:p>
                   </a:txBody>
@@ -15519,13 +16360,6 @@
                   </a:tcPr>
                 </a:tc>
                 <a:tc hMerge="1">
-                  <a:txBody>
-                    <a:bodyPr/>
-                    <a:lstStyle/>
-                    <a:p>
-                      <a:endParaRPr lang="zh-CN" altLang="en-US"/>
-                    </a:p>
-                  </a:txBody>
                   <a:tcPr/>
                 </a:tc>
                 <a:tc>
@@ -15538,8 +16372,8 @@
                         <a:solidFill>
                           <a:srgbClr val="000000"/>
                         </a:solidFill>
-                        <a:latin typeface="微软雅黑" pitchFamily="34" charset="-122"/>
-                        <a:ea typeface="微软雅黑" pitchFamily="34" charset="-122"/>
+                        <a:latin typeface="微软雅黑" panose="020B0503020204020204" pitchFamily="34" charset="-122"/>
+                        <a:ea typeface="微软雅黑" panose="020B0503020204020204" pitchFamily="34" charset="-122"/>
                       </a:endParaRPr>
                     </a:p>
                   </a:txBody>
@@ -15592,8 +16426,8 @@
                         <a:solidFill>
                           <a:srgbClr val="000000"/>
                         </a:solidFill>
-                        <a:latin typeface="微软雅黑" pitchFamily="34" charset="-122"/>
-                        <a:ea typeface="微软雅黑" pitchFamily="34" charset="-122"/>
+                        <a:latin typeface="微软雅黑" panose="020B0503020204020204" pitchFamily="34" charset="-122"/>
+                        <a:ea typeface="微软雅黑" panose="020B0503020204020204" pitchFamily="34" charset="-122"/>
                       </a:endParaRPr>
                     </a:p>
                   </a:txBody>
@@ -15637,23 +16471,9 @@
                   </a:tcPr>
                 </a:tc>
                 <a:tc hMerge="1">
-                  <a:txBody>
-                    <a:bodyPr/>
-                    <a:lstStyle/>
-                    <a:p>
-                      <a:endParaRPr lang="zh-CN" altLang="en-US"/>
-                    </a:p>
-                  </a:txBody>
                   <a:tcPr/>
                 </a:tc>
                 <a:tc hMerge="1">
-                  <a:txBody>
-                    <a:bodyPr/>
-                    <a:lstStyle/>
-                    <a:p>
-                      <a:endParaRPr lang="zh-CN" altLang="en-US"/>
-                    </a:p>
-                  </a:txBody>
                   <a:tcPr/>
                 </a:tc>
                 <a:tc gridSpan="3">
@@ -15704,806 +16524,9 @@
                   </a:tcPr>
                 </a:tc>
                 <a:tc hMerge="1">
-                  <a:txBody>
-                    <a:bodyPr/>
-                    <a:lstStyle/>
-                    <a:p>
-                      <a:endParaRPr lang="zh-CN" altLang="en-US"/>
-                    </a:p>
-                  </a:txBody>
                   <a:tcPr/>
                 </a:tc>
                 <a:tc hMerge="1">
-                  <a:txBody>
-                    <a:bodyPr/>
-                    <a:lstStyle/>
-                    <a:p>
-                      <a:endParaRPr lang="zh-CN" altLang="en-US"/>
-                    </a:p>
-                  </a:txBody>
-                  <a:tcPr/>
-                </a:tc>
-              </a:tr>
-              <a:tr h="423378">
-                <a:tc gridSpan="2">
-                  <a:txBody>
-                    <a:bodyPr/>
-                    <a:lstStyle/>
-                    <a:p>
-                      <a:pPr algn="ctr" fontAlgn="ctr"/>
-                      <a:endParaRPr lang="en-US" altLang="zh-CN" sz="1300" b="0" i="0" u="none" strike="noStrike" dirty="0">
-                        <a:solidFill>
-                          <a:srgbClr val="000000"/>
-                        </a:solidFill>
-                        <a:latin typeface="微软雅黑" pitchFamily="34" charset="-122"/>
-                        <a:ea typeface="微软雅黑" pitchFamily="34" charset="-122"/>
-                      </a:endParaRPr>
-                    </a:p>
-                  </a:txBody>
-                  <a:tcPr marL="10079" marR="10079" marT="10080" marB="0" anchor="ctr">
-                    <a:lnL w="6350" cap="flat" cmpd="sng" algn="ctr">
-                      <a:solidFill>
-                        <a:srgbClr val="000000"/>
-                      </a:solidFill>
-                      <a:prstDash val="solid"/>
-                      <a:round/>
-                      <a:headEnd type="none" w="med" len="med"/>
-                      <a:tailEnd type="none" w="med" len="med"/>
-                    </a:lnL>
-                    <a:lnR w="6350" cap="flat" cmpd="sng" algn="ctr">
-                      <a:solidFill>
-                        <a:srgbClr val="000000"/>
-                      </a:solidFill>
-                      <a:prstDash val="solid"/>
-                      <a:round/>
-                      <a:headEnd type="none" w="med" len="med"/>
-                      <a:tailEnd type="none" w="med" len="med"/>
-                    </a:lnR>
-                    <a:lnT w="6350" cap="flat" cmpd="sng" algn="ctr">
-                      <a:solidFill>
-                        <a:srgbClr val="000000"/>
-                      </a:solidFill>
-                      <a:prstDash val="solid"/>
-                      <a:round/>
-                      <a:headEnd type="none" w="med" len="med"/>
-                      <a:tailEnd type="none" w="med" len="med"/>
-                    </a:lnT>
-                    <a:lnB w="6350" cap="flat" cmpd="sng" algn="ctr">
-                      <a:solidFill>
-                        <a:srgbClr val="000000"/>
-                      </a:solidFill>
-                      <a:prstDash val="solid"/>
-                      <a:round/>
-                      <a:headEnd type="none" w="med" len="med"/>
-                      <a:tailEnd type="none" w="med" len="med"/>
-                    </a:lnB>
-                  </a:tcPr>
-                </a:tc>
-                <a:tc hMerge="1">
-                  <a:txBody>
-                    <a:bodyPr/>
-                    <a:lstStyle/>
-                    <a:p>
-                      <a:endParaRPr lang="zh-CN" altLang="en-US"/>
-                    </a:p>
-                  </a:txBody>
-                  <a:tcPr/>
-                </a:tc>
-                <a:tc>
-                  <a:txBody>
-                    <a:bodyPr/>
-                    <a:lstStyle/>
-                    <a:p>
-                      <a:pPr algn="ctr" fontAlgn="ctr"/>
-                      <a:endParaRPr lang="zh-CN" altLang="en-US" sz="1300" b="0" i="0" u="none" strike="noStrike" dirty="0">
-                        <a:solidFill>
-                          <a:srgbClr val="000000"/>
-                        </a:solidFill>
-                        <a:latin typeface="微软雅黑" pitchFamily="34" charset="-122"/>
-                        <a:ea typeface="微软雅黑" pitchFamily="34" charset="-122"/>
-                      </a:endParaRPr>
-                    </a:p>
-                  </a:txBody>
-                  <a:tcPr marL="10079" marR="10079" marT="10080" marB="0" anchor="ctr">
-                    <a:lnL w="6350" cap="flat" cmpd="sng" algn="ctr">
-                      <a:solidFill>
-                        <a:srgbClr val="000000"/>
-                      </a:solidFill>
-                      <a:prstDash val="solid"/>
-                      <a:round/>
-                      <a:headEnd type="none" w="med" len="med"/>
-                      <a:tailEnd type="none" w="med" len="med"/>
-                    </a:lnL>
-                    <a:lnR w="6350" cap="flat" cmpd="sng" algn="ctr">
-                      <a:solidFill>
-                        <a:srgbClr val="000000"/>
-                      </a:solidFill>
-                      <a:prstDash val="solid"/>
-                      <a:round/>
-                      <a:headEnd type="none" w="med" len="med"/>
-                      <a:tailEnd type="none" w="med" len="med"/>
-                    </a:lnR>
-                    <a:lnT w="6350" cap="flat" cmpd="sng" algn="ctr">
-                      <a:solidFill>
-                        <a:srgbClr val="000000"/>
-                      </a:solidFill>
-                      <a:prstDash val="solid"/>
-                      <a:round/>
-                      <a:headEnd type="none" w="med" len="med"/>
-                      <a:tailEnd type="none" w="med" len="med"/>
-                    </a:lnT>
-                    <a:lnB w="6350" cap="flat" cmpd="sng" algn="ctr">
-                      <a:solidFill>
-                        <a:srgbClr val="000000"/>
-                      </a:solidFill>
-                      <a:prstDash val="solid"/>
-                      <a:round/>
-                      <a:headEnd type="none" w="med" len="med"/>
-                      <a:tailEnd type="none" w="med" len="med"/>
-                    </a:lnB>
-                  </a:tcPr>
-                </a:tc>
-                <a:tc gridSpan="3">
-                  <a:txBody>
-                    <a:bodyPr/>
-                    <a:lstStyle/>
-                    <a:p>
-                      <a:pPr algn="ctr" fontAlgn="ctr"/>
-                      <a:endParaRPr lang="zh-CN" altLang="en-US" sz="1300" b="0" i="0" u="none" strike="noStrike" dirty="0">
-                        <a:solidFill>
-                          <a:srgbClr val="000000"/>
-                        </a:solidFill>
-                        <a:latin typeface="微软雅黑" pitchFamily="34" charset="-122"/>
-                        <a:ea typeface="微软雅黑" pitchFamily="34" charset="-122"/>
-                      </a:endParaRPr>
-                    </a:p>
-                  </a:txBody>
-                  <a:tcPr marL="10079" marR="10079" marT="10080" marB="0" anchor="ctr">
-                    <a:lnL w="6350" cap="flat" cmpd="sng" algn="ctr">
-                      <a:solidFill>
-                        <a:srgbClr val="000000"/>
-                      </a:solidFill>
-                      <a:prstDash val="solid"/>
-                      <a:round/>
-                      <a:headEnd type="none" w="med" len="med"/>
-                      <a:tailEnd type="none" w="med" len="med"/>
-                    </a:lnL>
-                    <a:lnR w="6350" cap="flat" cmpd="sng" algn="ctr">
-                      <a:solidFill>
-                        <a:srgbClr val="000000"/>
-                      </a:solidFill>
-                      <a:prstDash val="solid"/>
-                      <a:round/>
-                      <a:headEnd type="none" w="med" len="med"/>
-                      <a:tailEnd type="none" w="med" len="med"/>
-                    </a:lnR>
-                    <a:lnT w="6350" cap="flat" cmpd="sng" algn="ctr">
-                      <a:solidFill>
-                        <a:srgbClr val="000000"/>
-                      </a:solidFill>
-                      <a:prstDash val="solid"/>
-                      <a:round/>
-                      <a:headEnd type="none" w="med" len="med"/>
-                      <a:tailEnd type="none" w="med" len="med"/>
-                    </a:lnT>
-                    <a:lnB w="6350" cap="flat" cmpd="sng" algn="ctr">
-                      <a:solidFill>
-                        <a:srgbClr val="000000"/>
-                      </a:solidFill>
-                      <a:prstDash val="solid"/>
-                      <a:round/>
-                      <a:headEnd type="none" w="med" len="med"/>
-                      <a:tailEnd type="none" w="med" len="med"/>
-                    </a:lnB>
-                  </a:tcPr>
-                </a:tc>
-                <a:tc hMerge="1">
-                  <a:txBody>
-                    <a:bodyPr/>
-                    <a:lstStyle/>
-                    <a:p>
-                      <a:endParaRPr lang="zh-CN" altLang="en-US"/>
-                    </a:p>
-                  </a:txBody>
-                  <a:tcPr/>
-                </a:tc>
-                <a:tc hMerge="1">
-                  <a:txBody>
-                    <a:bodyPr/>
-                    <a:lstStyle/>
-                    <a:p>
-                      <a:endParaRPr lang="zh-CN" altLang="en-US"/>
-                    </a:p>
-                  </a:txBody>
-                  <a:tcPr/>
-                </a:tc>
-                <a:tc gridSpan="3">
-                  <a:txBody>
-                    <a:bodyPr/>
-                    <a:lstStyle/>
-                    <a:p>
-                      <a:endParaRPr lang="zh-TW" altLang="en-US" dirty="0"/>
-                    </a:p>
-                  </a:txBody>
-                  <a:tcPr marL="10079" marR="10079" marT="10080" marB="0" anchor="ctr">
-                    <a:lnL w="6350" cap="flat" cmpd="sng" algn="ctr">
-                      <a:solidFill>
-                        <a:srgbClr val="000000"/>
-                      </a:solidFill>
-                      <a:prstDash val="solid"/>
-                      <a:round/>
-                      <a:headEnd type="none" w="med" len="med"/>
-                      <a:tailEnd type="none" w="med" len="med"/>
-                    </a:lnL>
-                    <a:lnR w="6350" cap="flat" cmpd="sng" algn="ctr">
-                      <a:solidFill>
-                        <a:srgbClr val="000000"/>
-                      </a:solidFill>
-                      <a:prstDash val="solid"/>
-                      <a:round/>
-                      <a:headEnd type="none" w="med" len="med"/>
-                      <a:tailEnd type="none" w="med" len="med"/>
-                    </a:lnR>
-                    <a:lnT w="6350" cap="flat" cmpd="sng" algn="ctr">
-                      <a:solidFill>
-                        <a:srgbClr val="000000"/>
-                      </a:solidFill>
-                      <a:prstDash val="solid"/>
-                      <a:round/>
-                      <a:headEnd type="none" w="med" len="med"/>
-                      <a:tailEnd type="none" w="med" len="med"/>
-                    </a:lnT>
-                    <a:lnB w="6350" cap="flat" cmpd="sng" algn="ctr">
-                      <a:solidFill>
-                        <a:srgbClr val="000000"/>
-                      </a:solidFill>
-                      <a:prstDash val="solid"/>
-                      <a:round/>
-                      <a:headEnd type="none" w="med" len="med"/>
-                      <a:tailEnd type="none" w="med" len="med"/>
-                    </a:lnB>
-                  </a:tcPr>
-                </a:tc>
-                <a:tc hMerge="1">
-                  <a:txBody>
-                    <a:bodyPr/>
-                    <a:lstStyle/>
-                    <a:p>
-                      <a:endParaRPr lang="zh-CN" altLang="en-US"/>
-                    </a:p>
-                  </a:txBody>
-                  <a:tcPr/>
-                </a:tc>
-                <a:tc hMerge="1">
-                  <a:txBody>
-                    <a:bodyPr/>
-                    <a:lstStyle/>
-                    <a:p>
-                      <a:endParaRPr lang="zh-CN" altLang="en-US"/>
-                    </a:p>
-                  </a:txBody>
-                  <a:tcPr/>
-                </a:tc>
-              </a:tr>
-              <a:tr h="423378">
-                <a:tc gridSpan="2">
-                  <a:txBody>
-                    <a:bodyPr/>
-                    <a:lstStyle/>
-                    <a:p>
-                      <a:pPr algn="ctr" fontAlgn="ctr"/>
-                      <a:endParaRPr lang="en-US" altLang="zh-CN" sz="1300" b="0" i="0" u="none" strike="noStrike" dirty="0">
-                        <a:solidFill>
-                          <a:srgbClr val="000000"/>
-                        </a:solidFill>
-                        <a:latin typeface="微软雅黑" pitchFamily="34" charset="-122"/>
-                        <a:ea typeface="微软雅黑" pitchFamily="34" charset="-122"/>
-                      </a:endParaRPr>
-                    </a:p>
-                  </a:txBody>
-                  <a:tcPr marL="10079" marR="10079" marT="10080" marB="0" anchor="ctr">
-                    <a:lnL w="6350" cap="flat" cmpd="sng" algn="ctr">
-                      <a:solidFill>
-                        <a:srgbClr val="000000"/>
-                      </a:solidFill>
-                      <a:prstDash val="solid"/>
-                      <a:round/>
-                      <a:headEnd type="none" w="med" len="med"/>
-                      <a:tailEnd type="none" w="med" len="med"/>
-                    </a:lnL>
-                    <a:lnR w="6350" cap="flat" cmpd="sng" algn="ctr">
-                      <a:solidFill>
-                        <a:srgbClr val="000000"/>
-                      </a:solidFill>
-                      <a:prstDash val="solid"/>
-                      <a:round/>
-                      <a:headEnd type="none" w="med" len="med"/>
-                      <a:tailEnd type="none" w="med" len="med"/>
-                    </a:lnR>
-                    <a:lnT w="6350" cap="flat" cmpd="sng" algn="ctr">
-                      <a:solidFill>
-                        <a:srgbClr val="000000"/>
-                      </a:solidFill>
-                      <a:prstDash val="solid"/>
-                      <a:round/>
-                      <a:headEnd type="none" w="med" len="med"/>
-                      <a:tailEnd type="none" w="med" len="med"/>
-                    </a:lnT>
-                    <a:lnB w="6350" cap="flat" cmpd="sng" algn="ctr">
-                      <a:solidFill>
-                        <a:srgbClr val="000000"/>
-                      </a:solidFill>
-                      <a:prstDash val="solid"/>
-                      <a:round/>
-                      <a:headEnd type="none" w="med" len="med"/>
-                      <a:tailEnd type="none" w="med" len="med"/>
-                    </a:lnB>
-                  </a:tcPr>
-                </a:tc>
-                <a:tc hMerge="1">
-                  <a:txBody>
-                    <a:bodyPr/>
-                    <a:lstStyle/>
-                    <a:p>
-                      <a:endParaRPr lang="zh-CN" altLang="en-US"/>
-                    </a:p>
-                  </a:txBody>
-                  <a:tcPr/>
-                </a:tc>
-                <a:tc>
-                  <a:txBody>
-                    <a:bodyPr/>
-                    <a:lstStyle/>
-                    <a:p>
-                      <a:pPr algn="ctr" fontAlgn="ctr"/>
-                      <a:endParaRPr lang="zh-CN" altLang="en-US" sz="1300" b="0" i="0" u="none" strike="noStrike" dirty="0">
-                        <a:solidFill>
-                          <a:srgbClr val="000000"/>
-                        </a:solidFill>
-                        <a:latin typeface="微软雅黑" pitchFamily="34" charset="-122"/>
-                        <a:ea typeface="微软雅黑" pitchFamily="34" charset="-122"/>
-                      </a:endParaRPr>
-                    </a:p>
-                  </a:txBody>
-                  <a:tcPr marL="10079" marR="10079" marT="10080" marB="0" anchor="ctr">
-                    <a:lnL w="6350" cap="flat" cmpd="sng" algn="ctr">
-                      <a:solidFill>
-                        <a:srgbClr val="000000"/>
-                      </a:solidFill>
-                      <a:prstDash val="solid"/>
-                      <a:round/>
-                      <a:headEnd type="none" w="med" len="med"/>
-                      <a:tailEnd type="none" w="med" len="med"/>
-                    </a:lnL>
-                    <a:lnR w="6350" cap="flat" cmpd="sng" algn="ctr">
-                      <a:solidFill>
-                        <a:srgbClr val="000000"/>
-                      </a:solidFill>
-                      <a:prstDash val="solid"/>
-                      <a:round/>
-                      <a:headEnd type="none" w="med" len="med"/>
-                      <a:tailEnd type="none" w="med" len="med"/>
-                    </a:lnR>
-                    <a:lnT w="6350" cap="flat" cmpd="sng" algn="ctr">
-                      <a:solidFill>
-                        <a:srgbClr val="000000"/>
-                      </a:solidFill>
-                      <a:prstDash val="solid"/>
-                      <a:round/>
-                      <a:headEnd type="none" w="med" len="med"/>
-                      <a:tailEnd type="none" w="med" len="med"/>
-                    </a:lnT>
-                    <a:lnB w="6350" cap="flat" cmpd="sng" algn="ctr">
-                      <a:solidFill>
-                        <a:srgbClr val="000000"/>
-                      </a:solidFill>
-                      <a:prstDash val="solid"/>
-                      <a:round/>
-                      <a:headEnd type="none" w="med" len="med"/>
-                      <a:tailEnd type="none" w="med" len="med"/>
-                    </a:lnB>
-                  </a:tcPr>
-                </a:tc>
-                <a:tc gridSpan="3">
-                  <a:txBody>
-                    <a:bodyPr/>
-                    <a:lstStyle/>
-                    <a:p>
-                      <a:pPr algn="ctr" fontAlgn="ctr"/>
-                      <a:endParaRPr lang="zh-CN" altLang="en-US" sz="1300" b="0" i="0" u="none" strike="noStrike" dirty="0">
-                        <a:solidFill>
-                          <a:srgbClr val="000000"/>
-                        </a:solidFill>
-                        <a:latin typeface="微软雅黑" pitchFamily="34" charset="-122"/>
-                        <a:ea typeface="微软雅黑" pitchFamily="34" charset="-122"/>
-                      </a:endParaRPr>
-                    </a:p>
-                  </a:txBody>
-                  <a:tcPr marL="10079" marR="10079" marT="10080" marB="0" anchor="ctr">
-                    <a:lnL w="6350" cap="flat" cmpd="sng" algn="ctr">
-                      <a:solidFill>
-                        <a:srgbClr val="000000"/>
-                      </a:solidFill>
-                      <a:prstDash val="solid"/>
-                      <a:round/>
-                      <a:headEnd type="none" w="med" len="med"/>
-                      <a:tailEnd type="none" w="med" len="med"/>
-                    </a:lnL>
-                    <a:lnR w="6350" cap="flat" cmpd="sng" algn="ctr">
-                      <a:solidFill>
-                        <a:srgbClr val="000000"/>
-                      </a:solidFill>
-                      <a:prstDash val="solid"/>
-                      <a:round/>
-                      <a:headEnd type="none" w="med" len="med"/>
-                      <a:tailEnd type="none" w="med" len="med"/>
-                    </a:lnR>
-                    <a:lnT w="6350" cap="flat" cmpd="sng" algn="ctr">
-                      <a:solidFill>
-                        <a:srgbClr val="000000"/>
-                      </a:solidFill>
-                      <a:prstDash val="solid"/>
-                      <a:round/>
-                      <a:headEnd type="none" w="med" len="med"/>
-                      <a:tailEnd type="none" w="med" len="med"/>
-                    </a:lnT>
-                    <a:lnB w="6350" cap="flat" cmpd="sng" algn="ctr">
-                      <a:solidFill>
-                        <a:srgbClr val="000000"/>
-                      </a:solidFill>
-                      <a:prstDash val="solid"/>
-                      <a:round/>
-                      <a:headEnd type="none" w="med" len="med"/>
-                      <a:tailEnd type="none" w="med" len="med"/>
-                    </a:lnB>
-                  </a:tcPr>
-                </a:tc>
-                <a:tc hMerge="1">
-                  <a:txBody>
-                    <a:bodyPr/>
-                    <a:lstStyle/>
-                    <a:p>
-                      <a:endParaRPr lang="zh-CN" altLang="en-US"/>
-                    </a:p>
-                  </a:txBody>
-                  <a:tcPr/>
-                </a:tc>
-                <a:tc hMerge="1">
-                  <a:txBody>
-                    <a:bodyPr/>
-                    <a:lstStyle/>
-                    <a:p>
-                      <a:endParaRPr lang="zh-CN" altLang="en-US"/>
-                    </a:p>
-                  </a:txBody>
-                  <a:tcPr/>
-                </a:tc>
-                <a:tc gridSpan="3">
-                  <a:txBody>
-                    <a:bodyPr/>
-                    <a:lstStyle/>
-                    <a:p>
-                      <a:endParaRPr lang="zh-TW" altLang="en-US" dirty="0"/>
-                    </a:p>
-                  </a:txBody>
-                  <a:tcPr marL="10079" marR="10079" marT="10080" marB="0" anchor="ctr">
-                    <a:lnL w="6350" cap="flat" cmpd="sng" algn="ctr">
-                      <a:solidFill>
-                        <a:srgbClr val="000000"/>
-                      </a:solidFill>
-                      <a:prstDash val="solid"/>
-                      <a:round/>
-                      <a:headEnd type="none" w="med" len="med"/>
-                      <a:tailEnd type="none" w="med" len="med"/>
-                    </a:lnL>
-                    <a:lnR w="6350" cap="flat" cmpd="sng" algn="ctr">
-                      <a:solidFill>
-                        <a:srgbClr val="000000"/>
-                      </a:solidFill>
-                      <a:prstDash val="solid"/>
-                      <a:round/>
-                      <a:headEnd type="none" w="med" len="med"/>
-                      <a:tailEnd type="none" w="med" len="med"/>
-                    </a:lnR>
-                    <a:lnT w="6350" cap="flat" cmpd="sng" algn="ctr">
-                      <a:solidFill>
-                        <a:srgbClr val="000000"/>
-                      </a:solidFill>
-                      <a:prstDash val="solid"/>
-                      <a:round/>
-                      <a:headEnd type="none" w="med" len="med"/>
-                      <a:tailEnd type="none" w="med" len="med"/>
-                    </a:lnT>
-                    <a:lnB w="6350" cap="flat" cmpd="sng" algn="ctr">
-                      <a:solidFill>
-                        <a:srgbClr val="000000"/>
-                      </a:solidFill>
-                      <a:prstDash val="solid"/>
-                      <a:round/>
-                      <a:headEnd type="none" w="med" len="med"/>
-                      <a:tailEnd type="none" w="med" len="med"/>
-                    </a:lnB>
-                  </a:tcPr>
-                </a:tc>
-                <a:tc hMerge="1">
-                  <a:txBody>
-                    <a:bodyPr/>
-                    <a:lstStyle/>
-                    <a:p>
-                      <a:endParaRPr lang="zh-CN" altLang="en-US"/>
-                    </a:p>
-                  </a:txBody>
-                  <a:tcPr/>
-                </a:tc>
-                <a:tc hMerge="1">
-                  <a:txBody>
-                    <a:bodyPr/>
-                    <a:lstStyle/>
-                    <a:p>
-                      <a:endParaRPr lang="zh-CN" altLang="en-US"/>
-                    </a:p>
-                  </a:txBody>
-                  <a:tcPr/>
-                </a:tc>
-              </a:tr>
-              <a:tr h="423378">
-                <a:tc gridSpan="2">
-                  <a:txBody>
-                    <a:bodyPr/>
-                    <a:lstStyle/>
-                    <a:p>
-                      <a:pPr algn="ctr" fontAlgn="ctr"/>
-                      <a:endParaRPr lang="en-US" altLang="zh-CN" sz="1300" b="0" i="0" u="none" strike="noStrike" dirty="0">
-                        <a:solidFill>
-                          <a:srgbClr val="000000"/>
-                        </a:solidFill>
-                        <a:latin typeface="微软雅黑" pitchFamily="34" charset="-122"/>
-                        <a:ea typeface="微软雅黑" pitchFamily="34" charset="-122"/>
-                      </a:endParaRPr>
-                    </a:p>
-                  </a:txBody>
-                  <a:tcPr marL="10079" marR="10079" marT="10080" marB="0" anchor="ctr">
-                    <a:lnL w="6350" cap="flat" cmpd="sng" algn="ctr">
-                      <a:solidFill>
-                        <a:srgbClr val="000000"/>
-                      </a:solidFill>
-                      <a:prstDash val="solid"/>
-                      <a:round/>
-                      <a:headEnd type="none" w="med" len="med"/>
-                      <a:tailEnd type="none" w="med" len="med"/>
-                    </a:lnL>
-                    <a:lnR w="6350" cap="flat" cmpd="sng" algn="ctr">
-                      <a:solidFill>
-                        <a:srgbClr val="000000"/>
-                      </a:solidFill>
-                      <a:prstDash val="solid"/>
-                      <a:round/>
-                      <a:headEnd type="none" w="med" len="med"/>
-                      <a:tailEnd type="none" w="med" len="med"/>
-                    </a:lnR>
-                    <a:lnT w="6350" cap="flat" cmpd="sng" algn="ctr">
-                      <a:solidFill>
-                        <a:srgbClr val="000000"/>
-                      </a:solidFill>
-                      <a:prstDash val="solid"/>
-                      <a:round/>
-                      <a:headEnd type="none" w="med" len="med"/>
-                      <a:tailEnd type="none" w="med" len="med"/>
-                    </a:lnT>
-                    <a:lnB w="6350" cap="flat" cmpd="sng" algn="ctr">
-                      <a:solidFill>
-                        <a:srgbClr val="000000"/>
-                      </a:solidFill>
-                      <a:prstDash val="solid"/>
-                      <a:round/>
-                      <a:headEnd type="none" w="med" len="med"/>
-                      <a:tailEnd type="none" w="med" len="med"/>
-                    </a:lnB>
-                  </a:tcPr>
-                </a:tc>
-                <a:tc hMerge="1">
-                  <a:txBody>
-                    <a:bodyPr/>
-                    <a:lstStyle/>
-                    <a:p>
-                      <a:endParaRPr lang="zh-CN" altLang="en-US"/>
-                    </a:p>
-                  </a:txBody>
-                  <a:tcPr/>
-                </a:tc>
-                <a:tc>
-                  <a:txBody>
-                    <a:bodyPr/>
-                    <a:lstStyle/>
-                    <a:p>
-                      <a:pPr algn="ctr" fontAlgn="ctr"/>
-                      <a:endParaRPr lang="zh-CN" altLang="en-US" sz="1300" b="0" i="0" u="none" strike="noStrike" dirty="0">
-                        <a:solidFill>
-                          <a:srgbClr val="000000"/>
-                        </a:solidFill>
-                        <a:latin typeface="微软雅黑" pitchFamily="34" charset="-122"/>
-                        <a:ea typeface="微软雅黑" pitchFamily="34" charset="-122"/>
-                      </a:endParaRPr>
-                    </a:p>
-                  </a:txBody>
-                  <a:tcPr marL="10079" marR="10079" marT="10080" marB="0" anchor="ctr">
-                    <a:lnL w="6350" cap="flat" cmpd="sng" algn="ctr">
-                      <a:solidFill>
-                        <a:srgbClr val="000000"/>
-                      </a:solidFill>
-                      <a:prstDash val="solid"/>
-                      <a:round/>
-                      <a:headEnd type="none" w="med" len="med"/>
-                      <a:tailEnd type="none" w="med" len="med"/>
-                    </a:lnL>
-                    <a:lnR w="6350" cap="flat" cmpd="sng" algn="ctr">
-                      <a:solidFill>
-                        <a:srgbClr val="000000"/>
-                      </a:solidFill>
-                      <a:prstDash val="solid"/>
-                      <a:round/>
-                      <a:headEnd type="none" w="med" len="med"/>
-                      <a:tailEnd type="none" w="med" len="med"/>
-                    </a:lnR>
-                    <a:lnT w="6350" cap="flat" cmpd="sng" algn="ctr">
-                      <a:solidFill>
-                        <a:srgbClr val="000000"/>
-                      </a:solidFill>
-                      <a:prstDash val="solid"/>
-                      <a:round/>
-                      <a:headEnd type="none" w="med" len="med"/>
-                      <a:tailEnd type="none" w="med" len="med"/>
-                    </a:lnT>
-                    <a:lnB w="6350" cap="flat" cmpd="sng" algn="ctr">
-                      <a:solidFill>
-                        <a:srgbClr val="000000"/>
-                      </a:solidFill>
-                      <a:prstDash val="solid"/>
-                      <a:round/>
-                      <a:headEnd type="none" w="med" len="med"/>
-                      <a:tailEnd type="none" w="med" len="med"/>
-                    </a:lnB>
-                  </a:tcPr>
-                </a:tc>
-                <a:tc gridSpan="3">
-                  <a:txBody>
-                    <a:bodyPr/>
-                    <a:lstStyle/>
-                    <a:p>
-                      <a:pPr algn="ctr" fontAlgn="ctr"/>
-                      <a:endParaRPr lang="zh-CN" altLang="en-US" sz="1300" b="0" i="0" u="none" strike="noStrike" dirty="0">
-                        <a:solidFill>
-                          <a:srgbClr val="000000"/>
-                        </a:solidFill>
-                        <a:latin typeface="微软雅黑" pitchFamily="34" charset="-122"/>
-                        <a:ea typeface="微软雅黑" pitchFamily="34" charset="-122"/>
-                      </a:endParaRPr>
-                    </a:p>
-                  </a:txBody>
-                  <a:tcPr marL="10079" marR="10079" marT="10080" marB="0" anchor="ctr">
-                    <a:lnL w="6350" cap="flat" cmpd="sng" algn="ctr">
-                      <a:solidFill>
-                        <a:srgbClr val="000000"/>
-                      </a:solidFill>
-                      <a:prstDash val="solid"/>
-                      <a:round/>
-                      <a:headEnd type="none" w="med" len="med"/>
-                      <a:tailEnd type="none" w="med" len="med"/>
-                    </a:lnL>
-                    <a:lnR w="6350" cap="flat" cmpd="sng" algn="ctr">
-                      <a:solidFill>
-                        <a:srgbClr val="000000"/>
-                      </a:solidFill>
-                      <a:prstDash val="solid"/>
-                      <a:round/>
-                      <a:headEnd type="none" w="med" len="med"/>
-                      <a:tailEnd type="none" w="med" len="med"/>
-                    </a:lnR>
-                    <a:lnT w="6350" cap="flat" cmpd="sng" algn="ctr">
-                      <a:solidFill>
-                        <a:srgbClr val="000000"/>
-                      </a:solidFill>
-                      <a:prstDash val="solid"/>
-                      <a:round/>
-                      <a:headEnd type="none" w="med" len="med"/>
-                      <a:tailEnd type="none" w="med" len="med"/>
-                    </a:lnT>
-                    <a:lnB w="6350" cap="flat" cmpd="sng" algn="ctr">
-                      <a:solidFill>
-                        <a:srgbClr val="000000"/>
-                      </a:solidFill>
-                      <a:prstDash val="solid"/>
-                      <a:round/>
-                      <a:headEnd type="none" w="med" len="med"/>
-                      <a:tailEnd type="none" w="med" len="med"/>
-                    </a:lnB>
-                  </a:tcPr>
-                </a:tc>
-                <a:tc hMerge="1">
-                  <a:txBody>
-                    <a:bodyPr/>
-                    <a:lstStyle/>
-                    <a:p>
-                      <a:endParaRPr lang="zh-CN" altLang="en-US"/>
-                    </a:p>
-                  </a:txBody>
-                  <a:tcPr/>
-                </a:tc>
-                <a:tc hMerge="1">
-                  <a:txBody>
-                    <a:bodyPr/>
-                    <a:lstStyle/>
-                    <a:p>
-                      <a:endParaRPr lang="zh-CN" altLang="en-US"/>
-                    </a:p>
-                  </a:txBody>
-                  <a:tcPr/>
-                </a:tc>
-                <a:tc gridSpan="3">
-                  <a:txBody>
-                    <a:bodyPr/>
-                    <a:lstStyle/>
-                    <a:p>
-                      <a:endParaRPr lang="zh-TW" altLang="en-US"/>
-                    </a:p>
-                  </a:txBody>
-                  <a:tcPr marL="10079" marR="10079" marT="10080" marB="0" anchor="ctr">
-                    <a:lnL w="6350" cap="flat" cmpd="sng" algn="ctr">
-                      <a:solidFill>
-                        <a:srgbClr val="000000"/>
-                      </a:solidFill>
-                      <a:prstDash val="solid"/>
-                      <a:round/>
-                      <a:headEnd type="none" w="med" len="med"/>
-                      <a:tailEnd type="none" w="med" len="med"/>
-                    </a:lnL>
-                    <a:lnR w="6350" cap="flat" cmpd="sng" algn="ctr">
-                      <a:solidFill>
-                        <a:srgbClr val="000000"/>
-                      </a:solidFill>
-                      <a:prstDash val="solid"/>
-                      <a:round/>
-                      <a:headEnd type="none" w="med" len="med"/>
-                      <a:tailEnd type="none" w="med" len="med"/>
-                    </a:lnR>
-                    <a:lnT w="6350" cap="flat" cmpd="sng" algn="ctr">
-                      <a:solidFill>
-                        <a:srgbClr val="000000"/>
-                      </a:solidFill>
-                      <a:prstDash val="solid"/>
-                      <a:round/>
-                      <a:headEnd type="none" w="med" len="med"/>
-                      <a:tailEnd type="none" w="med" len="med"/>
-                    </a:lnT>
-                    <a:lnB w="6350" cap="flat" cmpd="sng" algn="ctr">
-                      <a:solidFill>
-                        <a:srgbClr val="000000"/>
-                      </a:solidFill>
-                      <a:prstDash val="solid"/>
-                      <a:round/>
-                      <a:headEnd type="none" w="med" len="med"/>
-                      <a:tailEnd type="none" w="med" len="med"/>
-                    </a:lnB>
-                  </a:tcPr>
-                </a:tc>
-                <a:tc hMerge="1">
-                  <a:txBody>
-                    <a:bodyPr/>
-                    <a:lstStyle/>
-                    <a:p>
-                      <a:endParaRPr lang="zh-CN" altLang="en-US"/>
-                    </a:p>
-                  </a:txBody>
-                  <a:tcPr/>
-                </a:tc>
-                <a:tc hMerge="1">
-                  <a:txBody>
-                    <a:bodyPr/>
-                    <a:lstStyle/>
-                    <a:p>
-                      <a:endParaRPr lang="zh-CN" altLang="en-US"/>
-                    </a:p>
-                  </a:txBody>
                   <a:tcPr/>
                 </a:tc>
               </a:tr>
@@ -16535,14 +16558,14 @@
           <a:p>
             <a:r>
               <a:rPr lang="zh-CN" altLang="en-US" dirty="0" smtClean="0">
-                <a:latin typeface="微软雅黑" pitchFamily="34" charset="-122"/>
-                <a:ea typeface="微软雅黑" pitchFamily="34" charset="-122"/>
+                <a:latin typeface="微软雅黑" panose="020B0503020204020204" pitchFamily="34" charset="-122"/>
+                <a:ea typeface="微软雅黑" panose="020B0503020204020204" pitchFamily="34" charset="-122"/>
               </a:rPr>
               <a:t>基础信息</a:t>
             </a:r>
             <a:endParaRPr lang="zh-CN" altLang="en-US" dirty="0">
-              <a:latin typeface="微软雅黑" pitchFamily="34" charset="-122"/>
-              <a:ea typeface="微软雅黑" pitchFamily="34" charset="-122"/>
+              <a:latin typeface="微软雅黑" panose="020B0503020204020204" pitchFamily="34" charset="-122"/>
+              <a:ea typeface="微软雅黑" panose="020B0503020204020204" pitchFamily="34" charset="-122"/>
             </a:endParaRPr>
           </a:p>
         </p:txBody>
@@ -16642,43 +16665,43 @@
           <a:p>
             <a:r>
               <a:rPr lang="zh-TW" altLang="en-US" sz="3000" dirty="0" smtClean="0">
-                <a:latin typeface="微软雅黑" pitchFamily="34" charset="-122"/>
-                <a:ea typeface="微软雅黑" pitchFamily="34" charset="-122"/>
+                <a:latin typeface="微软雅黑" panose="020B0503020204020204" pitchFamily="34" charset="-122"/>
+                <a:ea typeface="微软雅黑" panose="020B0503020204020204" pitchFamily="34" charset="-122"/>
               </a:rPr>
               <a:t>結合自身情况與實際開展工作，對能力項分別進行描述、</a:t>
             </a:r>
             <a:r>
               <a:rPr lang="zh-CN" altLang="en-US" sz="3000" b="1" dirty="0" smtClean="0">
-                <a:latin typeface="微软雅黑" pitchFamily="34" charset="-122"/>
-                <a:ea typeface="微软雅黑" pitchFamily="34" charset="-122"/>
+                <a:latin typeface="微软雅黑" panose="020B0503020204020204" pitchFamily="34" charset="-122"/>
+                <a:ea typeface="微软雅黑" panose="020B0503020204020204" pitchFamily="34" charset="-122"/>
               </a:rPr>
               <a:t>舉證</a:t>
             </a:r>
             <a:r>
               <a:rPr lang="en-US" altLang="zh-CN" sz="3000" b="1" dirty="0" smtClean="0">
-                <a:latin typeface="微软雅黑" pitchFamily="34" charset="-122"/>
-                <a:ea typeface="微软雅黑" pitchFamily="34" charset="-122"/>
+                <a:latin typeface="微软雅黑" panose="020B0503020204020204" pitchFamily="34" charset="-122"/>
+                <a:ea typeface="微软雅黑" panose="020B0503020204020204" pitchFamily="34" charset="-122"/>
               </a:rPr>
               <a:t>(</a:t>
             </a:r>
             <a:r>
               <a:rPr lang="zh-TW" altLang="en-US" sz="3000" b="1" dirty="0" smtClean="0">
-                <a:latin typeface="微软雅黑" pitchFamily="34" charset="-122"/>
-                <a:ea typeface="微软雅黑" pitchFamily="34" charset="-122"/>
+                <a:latin typeface="微软雅黑" panose="020B0503020204020204" pitchFamily="34" charset="-122"/>
+                <a:ea typeface="微软雅黑" panose="020B0503020204020204" pitchFamily="34" charset="-122"/>
               </a:rPr>
               <a:t>實際開展完成的工作</a:t>
             </a:r>
             <a:r>
               <a:rPr lang="en-US" altLang="zh-CN" sz="3000" b="1" dirty="0" smtClean="0">
-                <a:latin typeface="微软雅黑" pitchFamily="34" charset="-122"/>
-                <a:ea typeface="微软雅黑" pitchFamily="34" charset="-122"/>
+                <a:latin typeface="微软雅黑" panose="020B0503020204020204" pitchFamily="34" charset="-122"/>
+                <a:ea typeface="微软雅黑" panose="020B0503020204020204" pitchFamily="34" charset="-122"/>
               </a:rPr>
               <a:t>)</a:t>
             </a:r>
             <a:r>
               <a:rPr lang="zh-CN" altLang="en-US" sz="3000" dirty="0" smtClean="0">
-                <a:latin typeface="微软雅黑" pitchFamily="34" charset="-122"/>
-                <a:ea typeface="微软雅黑" pitchFamily="34" charset="-122"/>
+                <a:latin typeface="微软雅黑" panose="020B0503020204020204" pitchFamily="34" charset="-122"/>
+                <a:ea typeface="微软雅黑" panose="020B0503020204020204" pitchFamily="34" charset="-122"/>
               </a:rPr>
               <a:t>。</a:t>
             </a:r>
@@ -16687,8 +16710,8 @@
                 <a:solidFill>
                   <a:srgbClr val="FF0000"/>
                 </a:solidFill>
-                <a:latin typeface="微软雅黑" pitchFamily="34" charset="-122"/>
-                <a:ea typeface="微软雅黑" pitchFamily="34" charset="-122"/>
+                <a:latin typeface="微软雅黑" panose="020B0503020204020204" pitchFamily="34" charset="-122"/>
+                <a:ea typeface="微软雅黑" panose="020B0503020204020204" pitchFamily="34" charset="-122"/>
               </a:rPr>
               <a:t>----</a:t>
             </a:r>
@@ -16697,8 +16720,8 @@
                 <a:solidFill>
                   <a:srgbClr val="FF0000"/>
                 </a:solidFill>
-                <a:latin typeface="微软雅黑" pitchFamily="34" charset="-122"/>
-                <a:ea typeface="微软雅黑" pitchFamily="34" charset="-122"/>
+                <a:latin typeface="微软雅黑" panose="020B0503020204020204" pitchFamily="34" charset="-122"/>
+                <a:ea typeface="微软雅黑" panose="020B0503020204020204" pitchFamily="34" charset="-122"/>
               </a:rPr>
               <a:t>正式報告中此段文字刪除</a:t>
             </a:r>
@@ -16706,8 +16729,8 @@
               <a:solidFill>
                 <a:srgbClr val="FF0000"/>
               </a:solidFill>
-              <a:latin typeface="微软雅黑" pitchFamily="34" charset="-122"/>
-              <a:ea typeface="微软雅黑" pitchFamily="34" charset="-122"/>
+              <a:latin typeface="微软雅黑" panose="020B0503020204020204" pitchFamily="34" charset="-122"/>
+              <a:ea typeface="微软雅黑" panose="020B0503020204020204" pitchFamily="34" charset="-122"/>
             </a:endParaRPr>
           </a:p>
         </p:txBody>
@@ -16750,15 +16773,58 @@
             <a:pPr algn="ctr"/>
             <a:r>
               <a:rPr lang="zh-CN" altLang="en-US" sz="3000" dirty="0" smtClean="0">
-                <a:latin typeface="微软雅黑" pitchFamily="34" charset="-122"/>
-                <a:ea typeface="微软雅黑" pitchFamily="34" charset="-122"/>
+                <a:latin typeface="微软雅黑" panose="020B0503020204020204" pitchFamily="34" charset="-122"/>
+                <a:ea typeface="微软雅黑" panose="020B0503020204020204" pitchFamily="34" charset="-122"/>
               </a:rPr>
               <a:t>技能水平</a:t>
             </a:r>
             <a:endParaRPr lang="zh-CN" altLang="en-US" sz="3000" dirty="0">
-              <a:latin typeface="微软雅黑" pitchFamily="34" charset="-122"/>
-              <a:ea typeface="微软雅黑" pitchFamily="34" charset="-122"/>
+              <a:latin typeface="微软雅黑" panose="020B0503020204020204" pitchFamily="34" charset="-122"/>
+              <a:ea typeface="微软雅黑" panose="020B0503020204020204" pitchFamily="34" charset="-122"/>
             </a:endParaRPr>
+          </a:p>
+        </p:txBody>
+      </p:sp>
+      <p:sp>
+        <p:nvSpPr>
+          <p:cNvPr id="2" name="文本框 1"/>
+          <p:cNvSpPr txBox="1"/>
+          <p:nvPr/>
+        </p:nvSpPr>
+        <p:spPr>
+          <a:xfrm>
+            <a:off x="686435" y="3175000"/>
+            <a:ext cx="758825" cy="922020"/>
+          </a:xfrm>
+          <a:prstGeom prst="rect">
+            <a:avLst/>
+          </a:prstGeom>
+          <a:noFill/>
+        </p:spPr>
+        <p:txBody>
+          <a:bodyPr wrap="none" rtlCol="0">
+            <a:spAutoFit/>
+          </a:bodyPr>
+          <a:p>
+            <a:r>
+              <a:rPr lang="en-US" altLang="zh-CN"/>
+              <a:t>Git</a:t>
+            </a:r>
+            <a:endParaRPr lang="en-US" altLang="zh-CN"/>
+          </a:p>
+          <a:p>
+            <a:r>
+              <a:rPr lang="en-US" altLang="zh-CN"/>
+              <a:t>HTTP</a:t>
+            </a:r>
+            <a:endParaRPr lang="en-US" altLang="zh-CN"/>
+          </a:p>
+          <a:p>
+            <a:r>
+              <a:rPr lang="en-US" altLang="zh-CN"/>
+              <a:t>curl</a:t>
+            </a:r>
+            <a:endParaRPr lang="en-US" altLang="zh-CN"/>
           </a:p>
         </p:txBody>
       </p:sp>
@@ -16857,43 +16923,43 @@
           <a:p>
             <a:r>
               <a:rPr lang="zh-TW" altLang="en-US" sz="3000" dirty="0" smtClean="0">
-                <a:latin typeface="微软雅黑" pitchFamily="34" charset="-122"/>
-                <a:ea typeface="微软雅黑" pitchFamily="34" charset="-122"/>
+                <a:latin typeface="微软雅黑" panose="020B0503020204020204" pitchFamily="34" charset="-122"/>
+                <a:ea typeface="微软雅黑" panose="020B0503020204020204" pitchFamily="34" charset="-122"/>
               </a:rPr>
               <a:t>結合自身情况與實際開展工作，對能力項分別進行描述、</a:t>
             </a:r>
             <a:r>
               <a:rPr lang="zh-CN" altLang="en-US" sz="3000" b="1" dirty="0" smtClean="0">
-                <a:latin typeface="微软雅黑" pitchFamily="34" charset="-122"/>
-                <a:ea typeface="微软雅黑" pitchFamily="34" charset="-122"/>
+                <a:latin typeface="微软雅黑" panose="020B0503020204020204" pitchFamily="34" charset="-122"/>
+                <a:ea typeface="微软雅黑" panose="020B0503020204020204" pitchFamily="34" charset="-122"/>
               </a:rPr>
               <a:t>舉證</a:t>
             </a:r>
             <a:r>
               <a:rPr lang="en-US" altLang="zh-CN" sz="3000" b="1" dirty="0" smtClean="0">
-                <a:latin typeface="微软雅黑" pitchFamily="34" charset="-122"/>
-                <a:ea typeface="微软雅黑" pitchFamily="34" charset="-122"/>
+                <a:latin typeface="微软雅黑" panose="020B0503020204020204" pitchFamily="34" charset="-122"/>
+                <a:ea typeface="微软雅黑" panose="020B0503020204020204" pitchFamily="34" charset="-122"/>
               </a:rPr>
               <a:t>(</a:t>
             </a:r>
             <a:r>
               <a:rPr lang="zh-TW" altLang="en-US" sz="3000" b="1" dirty="0" smtClean="0">
-                <a:latin typeface="微软雅黑" pitchFamily="34" charset="-122"/>
-                <a:ea typeface="微软雅黑" pitchFamily="34" charset="-122"/>
+                <a:latin typeface="微软雅黑" panose="020B0503020204020204" pitchFamily="34" charset="-122"/>
+                <a:ea typeface="微软雅黑" panose="020B0503020204020204" pitchFamily="34" charset="-122"/>
               </a:rPr>
               <a:t>實際開展完成的工作</a:t>
             </a:r>
             <a:r>
               <a:rPr lang="en-US" altLang="zh-CN" sz="3000" b="1" dirty="0" smtClean="0">
-                <a:latin typeface="微软雅黑" pitchFamily="34" charset="-122"/>
-                <a:ea typeface="微软雅黑" pitchFamily="34" charset="-122"/>
+                <a:latin typeface="微软雅黑" panose="020B0503020204020204" pitchFamily="34" charset="-122"/>
+                <a:ea typeface="微软雅黑" panose="020B0503020204020204" pitchFamily="34" charset="-122"/>
               </a:rPr>
               <a:t>)</a:t>
             </a:r>
             <a:r>
               <a:rPr lang="zh-CN" altLang="en-US" sz="3000" dirty="0" smtClean="0">
-                <a:latin typeface="微软雅黑" pitchFamily="34" charset="-122"/>
-                <a:ea typeface="微软雅黑" pitchFamily="34" charset="-122"/>
+                <a:latin typeface="微软雅黑" panose="020B0503020204020204" pitchFamily="34" charset="-122"/>
+                <a:ea typeface="微软雅黑" panose="020B0503020204020204" pitchFamily="34" charset="-122"/>
               </a:rPr>
               <a:t>。</a:t>
             </a:r>
@@ -16902,8 +16968,8 @@
                 <a:solidFill>
                   <a:srgbClr val="FF0000"/>
                 </a:solidFill>
-                <a:latin typeface="微软雅黑" pitchFamily="34" charset="-122"/>
-                <a:ea typeface="微软雅黑" pitchFamily="34" charset="-122"/>
+                <a:latin typeface="微软雅黑" panose="020B0503020204020204" pitchFamily="34" charset="-122"/>
+                <a:ea typeface="微软雅黑" panose="020B0503020204020204" pitchFamily="34" charset="-122"/>
               </a:rPr>
               <a:t> </a:t>
             </a:r>
@@ -16912,8 +16978,8 @@
                 <a:solidFill>
                   <a:srgbClr val="FF0000"/>
                 </a:solidFill>
-                <a:latin typeface="微软雅黑" pitchFamily="34" charset="-122"/>
-                <a:ea typeface="微软雅黑" pitchFamily="34" charset="-122"/>
+                <a:latin typeface="微软雅黑" panose="020B0503020204020204" pitchFamily="34" charset="-122"/>
+                <a:ea typeface="微软雅黑" panose="020B0503020204020204" pitchFamily="34" charset="-122"/>
               </a:rPr>
               <a:t>----</a:t>
             </a:r>
@@ -16922,14 +16988,14 @@
                 <a:solidFill>
                   <a:srgbClr val="FF0000"/>
                 </a:solidFill>
-                <a:latin typeface="微软雅黑" pitchFamily="34" charset="-122"/>
-                <a:ea typeface="微软雅黑" pitchFamily="34" charset="-122"/>
+                <a:latin typeface="微软雅黑" panose="020B0503020204020204" pitchFamily="34" charset="-122"/>
+                <a:ea typeface="微软雅黑" panose="020B0503020204020204" pitchFamily="34" charset="-122"/>
               </a:rPr>
               <a:t>正式報告中此段文字刪除</a:t>
             </a:r>
             <a:endParaRPr lang="zh-CN" altLang="en-US" sz="2000" dirty="0">
-              <a:latin typeface="微软雅黑" pitchFamily="34" charset="-122"/>
-              <a:ea typeface="微软雅黑" pitchFamily="34" charset="-122"/>
+              <a:latin typeface="微软雅黑" panose="020B0503020204020204" pitchFamily="34" charset="-122"/>
+              <a:ea typeface="微软雅黑" panose="020B0503020204020204" pitchFamily="34" charset="-122"/>
             </a:endParaRPr>
           </a:p>
         </p:txBody>
@@ -16972,15 +17038,44 @@
             <a:pPr algn="ctr"/>
             <a:r>
               <a:rPr lang="zh-CN" altLang="en-US" sz="3000" dirty="0" smtClean="0">
-                <a:latin typeface="微软雅黑" pitchFamily="34" charset="-122"/>
-                <a:ea typeface="微软雅黑" pitchFamily="34" charset="-122"/>
+                <a:latin typeface="微软雅黑" panose="020B0503020204020204" pitchFamily="34" charset="-122"/>
+                <a:ea typeface="微软雅黑" panose="020B0503020204020204" pitchFamily="34" charset="-122"/>
               </a:rPr>
               <a:t>新技術應用</a:t>
             </a:r>
             <a:endParaRPr lang="zh-CN" altLang="en-US" sz="3000" dirty="0">
-              <a:latin typeface="微软雅黑" pitchFamily="34" charset="-122"/>
-              <a:ea typeface="微软雅黑" pitchFamily="34" charset="-122"/>
+              <a:latin typeface="微软雅黑" panose="020B0503020204020204" pitchFamily="34" charset="-122"/>
+              <a:ea typeface="微软雅黑" panose="020B0503020204020204" pitchFamily="34" charset="-122"/>
             </a:endParaRPr>
+          </a:p>
+        </p:txBody>
+      </p:sp>
+      <p:sp>
+        <p:nvSpPr>
+          <p:cNvPr id="2" name="文本框 1"/>
+          <p:cNvSpPr txBox="1"/>
+          <p:nvPr/>
+        </p:nvSpPr>
+        <p:spPr>
+          <a:xfrm>
+            <a:off x="1223010" y="3293110"/>
+            <a:ext cx="1271270" cy="368300"/>
+          </a:xfrm>
+          <a:prstGeom prst="rect">
+            <a:avLst/>
+          </a:prstGeom>
+          <a:noFill/>
+        </p:spPr>
+        <p:txBody>
+          <a:bodyPr wrap="none" rtlCol="0">
+            <a:spAutoFit/>
+          </a:bodyPr>
+          <a:p>
+            <a:r>
+              <a:rPr lang="en-US" altLang="zh-CN"/>
+              <a:t>ffmpeg\hls</a:t>
+            </a:r>
+            <a:endParaRPr lang="en-US" altLang="zh-CN"/>
           </a:p>
         </p:txBody>
       </p:sp>
@@ -17079,43 +17174,43 @@
           <a:p>
             <a:r>
               <a:rPr lang="zh-TW" altLang="en-US" sz="3000" dirty="0" smtClean="0">
-                <a:latin typeface="微软雅黑" pitchFamily="34" charset="-122"/>
-                <a:ea typeface="微软雅黑" pitchFamily="34" charset="-122"/>
+                <a:latin typeface="微软雅黑" panose="020B0503020204020204" pitchFamily="34" charset="-122"/>
+                <a:ea typeface="微软雅黑" panose="020B0503020204020204" pitchFamily="34" charset="-122"/>
               </a:rPr>
               <a:t>結合自身情况與實際開展工作，對能力項分別進行描述、</a:t>
             </a:r>
             <a:r>
               <a:rPr lang="zh-CN" altLang="en-US" sz="3000" b="1" dirty="0" smtClean="0">
-                <a:latin typeface="微软雅黑" pitchFamily="34" charset="-122"/>
-                <a:ea typeface="微软雅黑" pitchFamily="34" charset="-122"/>
+                <a:latin typeface="微软雅黑" panose="020B0503020204020204" pitchFamily="34" charset="-122"/>
+                <a:ea typeface="微软雅黑" panose="020B0503020204020204" pitchFamily="34" charset="-122"/>
               </a:rPr>
               <a:t>舉證</a:t>
             </a:r>
             <a:r>
               <a:rPr lang="en-US" altLang="zh-CN" sz="3000" b="1" dirty="0" smtClean="0">
-                <a:latin typeface="微软雅黑" pitchFamily="34" charset="-122"/>
-                <a:ea typeface="微软雅黑" pitchFamily="34" charset="-122"/>
+                <a:latin typeface="微软雅黑" panose="020B0503020204020204" pitchFamily="34" charset="-122"/>
+                <a:ea typeface="微软雅黑" panose="020B0503020204020204" pitchFamily="34" charset="-122"/>
               </a:rPr>
               <a:t>(</a:t>
             </a:r>
             <a:r>
               <a:rPr lang="zh-TW" altLang="en-US" sz="3000" b="1" dirty="0" smtClean="0">
-                <a:latin typeface="微软雅黑" pitchFamily="34" charset="-122"/>
-                <a:ea typeface="微软雅黑" pitchFamily="34" charset="-122"/>
+                <a:latin typeface="微软雅黑" panose="020B0503020204020204" pitchFamily="34" charset="-122"/>
+                <a:ea typeface="微软雅黑" panose="020B0503020204020204" pitchFamily="34" charset="-122"/>
               </a:rPr>
               <a:t>實際開展完成的工作</a:t>
             </a:r>
             <a:r>
               <a:rPr lang="en-US" altLang="zh-CN" sz="3000" b="1" dirty="0" smtClean="0">
-                <a:latin typeface="微软雅黑" pitchFamily="34" charset="-122"/>
-                <a:ea typeface="微软雅黑" pitchFamily="34" charset="-122"/>
+                <a:latin typeface="微软雅黑" panose="020B0503020204020204" pitchFamily="34" charset="-122"/>
+                <a:ea typeface="微软雅黑" panose="020B0503020204020204" pitchFamily="34" charset="-122"/>
               </a:rPr>
               <a:t>)</a:t>
             </a:r>
             <a:r>
               <a:rPr lang="zh-CN" altLang="en-US" sz="3000" dirty="0" smtClean="0">
-                <a:latin typeface="微软雅黑" pitchFamily="34" charset="-122"/>
-                <a:ea typeface="微软雅黑" pitchFamily="34" charset="-122"/>
+                <a:latin typeface="微软雅黑" panose="020B0503020204020204" pitchFamily="34" charset="-122"/>
+                <a:ea typeface="微软雅黑" panose="020B0503020204020204" pitchFamily="34" charset="-122"/>
               </a:rPr>
               <a:t>。</a:t>
             </a:r>
@@ -17124,8 +17219,8 @@
                 <a:solidFill>
                   <a:srgbClr val="FF0000"/>
                 </a:solidFill>
-                <a:latin typeface="微软雅黑" pitchFamily="34" charset="-122"/>
-                <a:ea typeface="微软雅黑" pitchFamily="34" charset="-122"/>
+                <a:latin typeface="微软雅黑" panose="020B0503020204020204" pitchFamily="34" charset="-122"/>
+                <a:ea typeface="微软雅黑" panose="020B0503020204020204" pitchFamily="34" charset="-122"/>
               </a:rPr>
               <a:t> </a:t>
             </a:r>
@@ -17134,8 +17229,8 @@
                 <a:solidFill>
                   <a:srgbClr val="FF0000"/>
                 </a:solidFill>
-                <a:latin typeface="微软雅黑" pitchFamily="34" charset="-122"/>
-                <a:ea typeface="微软雅黑" pitchFamily="34" charset="-122"/>
+                <a:latin typeface="微软雅黑" panose="020B0503020204020204" pitchFamily="34" charset="-122"/>
+                <a:ea typeface="微软雅黑" panose="020B0503020204020204" pitchFamily="34" charset="-122"/>
               </a:rPr>
               <a:t>----</a:t>
             </a:r>
@@ -17144,14 +17239,14 @@
                 <a:solidFill>
                   <a:srgbClr val="FF0000"/>
                 </a:solidFill>
-                <a:latin typeface="微软雅黑" pitchFamily="34" charset="-122"/>
-                <a:ea typeface="微软雅黑" pitchFamily="34" charset="-122"/>
+                <a:latin typeface="微软雅黑" panose="020B0503020204020204" pitchFamily="34" charset="-122"/>
+                <a:ea typeface="微软雅黑" panose="020B0503020204020204" pitchFamily="34" charset="-122"/>
               </a:rPr>
               <a:t>正式報告中此段文字刪除</a:t>
             </a:r>
             <a:endParaRPr lang="zh-CN" altLang="en-US" sz="2000" dirty="0">
-              <a:latin typeface="微软雅黑" pitchFamily="34" charset="-122"/>
-              <a:ea typeface="微软雅黑" pitchFamily="34" charset="-122"/>
+              <a:latin typeface="微软雅黑" panose="020B0503020204020204" pitchFamily="34" charset="-122"/>
+              <a:ea typeface="微软雅黑" panose="020B0503020204020204" pitchFamily="34" charset="-122"/>
             </a:endParaRPr>
           </a:p>
         </p:txBody>
@@ -17194,14 +17289,14 @@
             <a:pPr algn="ctr"/>
             <a:r>
               <a:rPr lang="zh-CN" altLang="en-US" sz="3000" dirty="0" smtClean="0">
-                <a:latin typeface="微软雅黑" pitchFamily="34" charset="-122"/>
-                <a:ea typeface="微软雅黑" pitchFamily="34" charset="-122"/>
+                <a:latin typeface="微软雅黑" panose="020B0503020204020204" pitchFamily="34" charset="-122"/>
+                <a:ea typeface="微软雅黑" panose="020B0503020204020204" pitchFamily="34" charset="-122"/>
               </a:rPr>
               <a:t>專案管理</a:t>
             </a:r>
             <a:endParaRPr lang="zh-CN" altLang="en-US" sz="3000" dirty="0">
-              <a:latin typeface="微软雅黑" pitchFamily="34" charset="-122"/>
-              <a:ea typeface="微软雅黑" pitchFamily="34" charset="-122"/>
+              <a:latin typeface="微软雅黑" panose="020B0503020204020204" pitchFamily="34" charset="-122"/>
+              <a:ea typeface="微软雅黑" panose="020B0503020204020204" pitchFamily="34" charset="-122"/>
             </a:endParaRPr>
           </a:p>
         </p:txBody>
@@ -17301,43 +17396,43 @@
           <a:p>
             <a:r>
               <a:rPr lang="zh-TW" altLang="en-US" sz="3000" dirty="0" smtClean="0">
-                <a:latin typeface="微软雅黑" pitchFamily="34" charset="-122"/>
-                <a:ea typeface="微软雅黑" pitchFamily="34" charset="-122"/>
+                <a:latin typeface="微软雅黑" panose="020B0503020204020204" pitchFamily="34" charset="-122"/>
+                <a:ea typeface="微软雅黑" panose="020B0503020204020204" pitchFamily="34" charset="-122"/>
               </a:rPr>
               <a:t>結合自身情况與實際開展工作，對能力項分別進行描述、</a:t>
             </a:r>
             <a:r>
               <a:rPr lang="zh-CN" altLang="en-US" sz="3000" b="1" dirty="0" smtClean="0">
-                <a:latin typeface="微软雅黑" pitchFamily="34" charset="-122"/>
-                <a:ea typeface="微软雅黑" pitchFamily="34" charset="-122"/>
+                <a:latin typeface="微软雅黑" panose="020B0503020204020204" pitchFamily="34" charset="-122"/>
+                <a:ea typeface="微软雅黑" panose="020B0503020204020204" pitchFamily="34" charset="-122"/>
               </a:rPr>
               <a:t>舉證</a:t>
             </a:r>
             <a:r>
               <a:rPr lang="en-US" altLang="zh-CN" sz="3000" b="1" dirty="0" smtClean="0">
-                <a:latin typeface="微软雅黑" pitchFamily="34" charset="-122"/>
-                <a:ea typeface="微软雅黑" pitchFamily="34" charset="-122"/>
+                <a:latin typeface="微软雅黑" panose="020B0503020204020204" pitchFamily="34" charset="-122"/>
+                <a:ea typeface="微软雅黑" panose="020B0503020204020204" pitchFamily="34" charset="-122"/>
               </a:rPr>
               <a:t>(</a:t>
             </a:r>
             <a:r>
               <a:rPr lang="zh-TW" altLang="en-US" sz="3000" b="1" dirty="0" smtClean="0">
-                <a:latin typeface="微软雅黑" pitchFamily="34" charset="-122"/>
-                <a:ea typeface="微软雅黑" pitchFamily="34" charset="-122"/>
+                <a:latin typeface="微软雅黑" panose="020B0503020204020204" pitchFamily="34" charset="-122"/>
+                <a:ea typeface="微软雅黑" panose="020B0503020204020204" pitchFamily="34" charset="-122"/>
               </a:rPr>
               <a:t>實際開展完成的工作</a:t>
             </a:r>
             <a:r>
               <a:rPr lang="en-US" altLang="zh-CN" sz="3000" b="1" dirty="0" smtClean="0">
-                <a:latin typeface="微软雅黑" pitchFamily="34" charset="-122"/>
-                <a:ea typeface="微软雅黑" pitchFamily="34" charset="-122"/>
+                <a:latin typeface="微软雅黑" panose="020B0503020204020204" pitchFamily="34" charset="-122"/>
+                <a:ea typeface="微软雅黑" panose="020B0503020204020204" pitchFamily="34" charset="-122"/>
               </a:rPr>
               <a:t>)</a:t>
             </a:r>
             <a:r>
               <a:rPr lang="zh-CN" altLang="en-US" sz="3000" dirty="0" smtClean="0">
-                <a:latin typeface="微软雅黑" pitchFamily="34" charset="-122"/>
-                <a:ea typeface="微软雅黑" pitchFamily="34" charset="-122"/>
+                <a:latin typeface="微软雅黑" panose="020B0503020204020204" pitchFamily="34" charset="-122"/>
+                <a:ea typeface="微软雅黑" panose="020B0503020204020204" pitchFamily="34" charset="-122"/>
               </a:rPr>
               <a:t>。</a:t>
             </a:r>
@@ -17346,8 +17441,8 @@
                 <a:solidFill>
                   <a:srgbClr val="FF0000"/>
                 </a:solidFill>
-                <a:latin typeface="微软雅黑" pitchFamily="34" charset="-122"/>
-                <a:ea typeface="微软雅黑" pitchFamily="34" charset="-122"/>
+                <a:latin typeface="微软雅黑" panose="020B0503020204020204" pitchFamily="34" charset="-122"/>
+                <a:ea typeface="微软雅黑" panose="020B0503020204020204" pitchFamily="34" charset="-122"/>
               </a:rPr>
               <a:t> </a:t>
             </a:r>
@@ -17356,8 +17451,8 @@
                 <a:solidFill>
                   <a:srgbClr val="FF0000"/>
                 </a:solidFill>
-                <a:latin typeface="微软雅黑" pitchFamily="34" charset="-122"/>
-                <a:ea typeface="微软雅黑" pitchFamily="34" charset="-122"/>
+                <a:latin typeface="微软雅黑" panose="020B0503020204020204" pitchFamily="34" charset="-122"/>
+                <a:ea typeface="微软雅黑" panose="020B0503020204020204" pitchFamily="34" charset="-122"/>
               </a:rPr>
               <a:t>----</a:t>
             </a:r>
@@ -17366,14 +17461,14 @@
                 <a:solidFill>
                   <a:srgbClr val="FF0000"/>
                 </a:solidFill>
-                <a:latin typeface="微软雅黑" pitchFamily="34" charset="-122"/>
-                <a:ea typeface="微软雅黑" pitchFamily="34" charset="-122"/>
+                <a:latin typeface="微软雅黑" panose="020B0503020204020204" pitchFamily="34" charset="-122"/>
+                <a:ea typeface="微软雅黑" panose="020B0503020204020204" pitchFamily="34" charset="-122"/>
               </a:rPr>
               <a:t>正式報告中此段文字刪除</a:t>
             </a:r>
             <a:endParaRPr lang="zh-CN" altLang="en-US" sz="2000" dirty="0">
-              <a:latin typeface="微软雅黑" pitchFamily="34" charset="-122"/>
-              <a:ea typeface="微软雅黑" pitchFamily="34" charset="-122"/>
+              <a:latin typeface="微软雅黑" panose="020B0503020204020204" pitchFamily="34" charset="-122"/>
+              <a:ea typeface="微软雅黑" panose="020B0503020204020204" pitchFamily="34" charset="-122"/>
             </a:endParaRPr>
           </a:p>
         </p:txBody>
@@ -17416,35 +17511,30 @@
             <a:pPr algn="ctr"/>
             <a:r>
               <a:rPr lang="zh-CN" altLang="en-US" sz="3000" dirty="0" smtClean="0">
-                <a:latin typeface="微软雅黑" pitchFamily="34" charset="-122"/>
-                <a:ea typeface="微软雅黑" pitchFamily="34" charset="-122"/>
+                <a:latin typeface="微软雅黑" panose="020B0503020204020204" pitchFamily="34" charset="-122"/>
+                <a:ea typeface="微软雅黑" panose="020B0503020204020204" pitchFamily="34" charset="-122"/>
               </a:rPr>
               <a:t>人才培育</a:t>
             </a:r>
             <a:endParaRPr lang="zh-CN" altLang="en-US" sz="3000" dirty="0">
-              <a:latin typeface="微软雅黑" pitchFamily="34" charset="-122"/>
-              <a:ea typeface="微软雅黑" pitchFamily="34" charset="-122"/>
+              <a:latin typeface="微软雅黑" panose="020B0503020204020204" pitchFamily="34" charset="-122"/>
+              <a:ea typeface="微软雅黑" panose="020B0503020204020204" pitchFamily="34" charset="-122"/>
             </a:endParaRPr>
           </a:p>
         </p:txBody>
       </p:sp>
     </p:spTree>
-    <p:extLst>
-      <p:ext uri="{BB962C8B-B14F-4D97-AF65-F5344CB8AC3E}">
-        <p14:creationId xmlns:p14="http://schemas.microsoft.com/office/powerpoint/2010/main" val="3902503150"/>
-      </p:ext>
-    </p:extLst>
   </p:cSld>
   <p:clrMapOvr>
     <a:masterClrMapping/>
   </p:clrMapOvr>
-  <mc:AlternateContent xmlns:mc="http://schemas.openxmlformats.org/markup-compatibility/2006" xmlns:p14="http://schemas.microsoft.com/office/powerpoint/2010/main">
-    <mc:Choice Requires="p14">
+  <mc:AlternateContent xmlns:mc="http://schemas.openxmlformats.org/markup-compatibility/2006">
+    <mc:Choice xmlns:p14="http://schemas.microsoft.com/office/powerpoint/2010/main" Requires="p14">
       <p:transition spd="med" p14:dur="700">
         <p:fade/>
       </p:transition>
     </mc:Choice>
-    <mc:Fallback xmlns="">
+    <mc:Fallback>
       <p:transition spd="med">
         <p:fade/>
       </p:transition>
@@ -17458,6 +17548,24 @@
     </p:tnLst>
   </p:timing>
 </p:sld>
+</file>
+
+<file path=ppt/tags/tag1.xml><?xml version="1.0" encoding="utf-8"?>
+<p:tagLst xmlns:p="http://schemas.openxmlformats.org/presentationml/2006/main">
+  <p:tag name="KSO_WM_UNIT_TABLE_BEAUTIFY" val="smartTable{34e14147-460d-4aa4-b07d-0228483648a5}"/>
+</p:tagLst>
+</file>
+
+<file path=ppt/tags/tag2.xml><?xml version="1.0" encoding="utf-8"?>
+<p:tagLst xmlns:p="http://schemas.openxmlformats.org/presentationml/2006/main">
+  <p:tag name="KSO_WM_UNIT_TABLE_BEAUTIFY" val="smartTable{ead9fbf2-027a-419e-873a-8ff35b7004bf}"/>
+</p:tagLst>
+</file>
+
+<file path=ppt/tags/tag3.xml><?xml version="1.0" encoding="utf-8"?>
+<p:tagLst xmlns:p="http://schemas.openxmlformats.org/presentationml/2006/main">
+  <p:tag name="KSO_WM_UNIT_TABLE_BEAUTIFY" val="smartTable{eedc54f5-1732-4d7f-b138-5bf2dcd09a77}"/>
+</p:tagLst>
 </file>
 
 <file path=ppt/theme/theme1.xml><?xml version="1.0" encoding="utf-8"?>
@@ -17711,8 +17819,6 @@
       </a:bgFillStyleLst>
     </a:fmtScheme>
   </a:themeElements>
-  <a:objectDefaults/>
-  <a:extraClrSchemeLst/>
   <a:extLst>
     <a:ext uri="{05A4C25C-085E-4340-85A3-A5531E510DB2}">
       <thm15:themeFamily xmlns:thm15="http://schemas.microsoft.com/office/thememl/2012/main" name="Office Theme" id="{62F939B6-93AF-4DB8-9C6B-D6C7DFDC589F}" vid="{4A3C46E8-61CC-4603-A589-7422A47A8E4A}"/>
@@ -17969,8 +18075,11 @@
       </a:bgFillStyleLst>
     </a:fmtScheme>
   </a:themeElements>
-  <a:objectDefaults/>
-  <a:extraClrSchemeLst/>
+  <a:extLst>
+    <a:ext uri="{05A4C25C-085E-4340-85A3-A5531E510DB2}">
+      <thm15:themeFamily xmlns:thm15="http://schemas.microsoft.com/office/thememl/2012/main" name="Office Theme" id="{62F939B6-93AF-4DB8-9C6B-D6C7DFDC589F}" vid="{4A3C46E8-61CC-4603-A589-7422A47A8E4A}"/>
+    </a:ext>
+  </a:extLst>
 </a:theme>
 </file>
 
@@ -18222,7 +18331,10 @@
       </a:bgFillStyleLst>
     </a:fmtScheme>
   </a:themeElements>
-  <a:objectDefaults/>
-  <a:extraClrSchemeLst/>
+  <a:extLst>
+    <a:ext uri="{05A4C25C-085E-4340-85A3-A5531E510DB2}">
+      <thm15:themeFamily xmlns:thm15="http://schemas.microsoft.com/office/thememl/2012/main" name="Office Theme" id="{62F939B6-93AF-4DB8-9C6B-D6C7DFDC589F}" vid="{4A3C46E8-61CC-4603-A589-7422A47A8E4A}"/>
+    </a:ext>
+  </a:extLst>
 </a:theme>
 </file>